--- a/presentation/SIH2026_Raysense_CORRECTED.pptx
+++ b/presentation/SIH2026_Raysense_CORRECTED.pptx
@@ -507,7 +507,7 @@
           <a:p>
             <a:r>
               <a:rPr lang="en-US" dirty="0"/>
-              <a:t>PRANAVI — 55s. Open with the PS ID and DRDO. Then the 93% / 11% contrast. Pause 3s after "eleven percent".</a:t>
+              <a:t>PRANAVI — 55s. PS ID + DRDO. Then 93% / 11%. PAUSE 3s after "eleven percent".</a:t>
             </a:r>
             <a:endParaRPr lang="en-US" dirty="0"/>
           </a:p>
@@ -595,7 +595,7 @@
           <a:p>
             <a:r>
               <a:rPr lang="en-US" dirty="0"/>
-              <a:t>JEEVIKA — 96s. Walk the three regions A / B / C. Land on "B and C are identical". Then the three-state map and the novelty claim.</a:t>
+              <a:t>JEEVIKA — 96s. Walk A / B / C. Land on "B and C are identical". Then the three states, then novelty.</a:t>
             </a:r>
             <a:endParaRPr lang="en-US" dirty="0"/>
           </a:p>
@@ -683,7 +683,7 @@
           <a:p>
             <a:r>
               <a:rPr lang="en-US" dirty="0"/>
-              <a:t>NIKITA — 84s. Lead with the quadratic: 0.7 m spacing at 10 m, 9 m at 30 m. That is why a 6 m ditch at 30 m is invisible. Then walk the pipeline.</a:t>
+              <a:t>NIKITA — 84s. 0.7 m spacing at 10 m, 9 m at 30 m. That is why a 6 m ditch at 30 m is invisible. Then the six steps.</a:t>
             </a:r>
             <a:endParaRPr lang="en-US" dirty="0"/>
           </a:p>
@@ -771,7 +771,7 @@
           <a:p>
             <a:r>
               <a:rPr lang="en-US" dirty="0"/>
-              <a:t>NIKITA — 48s. No new hardware. Ground truth is known not inferred. Then volunteer all three risks before being asked — especially that RELLIS has NOT been run.</a:t>
+              <a:t>NIKITA — 48s. No new hardware, ground truth known. Volunteer all three risks — especially that RELLIS has NOT been run.</a:t>
             </a:r>
             <a:endParaRPr lang="en-US" dirty="0"/>
           </a:p>
@@ -859,7 +859,7 @@
           <a:p>
             <a:r>
               <a:rPr lang="en-US" dirty="0"/>
-              <a:t>ANUJ — 66s. Warmest delivery. Three audiences, then land hard on 23 km/h and pause.</a:t>
+              <a:t>ANUJ — 66s. Warmest delivery. Three audiences, then land on 23 km/h and PAUSE.</a:t>
             </a:r>
             <a:endParaRPr lang="en-US" dirty="0"/>
           </a:p>
@@ -947,7 +947,7 @@
           <a:p>
             <a:r>
               <a:rPr lang="en-US" dirty="0"/>
-              <a:t>PRANAVI — 41s. We cite these BECAUSE the field exists — we did not invent adaptive lidar. Close on the three numbers, then stop.</a:t>
+              <a:t>PRANAVI — 41s. We cite these BECAUSE the field exists. Close on the three numbers and stop.</a:t>
             </a:r>
             <a:endParaRPr lang="en-US" dirty="0"/>
           </a:p>
@@ -1328,8 +1328,8 @@
         </p:nvSpPr>
         <p:spPr>
           <a:xfrm>
-            <a:off x="256032" y="146304"/>
-            <a:ext cx="1207008" cy="566928"/>
+            <a:off x="237744" y="128016"/>
+            <a:ext cx="1152144" cy="530352"/>
           </a:xfrm>
           <a:prstGeom prst="ellipse">
             <a:avLst/>
@@ -1353,8 +1353,8 @@
         </p:nvSpPr>
         <p:spPr>
           <a:xfrm>
-            <a:off x="256032" y="146304"/>
-            <a:ext cx="1207008" cy="566928"/>
+            <a:off x="237744" y="128016"/>
+            <a:ext cx="1152144" cy="530352"/>
           </a:xfrm>
           <a:prstGeom prst="rect">
             <a:avLst/>
@@ -1370,7 +1370,7 @@
               <a:buNone/>
             </a:pPr>
             <a:r>
-              <a:rPr lang="en-US" sz="1300" dirty="0">
+              <a:rPr lang="en-US" sz="1250" dirty="0">
                 <a:solidFill>
                   <a:srgbClr val="14181A"/>
                 </a:solidFill>
@@ -1380,7 +1380,7 @@
               </a:rPr>
               <a:t>Raysense</a:t>
             </a:r>
-            <a:endParaRPr lang="en-US" sz="1300" dirty="0"/>
+            <a:endParaRPr lang="en-US" sz="1250" dirty="0"/>
           </a:p>
         </p:txBody>
       </p:sp>
@@ -1400,8 +1400,8 @@
         </p:blipFill>
         <p:spPr>
           <a:xfrm>
-            <a:off x="10378440" y="91440"/>
-            <a:ext cx="1572768" cy="786384"/>
+            <a:off x="10469880" y="91440"/>
+            <a:ext cx="1481328" cy="585216"/>
           </a:xfrm>
           <a:prstGeom prst="rect">
             <a:avLst/>
@@ -1416,8 +1416,8 @@
         </p:nvSpPr>
         <p:spPr>
           <a:xfrm>
-            <a:off x="0" y="6437376"/>
-            <a:ext cx="12191695" cy="420624"/>
+            <a:off x="0" y="6473952"/>
+            <a:ext cx="12191695" cy="384048"/>
           </a:xfrm>
           <a:prstGeom prst="rect">
             <a:avLst/>
@@ -1436,8 +1436,8 @@
         </p:nvSpPr>
         <p:spPr>
           <a:xfrm>
-            <a:off x="0" y="6437376"/>
-            <a:ext cx="12191695" cy="420624"/>
+            <a:off x="0" y="6473952"/>
+            <a:ext cx="12191695" cy="384048"/>
           </a:xfrm>
           <a:prstGeom prst="rect">
             <a:avLst/>
@@ -1453,7 +1453,7 @@
               <a:buNone/>
             </a:pPr>
             <a:r>
-              <a:rPr lang="en-US" sz="1200" dirty="0">
+              <a:rPr lang="en-US" sz="1100" dirty="0">
                 <a:solidFill>
                   <a:srgbClr val="FFFFFF"/>
                 </a:solidFill>
@@ -1463,7 +1463,7 @@
               </a:rPr>
               <a:t>@SIH Idea submission- Template</a:t>
             </a:r>
-            <a:endParaRPr lang="en-US" sz="1200" dirty="0"/>
+            <a:endParaRPr lang="en-US" sz="1100" dirty="0"/>
           </a:p>
         </p:txBody>
       </p:sp>
@@ -1475,8 +1475,8 @@
         </p:nvSpPr>
         <p:spPr>
           <a:xfrm>
-            <a:off x="11277295" y="6437376"/>
-            <a:ext cx="548640" cy="420624"/>
+            <a:off x="11323015" y="6473952"/>
+            <a:ext cx="502920" cy="384048"/>
           </a:xfrm>
           <a:prstGeom prst="rect">
             <a:avLst/>
@@ -1492,7 +1492,7 @@
               <a:buNone/>
             </a:pPr>
             <a:r>
-              <a:rPr lang="en-US" sz="1200" b="1" dirty="0">
+              <a:rPr lang="en-US" sz="1100" b="1" dirty="0">
                 <a:solidFill>
                   <a:srgbClr val="FFFFFF"/>
                 </a:solidFill>
@@ -1502,7 +1502,7 @@
               </a:rPr>
               <a:t>1</a:t>
             </a:r>
-            <a:endParaRPr lang="en-US" sz="1200" dirty="0"/>
+            <a:endParaRPr lang="en-US" sz="1100" dirty="0"/>
           </a:p>
         </p:txBody>
       </p:sp>
@@ -1514,8 +1514,8 @@
         </p:nvSpPr>
         <p:spPr>
           <a:xfrm>
-            <a:off x="1463040" y="1234440"/>
-            <a:ext cx="9235440" cy="457200"/>
+            <a:off x="1463040" y="1078992"/>
+            <a:ext cx="9235440" cy="384048"/>
           </a:xfrm>
           <a:prstGeom prst="rect">
             <a:avLst/>
@@ -1531,9 +1531,9 @@
               <a:buNone/>
             </a:pPr>
             <a:r>
-              <a:rPr lang="en-US" sz="2200" b="1" dirty="0">
-                <a:solidFill>
-                  <a:srgbClr val="14181A"/>
+              <a:rPr lang="en-US" sz="1900" b="1" spc="200" kern="0" dirty="0">
+                <a:solidFill>
+                  <a:srgbClr val="6E7B79"/>
                 </a:solidFill>
                 <a:latin typeface="Cambria" pitchFamily="34" charset="0"/>
                 <a:ea typeface="Cambria" pitchFamily="34" charset="-122"/>
@@ -1541,7 +1541,7 @@
               </a:rPr>
               <a:t>SMART INDIA HACKATHON 2026</a:t>
             </a:r>
-            <a:endParaRPr lang="en-US" sz="2200" dirty="0"/>
+            <a:endParaRPr lang="en-US" sz="1900" dirty="0"/>
           </a:p>
         </p:txBody>
       </p:sp>
@@ -1553,8 +1553,8 @@
         </p:nvSpPr>
         <p:spPr>
           <a:xfrm>
-            <a:off x="1097280" y="1965960"/>
-            <a:ext cx="9966960" cy="1371600"/>
+            <a:off x="822960" y="1572768"/>
+            <a:ext cx="10515600" cy="658368"/>
           </a:xfrm>
           <a:prstGeom prst="rect">
             <a:avLst/>
@@ -1567,13 +1567,10 @@
           <a:lstStyle/>
           <a:p>
             <a:pPr algn="ctr" indent="0" marL="0">
-              <a:lnSpc>
-                <a:spcPct val="108000"/>
-              </a:lnSpc>
-              <a:buNone/>
-            </a:pPr>
-            <a:r>
-              <a:rPr lang="en-US" sz="3000" b="1" dirty="0">
+              <a:buNone/>
+            </a:pPr>
+            <a:r>
+              <a:rPr lang="en-US" sz="3300" b="1" dirty="0">
                 <a:solidFill>
                   <a:srgbClr val="006FBF"/>
                 </a:solidFill>
@@ -1583,19 +1580,38 @@
               </a:rPr>
               <a:t>Adaptive Variable Resolution 2.5D Lidar Mapping</a:t>
             </a:r>
-            <a:endParaRPr lang="en-US" sz="3000" dirty="0"/>
-          </a:p>
+            <a:endParaRPr lang="en-US" sz="3300" dirty="0"/>
+          </a:p>
+        </p:txBody>
+      </p:sp>
+      <p:sp>
+        <p:nvSpPr>
+          <p:cNvPr id="10" name="Text 7"/>
+          <p:cNvSpPr txBox="1"/>
+          <p:nvPr/>
+        </p:nvSpPr>
+        <p:spPr>
+          <a:xfrm>
+            <a:off x="822960" y="2194560"/>
+            <a:ext cx="10515600" cy="475488"/>
+          </a:xfrm>
+          <a:prstGeom prst="rect">
+            <a:avLst/>
+          </a:prstGeom>
+          <a:noFill/>
+          <a:ln/>
+        </p:spPr>
+        <p:txBody>
+          <a:bodyPr wrap="square" rtlCol="0" anchor="ctr"/>
+          <a:lstStyle/>
           <a:p>
             <a:pPr algn="ctr" indent="0" marL="0">
-              <a:lnSpc>
-                <a:spcPct val="108000"/>
-              </a:lnSpc>
-              <a:buNone/>
-            </a:pPr>
-            <a:r>
-              <a:rPr lang="en-US" sz="3000" b="1" dirty="0">
-                <a:solidFill>
-                  <a:srgbClr val="006FBF"/>
+              <a:buNone/>
+            </a:pPr>
+            <a:r>
+              <a:rPr lang="en-US" sz="2400" dirty="0">
+                <a:solidFill>
+                  <a:srgbClr val="43504F"/>
                 </a:solidFill>
                 <a:latin typeface="Cambria" pitchFamily="34" charset="0"/>
                 <a:ea typeface="Cambria" pitchFamily="34" charset="-122"/>
@@ -1603,32 +1619,56 @@
               </a:rPr>
               <a:t>for Dynamic Environment Perception</a:t>
             </a:r>
-            <a:endParaRPr lang="en-US" sz="3000" dirty="0"/>
-          </a:p>
-        </p:txBody>
-      </p:sp>
-      <p:sp>
-        <p:nvSpPr>
-          <p:cNvPr id="10" name="Shape 7"/>
+            <a:endParaRPr lang="en-US" sz="2400" dirty="0"/>
+          </a:p>
+        </p:txBody>
+      </p:sp>
+      <p:pic>
+        <p:nvPicPr>
+          <p:cNvPr id="11" name="Image 1" descr="deckbuild/fig_threestate.png">    </p:cNvPr>
+          <p:cNvPicPr>
+            <a:picLocks noChangeAspect="1"/>
+          </p:cNvPicPr>
+          <p:nvPr/>
+        </p:nvPicPr>
+        <p:blipFill>
+          <a:blip r:embed="rId2"/>
+          <a:stretch>
+            <a:fillRect/>
+          </a:stretch>
+        </p:blipFill>
+        <p:spPr>
+          <a:xfrm>
+            <a:off x="2624328" y="2761488"/>
+            <a:ext cx="6949440" cy="2146877"/>
+          </a:xfrm>
+          <a:prstGeom prst="rect">
+            <a:avLst/>
+          </a:prstGeom>
+        </p:spPr>
+      </p:pic>
+      <p:sp>
+        <p:nvSpPr>
+          <p:cNvPr id="12" name="Shape 8"/>
           <p:cNvSpPr/>
           <p:nvPr/>
         </p:nvSpPr>
         <p:spPr>
           <a:xfrm>
-            <a:off x="868680" y="3794760"/>
-            <a:ext cx="2560320" cy="1051560"/>
+            <a:off x="868680" y="5120640"/>
+            <a:ext cx="2560320" cy="896112"/>
           </a:xfrm>
           <a:prstGeom prst="roundRect">
             <a:avLst>
-              <a:gd name="adj" fmla="val 3478"/>
+              <a:gd name="adj" fmla="val 5102"/>
             </a:avLst>
           </a:prstGeom>
           <a:solidFill>
-            <a:srgbClr val="F4F6F3"/>
-          </a:solidFill>
-          <a:ln w="9525">
+            <a:srgbClr val="F6F8F5"/>
+          </a:solidFill>
+          <a:ln w="12700">
             <a:solidFill>
-              <a:srgbClr val="D2D8D3"/>
+              <a:srgbClr val="D9DED6"/>
             </a:solidFill>
             <a:prstDash val="solid"/>
           </a:ln>
@@ -1636,14 +1676,34 @@
       </p:sp>
       <p:sp>
         <p:nvSpPr>
-          <p:cNvPr id="11" name="Text 8"/>
-          <p:cNvSpPr txBox="1"/>
-          <p:nvPr/>
-        </p:nvSpPr>
-        <p:spPr>
-          <a:xfrm>
-            <a:off x="1014984" y="3950208"/>
-            <a:ext cx="2286000" cy="274320"/>
+          <p:cNvPr id="13" name="Shape 9"/>
+          <p:cNvSpPr/>
+          <p:nvPr/>
+        </p:nvSpPr>
+        <p:spPr>
+          <a:xfrm>
+            <a:off x="1033272" y="5440680"/>
+            <a:ext cx="201168" cy="201168"/>
+          </a:xfrm>
+          <a:prstGeom prst="ellipse">
+            <a:avLst/>
+          </a:prstGeom>
+          <a:solidFill>
+            <a:srgbClr val="2C8FBF"/>
+          </a:solidFill>
+          <a:ln/>
+        </p:spPr>
+      </p:sp>
+      <p:sp>
+        <p:nvSpPr>
+          <p:cNvPr id="14" name="Text 10"/>
+          <p:cNvSpPr txBox="1"/>
+          <p:nvPr/>
+        </p:nvSpPr>
+        <p:spPr>
+          <a:xfrm>
+            <a:off x="1325880" y="5248656"/>
+            <a:ext cx="2011680" cy="237744"/>
           </a:xfrm>
           <a:prstGeom prst="rect">
             <a:avLst/>
@@ -1659,7 +1719,7 @@
               <a:buNone/>
             </a:pPr>
             <a:r>
-              <a:rPr lang="en-US" sz="1050" b="1" spc="110" kern="0" dirty="0">
+              <a:rPr lang="en-US" sz="950" b="1" spc="100" kern="0" dirty="0">
                 <a:solidFill>
                   <a:srgbClr val="6E7B79"/>
                 </a:solidFill>
@@ -1667,22 +1727,22 @@
                 <a:ea typeface="Calibri" pitchFamily="34" charset="-122"/>
                 <a:cs typeface="Calibri" pitchFamily="34" charset="-120"/>
               </a:rPr>
-              <a:t>Problem Statement ID</a:t>
-            </a:r>
-            <a:endParaRPr lang="en-US" sz="1050" dirty="0"/>
-          </a:p>
-        </p:txBody>
-      </p:sp>
-      <p:sp>
-        <p:nvSpPr>
-          <p:cNvPr id="12" name="Text 9"/>
-          <p:cNvSpPr txBox="1"/>
-          <p:nvPr/>
-        </p:nvSpPr>
-        <p:spPr>
-          <a:xfrm>
-            <a:off x="1014984" y="4261104"/>
-            <a:ext cx="2286000" cy="384048"/>
+              <a:t>PS ID</a:t>
+            </a:r>
+            <a:endParaRPr lang="en-US" sz="950" dirty="0"/>
+          </a:p>
+        </p:txBody>
+      </p:sp>
+      <p:sp>
+        <p:nvSpPr>
+          <p:cNvPr id="15" name="Text 11"/>
+          <p:cNvSpPr txBox="1"/>
+          <p:nvPr/>
+        </p:nvSpPr>
+        <p:spPr>
+          <a:xfrm>
+            <a:off x="1325880" y="5486400"/>
+            <a:ext cx="2011680" cy="310896"/>
           </a:xfrm>
           <a:prstGeom prst="rect">
             <a:avLst/>
@@ -1698,7 +1758,7 @@
               <a:buNone/>
             </a:pPr>
             <a:r>
-              <a:rPr lang="en-US" sz="1600" b="1" dirty="0">
+              <a:rPr lang="en-US" sz="1450" b="1" dirty="0">
                 <a:solidFill>
                   <a:srgbClr val="14181A"/>
                 </a:solidFill>
@@ -1708,32 +1768,32 @@
               </a:rPr>
               <a:t>SIH26053</a:t>
             </a:r>
-            <a:endParaRPr lang="en-US" sz="1600" dirty="0"/>
-          </a:p>
-        </p:txBody>
-      </p:sp>
-      <p:sp>
-        <p:nvSpPr>
-          <p:cNvPr id="13" name="Shape 10"/>
+            <a:endParaRPr lang="en-US" sz="1450" dirty="0"/>
+          </a:p>
+        </p:txBody>
+      </p:sp>
+      <p:sp>
+        <p:nvSpPr>
+          <p:cNvPr id="16" name="Shape 12"/>
           <p:cNvSpPr/>
           <p:nvPr/>
         </p:nvSpPr>
         <p:spPr>
           <a:xfrm>
-            <a:off x="3611880" y="3794760"/>
-            <a:ext cx="2560320" cy="1051560"/>
+            <a:off x="3611880" y="5120640"/>
+            <a:ext cx="2560320" cy="896112"/>
           </a:xfrm>
           <a:prstGeom prst="roundRect">
             <a:avLst>
-              <a:gd name="adj" fmla="val 3478"/>
+              <a:gd name="adj" fmla="val 5102"/>
             </a:avLst>
           </a:prstGeom>
           <a:solidFill>
-            <a:srgbClr val="F4F6F3"/>
-          </a:solidFill>
-          <a:ln w="9525">
+            <a:srgbClr val="F6F8F5"/>
+          </a:solidFill>
+          <a:ln w="12700">
             <a:solidFill>
-              <a:srgbClr val="D2D8D3"/>
+              <a:srgbClr val="D9DED6"/>
             </a:solidFill>
             <a:prstDash val="solid"/>
           </a:ln>
@@ -1741,14 +1801,34 @@
       </p:sp>
       <p:sp>
         <p:nvSpPr>
-          <p:cNvPr id="14" name="Text 11"/>
-          <p:cNvSpPr txBox="1"/>
-          <p:nvPr/>
-        </p:nvSpPr>
-        <p:spPr>
-          <a:xfrm>
-            <a:off x="3758184" y="3950208"/>
-            <a:ext cx="2286000" cy="274320"/>
+          <p:cNvPr id="17" name="Shape 13"/>
+          <p:cNvSpPr/>
+          <p:nvPr/>
+        </p:nvSpPr>
+        <p:spPr>
+          <a:xfrm>
+            <a:off x="3776472" y="5440680"/>
+            <a:ext cx="201168" cy="201168"/>
+          </a:xfrm>
+          <a:prstGeom prst="ellipse">
+            <a:avLst/>
+          </a:prstGeom>
+          <a:solidFill>
+            <a:srgbClr val="D2622A"/>
+          </a:solidFill>
+          <a:ln/>
+        </p:spPr>
+      </p:sp>
+      <p:sp>
+        <p:nvSpPr>
+          <p:cNvPr id="18" name="Text 14"/>
+          <p:cNvSpPr txBox="1"/>
+          <p:nvPr/>
+        </p:nvSpPr>
+        <p:spPr>
+          <a:xfrm>
+            <a:off x="4069080" y="5248656"/>
+            <a:ext cx="2011680" cy="237744"/>
           </a:xfrm>
           <a:prstGeom prst="rect">
             <a:avLst/>
@@ -1764,7 +1844,7 @@
               <a:buNone/>
             </a:pPr>
             <a:r>
-              <a:rPr lang="en-US" sz="1050" b="1" spc="110" kern="0" dirty="0">
+              <a:rPr lang="en-US" sz="950" b="1" spc="100" kern="0" dirty="0">
                 <a:solidFill>
                   <a:srgbClr val="6E7B79"/>
                 </a:solidFill>
@@ -1772,22 +1852,22 @@
                 <a:ea typeface="Calibri" pitchFamily="34" charset="-122"/>
                 <a:cs typeface="Calibri" pitchFamily="34" charset="-120"/>
               </a:rPr>
-              <a:t>Theme</a:t>
-            </a:r>
-            <a:endParaRPr lang="en-US" sz="1050" dirty="0"/>
-          </a:p>
-        </p:txBody>
-      </p:sp>
-      <p:sp>
-        <p:nvSpPr>
-          <p:cNvPr id="15" name="Text 12"/>
-          <p:cNvSpPr txBox="1"/>
-          <p:nvPr/>
-        </p:nvSpPr>
-        <p:spPr>
-          <a:xfrm>
-            <a:off x="3758184" y="4261104"/>
-            <a:ext cx="2286000" cy="384048"/>
+              <a:t>ORGANISATION</a:t>
+            </a:r>
+            <a:endParaRPr lang="en-US" sz="950" dirty="0"/>
+          </a:p>
+        </p:txBody>
+      </p:sp>
+      <p:sp>
+        <p:nvSpPr>
+          <p:cNvPr id="19" name="Text 15"/>
+          <p:cNvSpPr txBox="1"/>
+          <p:nvPr/>
+        </p:nvSpPr>
+        <p:spPr>
+          <a:xfrm>
+            <a:off x="4069080" y="5486400"/>
+            <a:ext cx="2011680" cy="310896"/>
           </a:xfrm>
           <a:prstGeom prst="rect">
             <a:avLst/>
@@ -1803,7 +1883,7 @@
               <a:buNone/>
             </a:pPr>
             <a:r>
-              <a:rPr lang="en-US" sz="1600" b="1" dirty="0">
+              <a:rPr lang="en-US" sz="1450" b="1" dirty="0">
                 <a:solidFill>
                   <a:srgbClr val="14181A"/>
                 </a:solidFill>
@@ -1811,34 +1891,34 @@
                 <a:ea typeface="Calibri" pitchFamily="34" charset="-122"/>
                 <a:cs typeface="Calibri" pitchFamily="34" charset="-120"/>
               </a:rPr>
-              <a:t>Smart Vehicles</a:t>
-            </a:r>
-            <a:endParaRPr lang="en-US" sz="1600" dirty="0"/>
-          </a:p>
-        </p:txBody>
-      </p:sp>
-      <p:sp>
-        <p:nvSpPr>
-          <p:cNvPr id="16" name="Shape 13"/>
+              <a:t>DRDO</a:t>
+            </a:r>
+            <a:endParaRPr lang="en-US" sz="1450" dirty="0"/>
+          </a:p>
+        </p:txBody>
+      </p:sp>
+      <p:sp>
+        <p:nvSpPr>
+          <p:cNvPr id="20" name="Shape 16"/>
           <p:cNvSpPr/>
           <p:nvPr/>
         </p:nvSpPr>
         <p:spPr>
           <a:xfrm>
-            <a:off x="6355080" y="3794760"/>
-            <a:ext cx="2560320" cy="1051560"/>
+            <a:off x="6355080" y="5120640"/>
+            <a:ext cx="2560320" cy="896112"/>
           </a:xfrm>
           <a:prstGeom prst="roundRect">
             <a:avLst>
-              <a:gd name="adj" fmla="val 3478"/>
+              <a:gd name="adj" fmla="val 5102"/>
             </a:avLst>
           </a:prstGeom>
           <a:solidFill>
-            <a:srgbClr val="F4F6F3"/>
-          </a:solidFill>
-          <a:ln w="9525">
+            <a:srgbClr val="F6F8F5"/>
+          </a:solidFill>
+          <a:ln w="12700">
             <a:solidFill>
-              <a:srgbClr val="D2D8D3"/>
+              <a:srgbClr val="D9DED6"/>
             </a:solidFill>
             <a:prstDash val="solid"/>
           </a:ln>
@@ -1846,14 +1926,34 @@
       </p:sp>
       <p:sp>
         <p:nvSpPr>
-          <p:cNvPr id="17" name="Text 14"/>
-          <p:cNvSpPr txBox="1"/>
-          <p:nvPr/>
-        </p:nvSpPr>
-        <p:spPr>
-          <a:xfrm>
-            <a:off x="6501384" y="3950208"/>
-            <a:ext cx="2286000" cy="274320"/>
+          <p:cNvPr id="21" name="Shape 17"/>
+          <p:cNvSpPr/>
+          <p:nvPr/>
+        </p:nvSpPr>
+        <p:spPr>
+          <a:xfrm>
+            <a:off x="6519672" y="5440680"/>
+            <a:ext cx="201168" cy="201168"/>
+          </a:xfrm>
+          <a:prstGeom prst="ellipse">
+            <a:avLst/>
+          </a:prstGeom>
+          <a:solidFill>
+            <a:srgbClr val="7A55B5"/>
+          </a:solidFill>
+          <a:ln/>
+        </p:spPr>
+      </p:sp>
+      <p:sp>
+        <p:nvSpPr>
+          <p:cNvPr id="22" name="Text 18"/>
+          <p:cNvSpPr txBox="1"/>
+          <p:nvPr/>
+        </p:nvSpPr>
+        <p:spPr>
+          <a:xfrm>
+            <a:off x="6812280" y="5248656"/>
+            <a:ext cx="2011680" cy="237744"/>
           </a:xfrm>
           <a:prstGeom prst="rect">
             <a:avLst/>
@@ -1869,7 +1969,7 @@
               <a:buNone/>
             </a:pPr>
             <a:r>
-              <a:rPr lang="en-US" sz="1050" b="1" spc="110" kern="0" dirty="0">
+              <a:rPr lang="en-US" sz="950" b="1" spc="100" kern="0" dirty="0">
                 <a:solidFill>
                   <a:srgbClr val="6E7B79"/>
                 </a:solidFill>
@@ -1877,22 +1977,22 @@
                 <a:ea typeface="Calibri" pitchFamily="34" charset="-122"/>
                 <a:cs typeface="Calibri" pitchFamily="34" charset="-120"/>
               </a:rPr>
-              <a:t>PS Category</a:t>
-            </a:r>
-            <a:endParaRPr lang="en-US" sz="1050" dirty="0"/>
-          </a:p>
-        </p:txBody>
-      </p:sp>
-      <p:sp>
-        <p:nvSpPr>
-          <p:cNvPr id="18" name="Text 15"/>
-          <p:cNvSpPr txBox="1"/>
-          <p:nvPr/>
-        </p:nvSpPr>
-        <p:spPr>
-          <a:xfrm>
-            <a:off x="6501384" y="4261104"/>
-            <a:ext cx="2286000" cy="384048"/>
+              <a:t>THEME</a:t>
+            </a:r>
+            <a:endParaRPr lang="en-US" sz="950" dirty="0"/>
+          </a:p>
+        </p:txBody>
+      </p:sp>
+      <p:sp>
+        <p:nvSpPr>
+          <p:cNvPr id="23" name="Text 19"/>
+          <p:cNvSpPr txBox="1"/>
+          <p:nvPr/>
+        </p:nvSpPr>
+        <p:spPr>
+          <a:xfrm>
+            <a:off x="6812280" y="5486400"/>
+            <a:ext cx="2011680" cy="310896"/>
           </a:xfrm>
           <a:prstGeom prst="rect">
             <a:avLst/>
@@ -1908,7 +2008,7 @@
               <a:buNone/>
             </a:pPr>
             <a:r>
-              <a:rPr lang="en-US" sz="1600" b="1" dirty="0">
+              <a:rPr lang="en-US" sz="1450" b="1" dirty="0">
                 <a:solidFill>
                   <a:srgbClr val="14181A"/>
                 </a:solidFill>
@@ -1916,34 +2016,34 @@
                 <a:ea typeface="Calibri" pitchFamily="34" charset="-122"/>
                 <a:cs typeface="Calibri" pitchFamily="34" charset="-120"/>
               </a:rPr>
-              <a:t>Software</a:t>
-            </a:r>
-            <a:endParaRPr lang="en-US" sz="1600" dirty="0"/>
-          </a:p>
-        </p:txBody>
-      </p:sp>
-      <p:sp>
-        <p:nvSpPr>
-          <p:cNvPr id="19" name="Shape 16"/>
+              <a:t>Smart Vehicles</a:t>
+            </a:r>
+            <a:endParaRPr lang="en-US" sz="1450" dirty="0"/>
+          </a:p>
+        </p:txBody>
+      </p:sp>
+      <p:sp>
+        <p:nvSpPr>
+          <p:cNvPr id="24" name="Shape 20"/>
           <p:cNvSpPr/>
           <p:nvPr/>
         </p:nvSpPr>
         <p:spPr>
           <a:xfrm>
-            <a:off x="9098280" y="3794760"/>
-            <a:ext cx="2560320" cy="1051560"/>
+            <a:off x="9098280" y="5120640"/>
+            <a:ext cx="2560320" cy="896112"/>
           </a:xfrm>
           <a:prstGeom prst="roundRect">
             <a:avLst>
-              <a:gd name="adj" fmla="val 3478"/>
+              <a:gd name="adj" fmla="val 5102"/>
             </a:avLst>
           </a:prstGeom>
           <a:solidFill>
-            <a:srgbClr val="F4F6F3"/>
-          </a:solidFill>
-          <a:ln w="9525">
+            <a:srgbClr val="F6F8F5"/>
+          </a:solidFill>
+          <a:ln w="12700">
             <a:solidFill>
-              <a:srgbClr val="D2D8D3"/>
+              <a:srgbClr val="D9DED6"/>
             </a:solidFill>
             <a:prstDash val="solid"/>
           </a:ln>
@@ -1951,14 +2051,34 @@
       </p:sp>
       <p:sp>
         <p:nvSpPr>
-          <p:cNvPr id="20" name="Text 17"/>
-          <p:cNvSpPr txBox="1"/>
-          <p:nvPr/>
-        </p:nvSpPr>
-        <p:spPr>
-          <a:xfrm>
-            <a:off x="9244584" y="3950208"/>
-            <a:ext cx="2286000" cy="274320"/>
+          <p:cNvPr id="25" name="Shape 21"/>
+          <p:cNvSpPr/>
+          <p:nvPr/>
+        </p:nvSpPr>
+        <p:spPr>
+          <a:xfrm>
+            <a:off x="9262872" y="5440680"/>
+            <a:ext cx="201168" cy="201168"/>
+          </a:xfrm>
+          <a:prstGeom prst="ellipse">
+            <a:avLst/>
+          </a:prstGeom>
+          <a:solidFill>
+            <a:srgbClr val="2E9E68"/>
+          </a:solidFill>
+          <a:ln/>
+        </p:spPr>
+      </p:sp>
+      <p:sp>
+        <p:nvSpPr>
+          <p:cNvPr id="26" name="Text 22"/>
+          <p:cNvSpPr txBox="1"/>
+          <p:nvPr/>
+        </p:nvSpPr>
+        <p:spPr>
+          <a:xfrm>
+            <a:off x="9555480" y="5248656"/>
+            <a:ext cx="2011680" cy="237744"/>
           </a:xfrm>
           <a:prstGeom prst="rect">
             <a:avLst/>
@@ -1974,7 +2094,7 @@
               <a:buNone/>
             </a:pPr>
             <a:r>
-              <a:rPr lang="en-US" sz="1050" b="1" spc="110" kern="0" dirty="0">
+              <a:rPr lang="en-US" sz="950" b="1" spc="100" kern="0" dirty="0">
                 <a:solidFill>
                   <a:srgbClr val="6E7B79"/>
                 </a:solidFill>
@@ -1982,22 +2102,22 @@
                 <a:ea typeface="Calibri" pitchFamily="34" charset="-122"/>
                 <a:cs typeface="Calibri" pitchFamily="34" charset="-120"/>
               </a:rPr>
-              <a:t>Team Name</a:t>
-            </a:r>
-            <a:endParaRPr lang="en-US" sz="1050" dirty="0"/>
-          </a:p>
-        </p:txBody>
-      </p:sp>
-      <p:sp>
-        <p:nvSpPr>
-          <p:cNvPr id="21" name="Text 18"/>
-          <p:cNvSpPr txBox="1"/>
-          <p:nvPr/>
-        </p:nvSpPr>
-        <p:spPr>
-          <a:xfrm>
-            <a:off x="9244584" y="4261104"/>
-            <a:ext cx="2286000" cy="384048"/>
+              <a:t>CATEGORY</a:t>
+            </a:r>
+            <a:endParaRPr lang="en-US" sz="950" dirty="0"/>
+          </a:p>
+        </p:txBody>
+      </p:sp>
+      <p:sp>
+        <p:nvSpPr>
+          <p:cNvPr id="27" name="Text 23"/>
+          <p:cNvSpPr txBox="1"/>
+          <p:nvPr/>
+        </p:nvSpPr>
+        <p:spPr>
+          <a:xfrm>
+            <a:off x="9555480" y="5486400"/>
+            <a:ext cx="2011680" cy="310896"/>
           </a:xfrm>
           <a:prstGeom prst="rect">
             <a:avLst/>
@@ -2013,7 +2133,7 @@
               <a:buNone/>
             </a:pPr>
             <a:r>
-              <a:rPr lang="en-US" sz="1600" b="1" dirty="0">
+              <a:rPr lang="en-US" sz="1450" b="1" dirty="0">
                 <a:solidFill>
                   <a:srgbClr val="14181A"/>
                 </a:solidFill>
@@ -2021,22 +2141,22 @@
                 <a:ea typeface="Calibri" pitchFamily="34" charset="-122"/>
                 <a:cs typeface="Calibri" pitchFamily="34" charset="-120"/>
               </a:rPr>
-              <a:t>Raysense</a:t>
-            </a:r>
-            <a:endParaRPr lang="en-US" sz="1600" dirty="0"/>
-          </a:p>
-        </p:txBody>
-      </p:sp>
-      <p:sp>
-        <p:nvSpPr>
-          <p:cNvPr id="22" name="Text 19"/>
-          <p:cNvSpPr txBox="1"/>
-          <p:nvPr/>
-        </p:nvSpPr>
-        <p:spPr>
-          <a:xfrm>
-            <a:off x="1097280" y="5212080"/>
-            <a:ext cx="9966960" cy="365760"/>
+              <a:t>Software</a:t>
+            </a:r>
+            <a:endParaRPr lang="en-US" sz="1450" dirty="0"/>
+          </a:p>
+        </p:txBody>
+      </p:sp>
+      <p:sp>
+        <p:nvSpPr>
+          <p:cNvPr id="28" name="Text 24"/>
+          <p:cNvSpPr txBox="1"/>
+          <p:nvPr/>
+        </p:nvSpPr>
+        <p:spPr>
+          <a:xfrm>
+            <a:off x="822960" y="6089904"/>
+            <a:ext cx="10515600" cy="329184"/>
           </a:xfrm>
           <a:prstGeom prst="rect">
             <a:avLst/>
@@ -2052,7 +2172,7 @@
               <a:buNone/>
             </a:pPr>
             <a:r>
-              <a:rPr lang="en-US" sz="1400" dirty="0">
+              <a:rPr lang="en-US" sz="1500" b="1" spc="150" kern="0" dirty="0">
                 <a:solidFill>
                   <a:srgbClr val="6E7B79"/>
                 </a:solidFill>
@@ -2060,9 +2180,9 @@
                 <a:ea typeface="Calibri" pitchFamily="34" charset="-122"/>
                 <a:cs typeface="Calibri" pitchFamily="34" charset="-120"/>
               </a:rPr>
-              <a:t>Organisation: Defence Research and Development Organisation (DRDO)</a:t>
-            </a:r>
-            <a:endParaRPr lang="en-US" sz="1400" dirty="0"/>
+              <a:t>Team Raysense</a:t>
+            </a:r>
+            <a:endParaRPr lang="en-US" sz="1500" dirty="0"/>
           </a:p>
         </p:txBody>
       </p:sp>
@@ -2106,8 +2226,8 @@
         </p:nvSpPr>
         <p:spPr>
           <a:xfrm>
-            <a:off x="256032" y="146304"/>
-            <a:ext cx="1207008" cy="566928"/>
+            <a:off x="237744" y="128016"/>
+            <a:ext cx="1152144" cy="530352"/>
           </a:xfrm>
           <a:prstGeom prst="ellipse">
             <a:avLst/>
@@ -2131,8 +2251,8 @@
         </p:nvSpPr>
         <p:spPr>
           <a:xfrm>
-            <a:off x="256032" y="146304"/>
-            <a:ext cx="1207008" cy="566928"/>
+            <a:off x="237744" y="128016"/>
+            <a:ext cx="1152144" cy="530352"/>
           </a:xfrm>
           <a:prstGeom prst="rect">
             <a:avLst/>
@@ -2148,7 +2268,7 @@
               <a:buNone/>
             </a:pPr>
             <a:r>
-              <a:rPr lang="en-US" sz="1300" dirty="0">
+              <a:rPr lang="en-US" sz="1250" dirty="0">
                 <a:solidFill>
                   <a:srgbClr val="14181A"/>
                 </a:solidFill>
@@ -2158,7 +2278,7 @@
               </a:rPr>
               <a:t>Raysense</a:t>
             </a:r>
-            <a:endParaRPr lang="en-US" sz="1300" dirty="0"/>
+            <a:endParaRPr lang="en-US" sz="1250" dirty="0"/>
           </a:p>
         </p:txBody>
       </p:sp>
@@ -2178,8 +2298,8 @@
         </p:blipFill>
         <p:spPr>
           <a:xfrm>
-            <a:off x="10378440" y="91440"/>
-            <a:ext cx="1572768" cy="786384"/>
+            <a:off x="10469880" y="91440"/>
+            <a:ext cx="1481328" cy="585216"/>
           </a:xfrm>
           <a:prstGeom prst="rect">
             <a:avLst/>
@@ -2194,8 +2314,8 @@
         </p:nvSpPr>
         <p:spPr>
           <a:xfrm>
-            <a:off x="1645920" y="146304"/>
-            <a:ext cx="8595360" cy="658368"/>
+            <a:off x="1554480" y="118872"/>
+            <a:ext cx="8778240" cy="566928"/>
           </a:xfrm>
           <a:prstGeom prst="rect">
             <a:avLst/>
@@ -2211,7 +2331,7 @@
               <a:buNone/>
             </a:pPr>
             <a:r>
-              <a:rPr lang="en-US" sz="3100" b="1" dirty="0">
+              <a:rPr lang="en-US" sz="2900" b="1" dirty="0">
                 <a:solidFill>
                   <a:srgbClr val="14181A"/>
                 </a:solidFill>
@@ -2221,7 +2341,7 @@
               </a:rPr>
               <a:t>Adaptive Point-Budget Lidar Perception for UGVs</a:t>
             </a:r>
-            <a:endParaRPr lang="en-US" sz="3100" dirty="0"/>
+            <a:endParaRPr lang="en-US" sz="2900" dirty="0"/>
           </a:p>
         </p:txBody>
       </p:sp>
@@ -2233,8 +2353,8 @@
         </p:nvSpPr>
         <p:spPr>
           <a:xfrm>
-            <a:off x="0" y="6437376"/>
-            <a:ext cx="12191695" cy="420624"/>
+            <a:off x="0" y="6473952"/>
+            <a:ext cx="12191695" cy="384048"/>
           </a:xfrm>
           <a:prstGeom prst="rect">
             <a:avLst/>
@@ -2253,8 +2373,8 @@
         </p:nvSpPr>
         <p:spPr>
           <a:xfrm>
-            <a:off x="0" y="6437376"/>
-            <a:ext cx="12191695" cy="420624"/>
+            <a:off x="0" y="6473952"/>
+            <a:ext cx="12191695" cy="384048"/>
           </a:xfrm>
           <a:prstGeom prst="rect">
             <a:avLst/>
@@ -2270,7 +2390,7 @@
               <a:buNone/>
             </a:pPr>
             <a:r>
-              <a:rPr lang="en-US" sz="1200" dirty="0">
+              <a:rPr lang="en-US" sz="1100" dirty="0">
                 <a:solidFill>
                   <a:srgbClr val="FFFFFF"/>
                 </a:solidFill>
@@ -2280,7 +2400,7 @@
               </a:rPr>
               <a:t>@SIH Idea submission- Template</a:t>
             </a:r>
-            <a:endParaRPr lang="en-US" sz="1200" dirty="0"/>
+            <a:endParaRPr lang="en-US" sz="1100" dirty="0"/>
           </a:p>
         </p:txBody>
       </p:sp>
@@ -2292,8 +2412,8 @@
         </p:nvSpPr>
         <p:spPr>
           <a:xfrm>
-            <a:off x="11277295" y="6437376"/>
-            <a:ext cx="548640" cy="420624"/>
+            <a:off x="11323015" y="6473952"/>
+            <a:ext cx="502920" cy="384048"/>
           </a:xfrm>
           <a:prstGeom prst="rect">
             <a:avLst/>
@@ -2309,7 +2429,7 @@
               <a:buNone/>
             </a:pPr>
             <a:r>
-              <a:rPr lang="en-US" sz="1200" b="1" dirty="0">
+              <a:rPr lang="en-US" sz="1100" b="1" dirty="0">
                 <a:solidFill>
                   <a:srgbClr val="FFFFFF"/>
                 </a:solidFill>
@@ -2319,13 +2439,13 @@
               </a:rPr>
               <a:t>2</a:t>
             </a:r>
-            <a:endParaRPr lang="en-US" sz="1200" dirty="0"/>
+            <a:endParaRPr lang="en-US" sz="1100" dirty="0"/>
           </a:p>
         </p:txBody>
       </p:sp>
       <p:pic>
         <p:nvPicPr>
-          <p:cNvPr id="9" name="Image 1" descr="deckbuild/fig_gap.png">    </p:cNvPr>
+          <p:cNvPr id="9" name="Image 1" descr="deckbuild/fig_donuts.png">    </p:cNvPr>
           <p:cNvPicPr>
             <a:picLocks noChangeAspect="1"/>
           </p:cNvPicPr>
@@ -2339,8 +2459,8 @@
         </p:blipFill>
         <p:spPr>
           <a:xfrm>
-            <a:off x="384048" y="1051560"/>
-            <a:ext cx="3977640" cy="2670048"/>
+            <a:off x="365760" y="914400"/>
+            <a:ext cx="4160520" cy="2317838"/>
           </a:xfrm>
           <a:prstGeom prst="rect">
             <a:avLst/>
@@ -2355,8 +2475,8 @@
         </p:nvSpPr>
         <p:spPr>
           <a:xfrm>
-            <a:off x="384048" y="3803904"/>
-            <a:ext cx="3977640" cy="256032"/>
+            <a:off x="365760" y="3310128"/>
+            <a:ext cx="4160520" cy="274320"/>
           </a:xfrm>
           <a:prstGeom prst="rect">
             <a:avLst/>
@@ -2368,69 +2488,27 @@
           <a:bodyPr wrap="square" lIns="0" tIns="0" rIns="0" bIns="0" rtlCol="0" anchor="ctr"/>
           <a:lstStyle/>
           <a:p>
-            <a:pPr indent="0" marL="0">
-              <a:buNone/>
-            </a:pPr>
-            <a:r>
-              <a:rPr lang="en-US" sz="1100" b="1" spc="120" kern="0" dirty="0">
-                <a:solidFill>
-                  <a:srgbClr val="6E7B79"/>
-                </a:solidFill>
-                <a:latin typeface="Calibri" pitchFamily="34" charset="0"/>
-                <a:ea typeface="Calibri" pitchFamily="34" charset="-122"/>
-                <a:cs typeface="Calibri" pitchFamily="34" charset="-120"/>
-              </a:rPr>
-              <a:t>THE FINDING</a:t>
-            </a:r>
-            <a:endParaRPr lang="en-US" sz="1100" dirty="0"/>
-          </a:p>
-        </p:txBody>
-      </p:sp>
-      <p:sp>
-        <p:nvSpPr>
-          <p:cNvPr id="11" name="Text 7"/>
-          <p:cNvSpPr txBox="1"/>
-          <p:nvPr/>
-        </p:nvSpPr>
-        <p:spPr>
-          <a:xfrm>
-            <a:off x="384048" y="4078224"/>
-            <a:ext cx="3977640" cy="1188720"/>
-          </a:xfrm>
-          <a:prstGeom prst="rect">
-            <a:avLst/>
-          </a:prstGeom>
-          <a:noFill/>
-          <a:ln/>
-        </p:spPr>
-        <p:txBody>
-          <a:bodyPr wrap="square" lIns="0" tIns="0" rIns="0" bIns="0" rtlCol="0" anchor="ctr"/>
-          <a:lstStyle/>
-          <a:p>
-            <a:pPr indent="0" marL="0">
-              <a:lnSpc>
-                <a:spcPct val="112000"/>
-              </a:lnSpc>
-              <a:buNone/>
-            </a:pPr>
-            <a:r>
-              <a:rPr lang="en-US" sz="1250" dirty="0">
-                <a:solidFill>
-                  <a:srgbClr val="43504F"/>
-                </a:solidFill>
-                <a:latin typeface="Calibri" pitchFamily="34" charset="0"/>
-                <a:ea typeface="Calibri" pitchFamily="34" charset="-122"/>
-                <a:cs typeface="Calibri" pitchFamily="34" charset="-120"/>
-              </a:rPr>
-              <a:t>A full scan — every ray, forty times — finds 92.9% of obstacles that stick up and 11.5% of the ones you fall into. Spending more rays cannot fix it: at full scan you are already spending everything.</a:t>
-            </a:r>
-            <a:endParaRPr lang="en-US" sz="1250" dirty="0"/>
+            <a:pPr algn="ctr" indent="0" marL="0">
+              <a:buNone/>
+            </a:pPr>
+            <a:r>
+              <a:rPr lang="en-US" sz="1150" b="1" spc="80" kern="0" dirty="0">
+                <a:solidFill>
+                  <a:srgbClr val="D2622A"/>
+                </a:solidFill>
+                <a:latin typeface="Calibri" pitchFamily="34" charset="0"/>
+                <a:ea typeface="Calibri" pitchFamily="34" charset="-122"/>
+                <a:cs typeface="Calibri" pitchFamily="34" charset="-120"/>
+              </a:rPr>
+              <a:t>A FULL SCAN ALREADY MISSES 9 IN 10 DITCHES</a:t>
+            </a:r>
+            <a:endParaRPr lang="en-US" sz="1150" dirty="0"/>
           </a:p>
         </p:txBody>
       </p:sp>
       <p:pic>
         <p:nvPicPr>
-          <p:cNvPr id="12" name="Image 2" descr="deckbuild/absence.png">    </p:cNvPr>
+          <p:cNvPr id="11" name="Image 2" descr="deckbuild/absence.png">    </p:cNvPr>
           <p:cNvPicPr>
             <a:picLocks noChangeAspect="1"/>
           </p:cNvPicPr>
@@ -2444,8 +2522,8 @@
         </p:blipFill>
         <p:spPr>
           <a:xfrm>
-            <a:off x="4617720" y="1115568"/>
-            <a:ext cx="7223760" cy="2377440"/>
+            <a:off x="4892040" y="896112"/>
+            <a:ext cx="6903720" cy="3988284"/>
           </a:xfrm>
           <a:prstGeom prst="rect">
             <a:avLst/>
@@ -2454,14 +2532,14 @@
       </p:pic>
       <p:sp>
         <p:nvSpPr>
-          <p:cNvPr id="13" name="Text 8"/>
-          <p:cNvSpPr txBox="1"/>
-          <p:nvPr/>
-        </p:nvSpPr>
-        <p:spPr>
-          <a:xfrm>
-            <a:off x="4617720" y="3611880"/>
-            <a:ext cx="7223760" cy="256032"/>
+          <p:cNvPr id="12" name="Text 7"/>
+          <p:cNvSpPr txBox="1"/>
+          <p:nvPr/>
+        </p:nvSpPr>
+        <p:spPr>
+          <a:xfrm>
+            <a:off x="4892040" y="4956048"/>
+            <a:ext cx="6903720" cy="274320"/>
           </a:xfrm>
           <a:prstGeom prst="rect">
             <a:avLst/>
@@ -2473,11 +2551,11 @@
           <a:bodyPr wrap="square" lIns="0" tIns="0" rIns="0" bIns="0" rtlCol="0" anchor="ctr"/>
           <a:lstStyle/>
           <a:p>
-            <a:pPr indent="0" marL="0">
-              <a:buNone/>
-            </a:pPr>
-            <a:r>
-              <a:rPr lang="en-US" sz="1100" b="1" spc="120" kern="0" dirty="0">
+            <a:pPr algn="ctr" indent="0" marL="0">
+              <a:buNone/>
+            </a:pPr>
+            <a:r>
+              <a:rPr lang="en-US" sz="1150" b="1" spc="80" kern="0" dirty="0">
                 <a:solidFill>
                   <a:srgbClr val="D2622A"/>
                 </a:solidFill>
@@ -2485,76 +2563,34 @@
                 <a:ea typeface="Calibri" pitchFamily="34" charset="-122"/>
                 <a:cs typeface="Calibri" pitchFamily="34" charset="-120"/>
               </a:rPr>
-              <a:t>WHY — THE AMBIGUITY NOBODY RESOLVES</a:t>
-            </a:r>
-            <a:endParaRPr lang="en-US" sz="1100" dirty="0"/>
-          </a:p>
-        </p:txBody>
-      </p:sp>
-      <p:sp>
-        <p:nvSpPr>
-          <p:cNvPr id="14" name="Text 9"/>
-          <p:cNvSpPr txBox="1"/>
-          <p:nvPr/>
-        </p:nvSpPr>
-        <p:spPr>
-          <a:xfrm>
-            <a:off x="4617720" y="3886200"/>
-            <a:ext cx="7223760" cy="685800"/>
-          </a:xfrm>
-          <a:prstGeom prst="rect">
-            <a:avLst/>
-          </a:prstGeom>
-          <a:noFill/>
-          <a:ln/>
-        </p:spPr>
-        <p:txBody>
-          <a:bodyPr wrap="square" lIns="0" tIns="0" rIns="0" bIns="0" rtlCol="0" anchor="ctr"/>
-          <a:lstStyle/>
-          <a:p>
-            <a:pPr indent="0" marL="0">
-              <a:lnSpc>
-                <a:spcPct val="112000"/>
-              </a:lnSpc>
-              <a:buNone/>
-            </a:pPr>
-            <a:r>
-              <a:rPr lang="en-US" sz="1250" dirty="0">
-                <a:solidFill>
-                  <a:srgbClr val="43504F"/>
-                </a:solidFill>
-                <a:latin typeface="Calibri" pitchFamily="34" charset="0"/>
-                <a:ea typeface="Calibri" pitchFamily="34" charset="-122"/>
-                <a:cs typeface="Calibri" pitchFamily="34" charset="-120"/>
-              </a:rPr>
-              <a:t>A ditch is detected by what does NOT come back. A narrow trench is never entered by the beams — it is stepped over. To the sensor, a ditch and a patch you never looked at give the identical signal.</a:t>
-            </a:r>
-            <a:endParaRPr lang="en-US" sz="1250" dirty="0"/>
-          </a:p>
-        </p:txBody>
-      </p:sp>
-      <p:sp>
-        <p:nvSpPr>
-          <p:cNvPr id="15" name="Shape 10"/>
+              <a:t>A DITCH AND A PATCH YOU NEVER LOOKED AT GIVE THE SAME SIGNAL</a:t>
+            </a:r>
+            <a:endParaRPr lang="en-US" sz="1150" dirty="0"/>
+          </a:p>
+        </p:txBody>
+      </p:sp>
+      <p:sp>
+        <p:nvSpPr>
+          <p:cNvPr id="13" name="Shape 8"/>
           <p:cNvSpPr/>
           <p:nvPr/>
         </p:nvSpPr>
         <p:spPr>
           <a:xfrm>
-            <a:off x="4617720" y="4681728"/>
-            <a:ext cx="7223760" cy="1481328"/>
+            <a:off x="365760" y="3749040"/>
+            <a:ext cx="4160520" cy="2395728"/>
           </a:xfrm>
           <a:prstGeom prst="roundRect">
             <a:avLst>
-              <a:gd name="adj" fmla="val 2469"/>
+              <a:gd name="adj" fmla="val 1908"/>
             </a:avLst>
           </a:prstGeom>
           <a:solidFill>
             <a:srgbClr val="F0F5F1"/>
           </a:solidFill>
-          <a:ln w="9525">
+          <a:ln w="12700">
             <a:solidFill>
-              <a:srgbClr val="D2D8D3"/>
+              <a:srgbClr val="2E9E68"/>
             </a:solidFill>
             <a:prstDash val="solid"/>
           </a:ln>
@@ -2562,14 +2598,14 @@
       </p:sp>
       <p:sp>
         <p:nvSpPr>
-          <p:cNvPr id="16" name="Text 11"/>
-          <p:cNvSpPr txBox="1"/>
-          <p:nvPr/>
-        </p:nvSpPr>
-        <p:spPr>
-          <a:xfrm>
-            <a:off x="4800600" y="4828032"/>
-            <a:ext cx="6858000" cy="256032"/>
+          <p:cNvPr id="14" name="Text 9"/>
+          <p:cNvSpPr txBox="1"/>
+          <p:nvPr/>
+        </p:nvSpPr>
+        <p:spPr>
+          <a:xfrm>
+            <a:off x="566928" y="3913632"/>
+            <a:ext cx="3749040" cy="274320"/>
           </a:xfrm>
           <a:prstGeom prst="rect">
             <a:avLst/>
@@ -2585,7 +2621,7 @@
               <a:buNone/>
             </a:pPr>
             <a:r>
-              <a:rPr lang="en-US" sz="1100" b="1" spc="120" kern="0" dirty="0">
+              <a:rPr lang="en-US" sz="1150" b="1" spc="120" kern="0" dirty="0">
                 <a:solidFill>
                   <a:srgbClr val="2E9E68"/>
                 </a:solidFill>
@@ -2593,11 +2629,70 @@
                 <a:ea typeface="Calibri" pitchFamily="34" charset="-122"/>
                 <a:cs typeface="Calibri" pitchFamily="34" charset="-120"/>
               </a:rPr>
-              <a:t>OUR SOLUTION  ·  A THREE-STATE MAP</a:t>
-            </a:r>
-            <a:endParaRPr lang="en-US" sz="1100" dirty="0"/>
-          </a:p>
-        </p:txBody>
+              <a:t>OUR ANSWER</a:t>
+            </a:r>
+            <a:endParaRPr lang="en-US" sz="1150" dirty="0"/>
+          </a:p>
+        </p:txBody>
+      </p:sp>
+      <p:sp>
+        <p:nvSpPr>
+          <p:cNvPr id="15" name="Text 10"/>
+          <p:cNvSpPr txBox="1"/>
+          <p:nvPr/>
+        </p:nvSpPr>
+        <p:spPr>
+          <a:xfrm>
+            <a:off x="566928" y="4187952"/>
+            <a:ext cx="3749040" cy="384048"/>
+          </a:xfrm>
+          <a:prstGeom prst="rect">
+            <a:avLst/>
+          </a:prstGeom>
+          <a:noFill/>
+          <a:ln/>
+        </p:spPr>
+        <p:txBody>
+          <a:bodyPr wrap="square" lIns="0" tIns="0" rIns="0" bIns="0" rtlCol="0" anchor="ctr"/>
+          <a:lstStyle/>
+          <a:p>
+            <a:pPr indent="0" marL="0">
+              <a:buNone/>
+            </a:pPr>
+            <a:r>
+              <a:rPr lang="en-US" sz="2000" b="1" dirty="0">
+                <a:solidFill>
+                  <a:srgbClr val="14181A"/>
+                </a:solidFill>
+                <a:latin typeface="Cambria" pitchFamily="34" charset="0"/>
+                <a:ea typeface="Cambria" pitchFamily="34" charset="-122"/>
+                <a:cs typeface="Cambria" pitchFamily="34" charset="-120"/>
+              </a:rPr>
+              <a:t>A three-state map</a:t>
+            </a:r>
+            <a:endParaRPr lang="en-US" sz="2000" dirty="0"/>
+          </a:p>
+        </p:txBody>
+      </p:sp>
+      <p:sp>
+        <p:nvSpPr>
+          <p:cNvPr id="16" name="Shape 11"/>
+          <p:cNvSpPr/>
+          <p:nvPr/>
+        </p:nvSpPr>
+        <p:spPr>
+          <a:xfrm>
+            <a:off x="603504" y="4727448"/>
+            <a:ext cx="164592" cy="164592"/>
+          </a:xfrm>
+          <a:prstGeom prst="ellipse">
+            <a:avLst/>
+          </a:prstGeom>
+          <a:solidFill>
+            <a:srgbClr val="2E9E68"/>
+          </a:solidFill>
+          <a:ln/>
+        </p:spPr>
       </p:sp>
       <p:sp>
         <p:nvSpPr>
@@ -2607,8 +2702,8 @@
         </p:nvSpPr>
         <p:spPr>
           <a:xfrm>
-            <a:off x="4800600" y="5120640"/>
-            <a:ext cx="6858000" cy="960120"/>
+            <a:off x="877824" y="4663440"/>
+            <a:ext cx="3474720" cy="292608"/>
           </a:xfrm>
           <a:prstGeom prst="rect">
             <a:avLst/>
@@ -2621,13 +2716,167 @@
           <a:lstStyle/>
           <a:p>
             <a:pPr indent="0" marL="0">
-              <a:lnSpc>
-                <a:spcPct val="112000"/>
-              </a:lnSpc>
-              <a:buNone/>
-            </a:pPr>
-            <a:r>
-              <a:rPr lang="en-US" sz="1250" dirty="0">
+              <a:buNone/>
+            </a:pPr>
+            <a:r>
+              <a:rPr lang="en-US" sz="1250" b="1" dirty="0">
+                <a:solidFill>
+                  <a:srgbClr val="2E9E68"/>
+                </a:solidFill>
+                <a:latin typeface="Calibri" pitchFamily="34" charset="0"/>
+                <a:ea typeface="Calibri" pitchFamily="34" charset="-122"/>
+                <a:cs typeface="Calibri" pitchFamily="34" charset="-120"/>
+              </a:rPr>
+              <a:t>OBSERVED</a:t>
+            </a:r>
+            <a:endParaRPr lang="en-US" sz="1250" dirty="0"/>
+          </a:p>
+        </p:txBody>
+      </p:sp>
+      <p:sp>
+        <p:nvSpPr>
+          <p:cNvPr id="18" name="Shape 13"/>
+          <p:cNvSpPr/>
+          <p:nvPr/>
+        </p:nvSpPr>
+        <p:spPr>
+          <a:xfrm>
+            <a:off x="603504" y="5111496"/>
+            <a:ext cx="164592" cy="164592"/>
+          </a:xfrm>
+          <a:prstGeom prst="ellipse">
+            <a:avLst/>
+          </a:prstGeom>
+          <a:solidFill>
+            <a:srgbClr val="9A6F0E"/>
+          </a:solidFill>
+          <a:ln/>
+        </p:spPr>
+      </p:sp>
+      <p:sp>
+        <p:nvSpPr>
+          <p:cNvPr id="19" name="Text 14"/>
+          <p:cNvSpPr txBox="1"/>
+          <p:nvPr/>
+        </p:nvSpPr>
+        <p:spPr>
+          <a:xfrm>
+            <a:off x="877824" y="5047488"/>
+            <a:ext cx="3474720" cy="292608"/>
+          </a:xfrm>
+          <a:prstGeom prst="rect">
+            <a:avLst/>
+          </a:prstGeom>
+          <a:noFill/>
+          <a:ln/>
+        </p:spPr>
+        <p:txBody>
+          <a:bodyPr wrap="square" lIns="0" tIns="0" rIns="0" bIns="0" rtlCol="0" anchor="ctr"/>
+          <a:lstStyle/>
+          <a:p>
+            <a:pPr indent="0" marL="0">
+              <a:buNone/>
+            </a:pPr>
+            <a:r>
+              <a:rPr lang="en-US" sz="1250" b="1" dirty="0">
+                <a:solidFill>
+                  <a:srgbClr val="9A6F0E"/>
+                </a:solidFill>
+                <a:latin typeface="Calibri" pitchFamily="34" charset="0"/>
+                <a:ea typeface="Calibri" pitchFamily="34" charset="-122"/>
+                <a:cs typeface="Calibri" pitchFamily="34" charset="-120"/>
+              </a:rPr>
+              <a:t>UNKNOWN</a:t>
+            </a:r>
+            <a:endParaRPr lang="en-US" sz="1250" dirty="0"/>
+          </a:p>
+        </p:txBody>
+      </p:sp>
+      <p:sp>
+        <p:nvSpPr>
+          <p:cNvPr id="20" name="Shape 15"/>
+          <p:cNvSpPr/>
+          <p:nvPr/>
+        </p:nvSpPr>
+        <p:spPr>
+          <a:xfrm>
+            <a:off x="603504" y="5495544"/>
+            <a:ext cx="164592" cy="164592"/>
+          </a:xfrm>
+          <a:prstGeom prst="ellipse">
+            <a:avLst/>
+          </a:prstGeom>
+          <a:solidFill>
+            <a:srgbClr val="D2622A"/>
+          </a:solidFill>
+          <a:ln/>
+        </p:spPr>
+      </p:sp>
+      <p:sp>
+        <p:nvSpPr>
+          <p:cNvPr id="21" name="Text 16"/>
+          <p:cNvSpPr txBox="1"/>
+          <p:nvPr/>
+        </p:nvSpPr>
+        <p:spPr>
+          <a:xfrm>
+            <a:off x="877824" y="5431536"/>
+            <a:ext cx="3474720" cy="292608"/>
+          </a:xfrm>
+          <a:prstGeom prst="rect">
+            <a:avLst/>
+          </a:prstGeom>
+          <a:noFill/>
+          <a:ln/>
+        </p:spPr>
+        <p:txBody>
+          <a:bodyPr wrap="square" lIns="0" tIns="0" rIns="0" bIns="0" rtlCol="0" anchor="ctr"/>
+          <a:lstStyle/>
+          <a:p>
+            <a:pPr indent="0" marL="0">
+              <a:buNone/>
+            </a:pPr>
+            <a:r>
+              <a:rPr lang="en-US" sz="1250" b="1" dirty="0">
+                <a:solidFill>
+                  <a:srgbClr val="D2622A"/>
+                </a:solidFill>
+                <a:latin typeface="Calibri" pitchFamily="34" charset="0"/>
+                <a:ea typeface="Calibri" pitchFamily="34" charset="-122"/>
+                <a:cs typeface="Calibri" pitchFamily="34" charset="-120"/>
+              </a:rPr>
+              <a:t>CANDIDATE_NEGATIVE</a:t>
+            </a:r>
+            <a:endParaRPr lang="en-US" sz="1250" dirty="0"/>
+          </a:p>
+        </p:txBody>
+      </p:sp>
+      <p:sp>
+        <p:nvSpPr>
+          <p:cNvPr id="22" name="Text 17"/>
+          <p:cNvSpPr txBox="1"/>
+          <p:nvPr/>
+        </p:nvSpPr>
+        <p:spPr>
+          <a:xfrm>
+            <a:off x="566928" y="5797296"/>
+            <a:ext cx="3749040" cy="274320"/>
+          </a:xfrm>
+          <a:prstGeom prst="rect">
+            <a:avLst/>
+          </a:prstGeom>
+          <a:noFill/>
+          <a:ln/>
+        </p:spPr>
+        <p:txBody>
+          <a:bodyPr wrap="square" lIns="0" tIns="0" rIns="0" bIns="0" rtlCol="0" anchor="ctr"/>
+          <a:lstStyle/>
+          <a:p>
+            <a:pPr indent="0" marL="0">
+              <a:buNone/>
+            </a:pPr>
+            <a:r>
+              <a:rPr lang="en-US" sz="1150" i="1" dirty="0">
                 <a:solidFill>
                   <a:srgbClr val="43504F"/>
                 </a:solidFill>
@@ -2635,29 +2884,9 @@
                 <a:ea typeface="Calibri" pitchFamily="34" charset="-122"/>
                 <a:cs typeface="Calibri" pitchFamily="34" charset="-120"/>
               </a:rPr>
-              <a:t>OBSERVED  ·  UNKNOWN  ·  CANDIDATE_NEGATIVE  —  unknown is a real answer, never silently treated as safe.</a:t>
-            </a:r>
-            <a:endParaRPr lang="en-US" sz="1250" dirty="0"/>
-          </a:p>
-          <a:p>
-            <a:pPr indent="0" marL="0">
-              <a:lnSpc>
-                <a:spcPct val="112000"/>
-              </a:lnSpc>
-              <a:buNone/>
-            </a:pPr>
-            <a:r>
-              <a:rPr lang="en-US" sz="1250" dirty="0">
-                <a:solidFill>
-                  <a:srgbClr val="43504F"/>
-                </a:solidFill>
-                <a:latin typeface="Calibri" pitchFamily="34" charset="0"/>
-                <a:ea typeface="Calibri" pitchFamily="34" charset="-122"/>
-                <a:cs typeface="Calibri" pitchFamily="34" charset="-120"/>
-              </a:rPr>
-              <a:t>Novelty: adaptive lidar sampling exists (AEye, NEC) but only for urban driving. Negative-obstacle work exists but assumes dense scanning. We are the first to put the two together for off-road terrain.</a:t>
-            </a:r>
-            <a:endParaRPr lang="en-US" sz="1250" dirty="0"/>
+              <a:t>Unknown is never upgraded to “safe”.</a:t>
+            </a:r>
+            <a:endParaRPr lang="en-US" sz="1150" dirty="0"/>
           </a:p>
         </p:txBody>
       </p:sp>
@@ -2701,8 +2930,8 @@
         </p:nvSpPr>
         <p:spPr>
           <a:xfrm>
-            <a:off x="256032" y="146304"/>
-            <a:ext cx="1207008" cy="566928"/>
+            <a:off x="237744" y="128016"/>
+            <a:ext cx="1152144" cy="530352"/>
           </a:xfrm>
           <a:prstGeom prst="ellipse">
             <a:avLst/>
@@ -2726,8 +2955,8 @@
         </p:nvSpPr>
         <p:spPr>
           <a:xfrm>
-            <a:off x="256032" y="146304"/>
-            <a:ext cx="1207008" cy="566928"/>
+            <a:off x="237744" y="128016"/>
+            <a:ext cx="1152144" cy="530352"/>
           </a:xfrm>
           <a:prstGeom prst="rect">
             <a:avLst/>
@@ -2743,7 +2972,7 @@
               <a:buNone/>
             </a:pPr>
             <a:r>
-              <a:rPr lang="en-US" sz="1300" dirty="0">
+              <a:rPr lang="en-US" sz="1250" dirty="0">
                 <a:solidFill>
                   <a:srgbClr val="14181A"/>
                 </a:solidFill>
@@ -2753,7 +2982,7 @@
               </a:rPr>
               <a:t>Raysense</a:t>
             </a:r>
-            <a:endParaRPr lang="en-US" sz="1300" dirty="0"/>
+            <a:endParaRPr lang="en-US" sz="1250" dirty="0"/>
           </a:p>
         </p:txBody>
       </p:sp>
@@ -2773,8 +3002,8 @@
         </p:blipFill>
         <p:spPr>
           <a:xfrm>
-            <a:off x="10378440" y="91440"/>
-            <a:ext cx="1572768" cy="786384"/>
+            <a:off x="10469880" y="91440"/>
+            <a:ext cx="1481328" cy="585216"/>
           </a:xfrm>
           <a:prstGeom prst="rect">
             <a:avLst/>
@@ -2789,8 +3018,8 @@
         </p:nvSpPr>
         <p:spPr>
           <a:xfrm>
-            <a:off x="1645920" y="146304"/>
-            <a:ext cx="8595360" cy="658368"/>
+            <a:off x="1554480" y="118872"/>
+            <a:ext cx="8778240" cy="566928"/>
           </a:xfrm>
           <a:prstGeom prst="rect">
             <a:avLst/>
@@ -2806,7 +3035,7 @@
               <a:buNone/>
             </a:pPr>
             <a:r>
-              <a:rPr lang="en-US" sz="3100" b="1" dirty="0">
+              <a:rPr lang="en-US" sz="2900" b="1" dirty="0">
                 <a:solidFill>
                   <a:srgbClr val="14181A"/>
                 </a:solidFill>
@@ -2816,7 +3045,7 @@
               </a:rPr>
               <a:t>TECHNICAL APPROACH</a:t>
             </a:r>
-            <a:endParaRPr lang="en-US" sz="3100" dirty="0"/>
+            <a:endParaRPr lang="en-US" sz="2900" dirty="0"/>
           </a:p>
         </p:txBody>
       </p:sp>
@@ -2828,8 +3057,8 @@
         </p:nvSpPr>
         <p:spPr>
           <a:xfrm>
-            <a:off x="0" y="6437376"/>
-            <a:ext cx="12191695" cy="420624"/>
+            <a:off x="0" y="6473952"/>
+            <a:ext cx="12191695" cy="384048"/>
           </a:xfrm>
           <a:prstGeom prst="rect">
             <a:avLst/>
@@ -2848,8 +3077,8 @@
         </p:nvSpPr>
         <p:spPr>
           <a:xfrm>
-            <a:off x="0" y="6437376"/>
-            <a:ext cx="12191695" cy="420624"/>
+            <a:off x="0" y="6473952"/>
+            <a:ext cx="12191695" cy="384048"/>
           </a:xfrm>
           <a:prstGeom prst="rect">
             <a:avLst/>
@@ -2865,7 +3094,7 @@
               <a:buNone/>
             </a:pPr>
             <a:r>
-              <a:rPr lang="en-US" sz="1200" dirty="0">
+              <a:rPr lang="en-US" sz="1100" dirty="0">
                 <a:solidFill>
                   <a:srgbClr val="FFFFFF"/>
                 </a:solidFill>
@@ -2875,7 +3104,7 @@
               </a:rPr>
               <a:t>@SIH Idea submission- Template</a:t>
             </a:r>
-            <a:endParaRPr lang="en-US" sz="1200" dirty="0"/>
+            <a:endParaRPr lang="en-US" sz="1100" dirty="0"/>
           </a:p>
         </p:txBody>
       </p:sp>
@@ -2887,8 +3116,8 @@
         </p:nvSpPr>
         <p:spPr>
           <a:xfrm>
-            <a:off x="11277295" y="6437376"/>
-            <a:ext cx="548640" cy="420624"/>
+            <a:off x="11323015" y="6473952"/>
+            <a:ext cx="502920" cy="384048"/>
           </a:xfrm>
           <a:prstGeom prst="rect">
             <a:avLst/>
@@ -2904,7 +3133,7 @@
               <a:buNone/>
             </a:pPr>
             <a:r>
-              <a:rPr lang="en-US" sz="1200" b="1" dirty="0">
+              <a:rPr lang="en-US" sz="1100" b="1" dirty="0">
                 <a:solidFill>
                   <a:srgbClr val="FFFFFF"/>
                 </a:solidFill>
@@ -2914,13 +3143,13 @@
               </a:rPr>
               <a:t>3</a:t>
             </a:r>
-            <a:endParaRPr lang="en-US" sz="1200" dirty="0"/>
+            <a:endParaRPr lang="en-US" sz="1100" dirty="0"/>
           </a:p>
         </p:txBody>
       </p:sp>
       <p:pic>
         <p:nvPicPr>
-          <p:cNvPr id="9" name="Image 1" descr="deckbuild/fig_quadratic.png">    </p:cNvPr>
+          <p:cNvPr id="9" name="Image 1" descr="deckbuild/fig_pipeline.png">    </p:cNvPr>
           <p:cNvPicPr>
             <a:picLocks noChangeAspect="1"/>
           </p:cNvPicPr>
@@ -2934,24 +3163,48 @@
         </p:blipFill>
         <p:spPr>
           <a:xfrm>
-            <a:off x="384048" y="1024128"/>
-            <a:ext cx="5029200" cy="3273552"/>
+            <a:off x="365760" y="868680"/>
+            <a:ext cx="5440680" cy="3703662"/>
           </a:xfrm>
           <a:prstGeom prst="rect">
             <a:avLst/>
           </a:prstGeom>
         </p:spPr>
       </p:pic>
-      <p:sp>
-        <p:nvSpPr>
-          <p:cNvPr id="10" name="Text 6"/>
-          <p:cNvSpPr txBox="1"/>
-          <p:nvPr/>
-        </p:nvSpPr>
-        <p:spPr>
-          <a:xfrm>
-            <a:off x="384048" y="4389120"/>
-            <a:ext cx="5029200" cy="256032"/>
+      <p:pic>
+        <p:nvPicPr>
+          <p:cNvPr id="10" name="Image 2" descr="deckbuild/fig_quadratic.png">    </p:cNvPr>
+          <p:cNvPicPr>
+            <a:picLocks noChangeAspect="1"/>
+          </p:cNvPicPr>
+          <p:nvPr/>
+        </p:nvPicPr>
+        <p:blipFill>
+          <a:blip r:embed="rId3"/>
+          <a:stretch>
+            <a:fillRect/>
+          </a:stretch>
+        </p:blipFill>
+        <p:spPr>
+          <a:xfrm>
+            <a:off x="6144768" y="868680"/>
+            <a:ext cx="5669280" cy="3693342"/>
+          </a:xfrm>
+          <a:prstGeom prst="rect">
+            <a:avLst/>
+          </a:prstGeom>
+        </p:spPr>
+      </p:pic>
+      <p:sp>
+        <p:nvSpPr>
+          <p:cNvPr id="11" name="Text 6"/>
+          <p:cNvSpPr txBox="1"/>
+          <p:nvPr/>
+        </p:nvSpPr>
+        <p:spPr>
+          <a:xfrm>
+            <a:off x="6144768" y="4599432"/>
+            <a:ext cx="5669280" cy="274320"/>
           </a:xfrm>
           <a:prstGeom prst="rect">
             <a:avLst/>
@@ -2963,11 +3216,11 @@
           <a:bodyPr wrap="square" lIns="0" tIns="0" rIns="0" bIns="0" rtlCol="0" anchor="ctr"/>
           <a:lstStyle/>
           <a:p>
-            <a:pPr indent="0" marL="0">
-              <a:buNone/>
-            </a:pPr>
-            <a:r>
-              <a:rPr lang="en-US" sz="1100" b="1" spc="120" kern="0" dirty="0">
+            <a:pPr algn="ctr" indent="0" marL="0">
+              <a:buNone/>
+            </a:pPr>
+            <a:r>
+              <a:rPr lang="en-US" sz="1150" b="1" spc="80" kern="0" dirty="0">
                 <a:solidFill>
                   <a:srgbClr val="D2622A"/>
                 </a:solidFill>
@@ -2975,220 +3228,7 @@
                 <a:ea typeface="Calibri" pitchFamily="34" charset="-122"/>
                 <a:cs typeface="Calibri" pitchFamily="34" charset="-120"/>
               </a:rPr>
-              <a:t>THE SAFETY FLOOR — CORRECTED GEOMETRY</a:t>
-            </a:r>
-            <a:endParaRPr lang="en-US" sz="1100" dirty="0"/>
-          </a:p>
-        </p:txBody>
-      </p:sp>
-      <p:sp>
-        <p:nvSpPr>
-          <p:cNvPr id="11" name="Text 7"/>
-          <p:cNvSpPr txBox="1"/>
-          <p:nvPr/>
-        </p:nvSpPr>
-        <p:spPr>
-          <a:xfrm>
-            <a:off x="384048" y="4681728"/>
-            <a:ext cx="5029200" cy="914400"/>
-          </a:xfrm>
-          <a:prstGeom prst="rect">
-            <a:avLst/>
-          </a:prstGeom>
-          <a:noFill/>
-          <a:ln/>
-        </p:spPr>
-        <p:txBody>
-          <a:bodyPr wrap="square" lIns="0" tIns="0" rIns="0" bIns="0" rtlCol="0" anchor="ctr"/>
-          <a:lstStyle/>
-          <a:p>
-            <a:pPr indent="0" marL="0">
-              <a:lnSpc>
-                <a:spcPct val="112000"/>
-              </a:lnSpc>
-              <a:buNone/>
-            </a:pPr>
-            <a:r>
-              <a:rPr lang="en-US" sz="1300" b="1" dirty="0">
-                <a:solidFill>
-                  <a:srgbClr val="43504F"/>
-                </a:solidFill>
-                <a:latin typeface="Calibri" pitchFamily="34" charset="0"/>
-                <a:ea typeface="Calibri" pitchFamily="34" charset="-122"/>
-                <a:cs typeface="Calibri" pitchFamily="34" charset="-120"/>
-              </a:rPr>
-              <a:t>Δθ ≤ w · h</a:t>
-            </a:r>
-            <a:pPr indent="0" marL="0">
-              <a:lnSpc>
-                <a:spcPct val="112000"/>
-              </a:lnSpc>
-              <a:buNone/>
-            </a:pPr>
-            <a:r>
-              <a:rPr lang="en-US" sz="1300" b="1" baseline="-40000" dirty="0">
-                <a:solidFill>
-                  <a:srgbClr val="43504F"/>
-                </a:solidFill>
-                <a:latin typeface="Calibri" pitchFamily="34" charset="0"/>
-                <a:ea typeface="Calibri" pitchFamily="34" charset="-122"/>
-                <a:cs typeface="Calibri" pitchFamily="34" charset="-120"/>
-              </a:rPr>
-              <a:t>sensor</a:t>
-            </a:r>
-            <a:pPr indent="0" marL="0">
-              <a:lnSpc>
-                <a:spcPct val="112000"/>
-              </a:lnSpc>
-              <a:buNone/>
-            </a:pPr>
-            <a:r>
-              <a:rPr lang="en-US" sz="1300" b="1" dirty="0">
-                <a:solidFill>
-                  <a:srgbClr val="43504F"/>
-                </a:solidFill>
-                <a:latin typeface="Calibri" pitchFamily="34" charset="0"/>
-                <a:ea typeface="Calibri" pitchFamily="34" charset="-122"/>
-                <a:cs typeface="Calibri" pitchFamily="34" charset="-120"/>
-              </a:rPr>
-              <a:t> / r²</a:t>
-            </a:r>
-            <a:pPr indent="0" marL="0">
-              <a:lnSpc>
-                <a:spcPct val="112000"/>
-              </a:lnSpc>
-              <a:buNone/>
-            </a:pPr>
-            <a:r>
-              <a:rPr lang="en-US" sz="1300" dirty="0">
-                <a:solidFill>
-                  <a:srgbClr val="43504F"/>
-                </a:solidFill>
-                <a:latin typeface="Calibri" pitchFamily="34" charset="0"/>
-                <a:ea typeface="Calibri" pitchFamily="34" charset="-122"/>
-                <a:cs typeface="Calibri" pitchFamily="34" charset="-120"/>
-              </a:rPr>
-              <a:t>      ditches bind quadratically; bumps only linearly. A floor sized with h/r is comfortably met while ditches stay invisible.</a:t>
-            </a:r>
-            <a:endParaRPr lang="en-US" sz="1300" dirty="0"/>
-          </a:p>
-        </p:txBody>
-      </p:sp>
-      <p:sp>
-        <p:nvSpPr>
-          <p:cNvPr id="12" name="Text 8"/>
-          <p:cNvSpPr txBox="1"/>
-          <p:nvPr/>
-        </p:nvSpPr>
-        <p:spPr>
-          <a:xfrm>
-            <a:off x="5715000" y="1024128"/>
-            <a:ext cx="6126480" cy="256032"/>
-          </a:xfrm>
-          <a:prstGeom prst="rect">
-            <a:avLst/>
-          </a:prstGeom>
-          <a:noFill/>
-          <a:ln/>
-        </p:spPr>
-        <p:txBody>
-          <a:bodyPr wrap="square" lIns="0" tIns="0" rIns="0" bIns="0" rtlCol="0" anchor="ctr"/>
-          <a:lstStyle/>
-          <a:p>
-            <a:pPr indent="0" marL="0">
-              <a:buNone/>
-            </a:pPr>
-            <a:r>
-              <a:rPr lang="en-US" sz="1100" b="1" spc="120" kern="0" dirty="0">
-                <a:solidFill>
-                  <a:srgbClr val="2C8FBF"/>
-                </a:solidFill>
-                <a:latin typeface="Calibri" pitchFamily="34" charset="0"/>
-                <a:ea typeface="Calibri" pitchFamily="34" charset="-122"/>
-                <a:cs typeface="Calibri" pitchFamily="34" charset="-120"/>
-              </a:rPr>
-              <a:t>PIPELINE  —  SINGLE PASS, PER FRAME</a:t>
-            </a:r>
-            <a:endParaRPr lang="en-US" sz="1100" dirty="0"/>
-          </a:p>
-        </p:txBody>
-      </p:sp>
-      <p:sp>
-        <p:nvSpPr>
-          <p:cNvPr id="13" name="Text 9"/>
-          <p:cNvSpPr txBox="1"/>
-          <p:nvPr/>
-        </p:nvSpPr>
-        <p:spPr>
-          <a:xfrm>
-            <a:off x="5715000" y="1353312"/>
-            <a:ext cx="1417320" cy="274320"/>
-          </a:xfrm>
-          <a:prstGeom prst="rect">
-            <a:avLst/>
-          </a:prstGeom>
-          <a:noFill/>
-          <a:ln/>
-        </p:spPr>
-        <p:txBody>
-          <a:bodyPr wrap="square" lIns="0" tIns="0" rIns="0" bIns="0" rtlCol="0" anchor="ctr"/>
-          <a:lstStyle/>
-          <a:p>
-            <a:pPr indent="0" marL="0">
-              <a:buNone/>
-            </a:pPr>
-            <a:r>
-              <a:rPr lang="en-US" sz="1250" b="1" dirty="0">
-                <a:solidFill>
-                  <a:srgbClr val="14181A"/>
-                </a:solidFill>
-                <a:latin typeface="Calibri" pitchFamily="34" charset="0"/>
-                <a:ea typeface="Calibri" pitchFamily="34" charset="-122"/>
-                <a:cs typeface="Calibri" pitchFamily="34" charset="-120"/>
-              </a:rPr>
-              <a:t>1  Predict</a:t>
-            </a:r>
-            <a:endParaRPr lang="en-US" sz="1250" dirty="0"/>
-          </a:p>
-        </p:txBody>
-      </p:sp>
-      <p:sp>
-        <p:nvSpPr>
-          <p:cNvPr id="14" name="Text 10"/>
-          <p:cNvSpPr txBox="1"/>
-          <p:nvPr/>
-        </p:nvSpPr>
-        <p:spPr>
-          <a:xfrm>
-            <a:off x="7178040" y="1335024"/>
-            <a:ext cx="4663440" cy="512064"/>
-          </a:xfrm>
-          <a:prstGeom prst="rect">
-            <a:avLst/>
-          </a:prstGeom>
-          <a:noFill/>
-          <a:ln/>
-        </p:spPr>
-        <p:txBody>
-          <a:bodyPr wrap="square" lIns="0" tIns="0" rIns="0" bIns="0" rtlCol="0" anchor="ctr"/>
-          <a:lstStyle/>
-          <a:p>
-            <a:pPr indent="0" marL="0">
-              <a:lnSpc>
-                <a:spcPct val="105000"/>
-              </a:lnSpc>
-              <a:buNone/>
-            </a:pPr>
-            <a:r>
-              <a:rPr lang="en-US" sz="1150" dirty="0">
-                <a:solidFill>
-                  <a:srgbClr val="43504F"/>
-                </a:solidFill>
-                <a:latin typeface="Calibri" pitchFamily="34" charset="0"/>
-                <a:ea typeface="Calibri" pitchFamily="34" charset="-122"/>
-                <a:cs typeface="Calibri" pitchFamily="34" charset="-120"/>
-              </a:rPr>
-              <a:t>warp the previous map forward using ego-motion; age every cell</a:t>
+              <a:t>DITCHES DEGRADE QUADRATICALLY · BUMPS ONLY LINEARLY</a:t>
             </a:r>
             <a:endParaRPr lang="en-US" sz="1150" dirty="0"/>
           </a:p>
@@ -3196,431 +3236,26 @@
       </p:sp>
       <p:sp>
         <p:nvSpPr>
-          <p:cNvPr id="15" name="Text 11"/>
-          <p:cNvSpPr txBox="1"/>
-          <p:nvPr/>
-        </p:nvSpPr>
-        <p:spPr>
-          <a:xfrm>
-            <a:off x="5715000" y="1920240"/>
-            <a:ext cx="1417320" cy="274320"/>
-          </a:xfrm>
-          <a:prstGeom prst="rect">
-            <a:avLst/>
-          </a:prstGeom>
-          <a:noFill/>
-          <a:ln/>
-        </p:spPr>
-        <p:txBody>
-          <a:bodyPr wrap="square" lIns="0" tIns="0" rIns="0" bIns="0" rtlCol="0" anchor="ctr"/>
-          <a:lstStyle/>
-          <a:p>
-            <a:pPr indent="0" marL="0">
-              <a:buNone/>
-            </a:pPr>
-            <a:r>
-              <a:rPr lang="en-US" sz="1250" b="1" dirty="0">
-                <a:solidFill>
-                  <a:srgbClr val="14181A"/>
-                </a:solidFill>
-                <a:latin typeface="Calibri" pitchFamily="34" charset="0"/>
-                <a:ea typeface="Calibri" pitchFamily="34" charset="-122"/>
-                <a:cs typeface="Calibri" pitchFamily="34" charset="-120"/>
-              </a:rPr>
-              <a:t>2  Safety floor</a:t>
-            </a:r>
-            <a:endParaRPr lang="en-US" sz="1250" dirty="0"/>
-          </a:p>
-        </p:txBody>
-      </p:sp>
-      <p:sp>
-        <p:nvSpPr>
-          <p:cNvPr id="16" name="Text 12"/>
-          <p:cNvSpPr txBox="1"/>
-          <p:nvPr/>
-        </p:nvSpPr>
-        <p:spPr>
-          <a:xfrm>
-            <a:off x="7178040" y="1901952"/>
-            <a:ext cx="4663440" cy="512064"/>
-          </a:xfrm>
-          <a:prstGeom prst="rect">
-            <a:avLst/>
-          </a:prstGeom>
-          <a:noFill/>
-          <a:ln/>
-        </p:spPr>
-        <p:txBody>
-          <a:bodyPr wrap="square" lIns="0" tIns="0" rIns="0" bIns="0" rtlCol="0" anchor="ctr"/>
-          <a:lstStyle/>
-          <a:p>
-            <a:pPr indent="0" marL="0">
-              <a:lnSpc>
-                <a:spcPct val="105000"/>
-              </a:lnSpc>
-              <a:buNone/>
-            </a:pPr>
-            <a:r>
-              <a:rPr lang="en-US" sz="1150" dirty="0">
-                <a:solidFill>
-                  <a:srgbClr val="43504F"/>
-                </a:solidFill>
-                <a:latin typeface="Calibri" pitchFamily="34" charset="0"/>
-                <a:ea typeface="Calibri" pitchFamily="34" charset="-122"/>
-                <a:cs typeface="Calibri" pitchFamily="34" charset="-120"/>
-              </a:rPr>
-              <a:t>hard geometric constraint allocated BEFORE anything adaptive — never traded away</a:t>
-            </a:r>
-            <a:endParaRPr lang="en-US" sz="1150" dirty="0"/>
-          </a:p>
-        </p:txBody>
-      </p:sp>
-      <p:sp>
-        <p:nvSpPr>
-          <p:cNvPr id="17" name="Text 13"/>
-          <p:cNvSpPr txBox="1"/>
-          <p:nvPr/>
-        </p:nvSpPr>
-        <p:spPr>
-          <a:xfrm>
-            <a:off x="5715000" y="2487168"/>
-            <a:ext cx="1417320" cy="274320"/>
-          </a:xfrm>
-          <a:prstGeom prst="rect">
-            <a:avLst/>
-          </a:prstGeom>
-          <a:noFill/>
-          <a:ln/>
-        </p:spPr>
-        <p:txBody>
-          <a:bodyPr wrap="square" lIns="0" tIns="0" rIns="0" bIns="0" rtlCol="0" anchor="ctr"/>
-          <a:lstStyle/>
-          <a:p>
-            <a:pPr indent="0" marL="0">
-              <a:buNone/>
-            </a:pPr>
-            <a:r>
-              <a:rPr lang="en-US" sz="1250" b="1" dirty="0">
-                <a:solidFill>
-                  <a:srgbClr val="14181A"/>
-                </a:solidFill>
-                <a:latin typeface="Calibri" pitchFamily="34" charset="0"/>
-                <a:ea typeface="Calibri" pitchFamily="34" charset="-122"/>
-                <a:cs typeface="Calibri" pitchFamily="34" charset="-120"/>
-              </a:rPr>
-              <a:t>3  Need map</a:t>
-            </a:r>
-            <a:endParaRPr lang="en-US" sz="1250" dirty="0"/>
-          </a:p>
-        </p:txBody>
-      </p:sp>
-      <p:sp>
-        <p:nvSpPr>
-          <p:cNvPr id="18" name="Text 14"/>
-          <p:cNvSpPr txBox="1"/>
-          <p:nvPr/>
-        </p:nvSpPr>
-        <p:spPr>
-          <a:xfrm>
-            <a:off x="7178040" y="2468880"/>
-            <a:ext cx="4663440" cy="512064"/>
-          </a:xfrm>
-          <a:prstGeom prst="rect">
-            <a:avLst/>
-          </a:prstGeom>
-          <a:noFill/>
-          <a:ln/>
-        </p:spPr>
-        <p:txBody>
-          <a:bodyPr wrap="square" lIns="0" tIns="0" rIns="0" bIns="0" rtlCol="0" anchor="ctr"/>
-          <a:lstStyle/>
-          <a:p>
-            <a:pPr indent="0" marL="0">
-              <a:lnSpc>
-                <a:spcPct val="105000"/>
-              </a:lnSpc>
-              <a:buNone/>
-            </a:pPr>
-            <a:r>
-              <a:rPr lang="en-US" sz="1150" dirty="0">
-                <a:solidFill>
-                  <a:srgbClr val="43504F"/>
-                </a:solidFill>
-                <a:latin typeface="Calibri" pitchFamily="34" charset="0"/>
-                <a:ea typeface="Calibri" pitchFamily="34" charset="-122"/>
-                <a:cs typeface="Calibri" pitchFamily="34" charset="-120"/>
-              </a:rPr>
-              <a:t>score every angular bin: gradient, staleness, moving objects, frontier, unresolved candidates</a:t>
-            </a:r>
-            <a:endParaRPr lang="en-US" sz="1150" dirty="0"/>
-          </a:p>
-        </p:txBody>
-      </p:sp>
-      <p:sp>
-        <p:nvSpPr>
-          <p:cNvPr id="19" name="Text 15"/>
-          <p:cNvSpPr txBox="1"/>
-          <p:nvPr/>
-        </p:nvSpPr>
-        <p:spPr>
-          <a:xfrm>
-            <a:off x="5715000" y="3054096"/>
-            <a:ext cx="1417320" cy="274320"/>
-          </a:xfrm>
-          <a:prstGeom prst="rect">
-            <a:avLst/>
-          </a:prstGeom>
-          <a:noFill/>
-          <a:ln/>
-        </p:spPr>
-        <p:txBody>
-          <a:bodyPr wrap="square" lIns="0" tIns="0" rIns="0" bIns="0" rtlCol="0" anchor="ctr"/>
-          <a:lstStyle/>
-          <a:p>
-            <a:pPr indent="0" marL="0">
-              <a:buNone/>
-            </a:pPr>
-            <a:r>
-              <a:rPr lang="en-US" sz="1250" b="1" dirty="0">
-                <a:solidFill>
-                  <a:srgbClr val="14181A"/>
-                </a:solidFill>
-                <a:latin typeface="Calibri" pitchFamily="34" charset="0"/>
-                <a:ea typeface="Calibri" pitchFamily="34" charset="-122"/>
-                <a:cs typeface="Calibri" pitchFamily="34" charset="-120"/>
-              </a:rPr>
-              <a:t>4  Acquire</a:t>
-            </a:r>
-            <a:endParaRPr lang="en-US" sz="1250" dirty="0"/>
-          </a:p>
-        </p:txBody>
-      </p:sp>
-      <p:sp>
-        <p:nvSpPr>
-          <p:cNvPr id="20" name="Text 16"/>
-          <p:cNvSpPr txBox="1"/>
-          <p:nvPr/>
-        </p:nvSpPr>
-        <p:spPr>
-          <a:xfrm>
-            <a:off x="7178040" y="3035808"/>
-            <a:ext cx="4663440" cy="512064"/>
-          </a:xfrm>
-          <a:prstGeom prst="rect">
-            <a:avLst/>
-          </a:prstGeom>
-          <a:noFill/>
-          <a:ln/>
-        </p:spPr>
-        <p:txBody>
-          <a:bodyPr wrap="square" lIns="0" tIns="0" rIns="0" bIns="0" rtlCol="0" anchor="ctr"/>
-          <a:lstStyle/>
-          <a:p>
-            <a:pPr indent="0" marL="0">
-              <a:lnSpc>
-                <a:spcPct val="105000"/>
-              </a:lnSpc>
-              <a:buNone/>
-            </a:pPr>
-            <a:r>
-              <a:rPr lang="en-US" sz="1150" dirty="0">
-                <a:solidFill>
-                  <a:srgbClr val="43504F"/>
-                </a:solidFill>
-                <a:latin typeface="Calibri" pitchFamily="34" charset="0"/>
-                <a:ea typeface="Calibri" pitchFamily="34" charset="-122"/>
-                <a:cs typeface="Calibri" pitchFamily="34" charset="-120"/>
-              </a:rPr>
-              <a:t>one of three backends — steerable MEMS/OPA, fixed-pattern Ouster/Velodyne, or replay</a:t>
-            </a:r>
-            <a:endParaRPr lang="en-US" sz="1150" dirty="0"/>
-          </a:p>
-        </p:txBody>
-      </p:sp>
-      <p:sp>
-        <p:nvSpPr>
-          <p:cNvPr id="21" name="Text 17"/>
-          <p:cNvSpPr txBox="1"/>
-          <p:nvPr/>
-        </p:nvSpPr>
-        <p:spPr>
-          <a:xfrm>
-            <a:off x="5715000" y="3621024"/>
-            <a:ext cx="1417320" cy="274320"/>
-          </a:xfrm>
-          <a:prstGeom prst="rect">
-            <a:avLst/>
-          </a:prstGeom>
-          <a:noFill/>
-          <a:ln/>
-        </p:spPr>
-        <p:txBody>
-          <a:bodyPr wrap="square" lIns="0" tIns="0" rIns="0" bIns="0" rtlCol="0" anchor="ctr"/>
-          <a:lstStyle/>
-          <a:p>
-            <a:pPr indent="0" marL="0">
-              <a:buNone/>
-            </a:pPr>
-            <a:r>
-              <a:rPr lang="en-US" sz="1250" b="1" dirty="0">
-                <a:solidFill>
-                  <a:srgbClr val="14181A"/>
-                </a:solidFill>
-                <a:latin typeface="Calibri" pitchFamily="34" charset="0"/>
-                <a:ea typeface="Calibri" pitchFamily="34" charset="-122"/>
-                <a:cs typeface="Calibri" pitchFamily="34" charset="-120"/>
-              </a:rPr>
-              <a:t>5  Disambiguate</a:t>
-            </a:r>
-            <a:endParaRPr lang="en-US" sz="1250" dirty="0"/>
-          </a:p>
-        </p:txBody>
-      </p:sp>
-      <p:sp>
-        <p:nvSpPr>
-          <p:cNvPr id="22" name="Text 18"/>
-          <p:cNvSpPr txBox="1"/>
-          <p:nvPr/>
-        </p:nvSpPr>
-        <p:spPr>
-          <a:xfrm>
-            <a:off x="7178040" y="3602736"/>
-            <a:ext cx="4663440" cy="512064"/>
-          </a:xfrm>
-          <a:prstGeom prst="rect">
-            <a:avLst/>
-          </a:prstGeom>
-          <a:noFill/>
-          <a:ln/>
-        </p:spPr>
-        <p:txBody>
-          <a:bodyPr wrap="square" lIns="0" tIns="0" rIns="0" bIns="0" rtlCol="0" anchor="ctr"/>
-          <a:lstStyle/>
-          <a:p>
-            <a:pPr indent="0" marL="0">
-              <a:lnSpc>
-                <a:spcPct val="105000"/>
-              </a:lnSpc>
-              <a:buNone/>
-            </a:pPr>
-            <a:r>
-              <a:rPr lang="en-US" sz="1150" dirty="0">
-                <a:solidFill>
-                  <a:srgbClr val="43504F"/>
-                </a:solidFill>
-                <a:latin typeface="Calibri" pitchFamily="34" charset="0"/>
-                <a:ea typeface="Calibri" pitchFamily="34" charset="-122"/>
-                <a:cs typeface="Calibri" pitchFamily="34" charset="-120"/>
-              </a:rPr>
-              <a:t>track RAYS, not points: a cell is empty only if a ray traversed it and returned from beyond</a:t>
-            </a:r>
-            <a:endParaRPr lang="en-US" sz="1150" dirty="0"/>
-          </a:p>
-        </p:txBody>
-      </p:sp>
-      <p:sp>
-        <p:nvSpPr>
-          <p:cNvPr id="23" name="Text 19"/>
-          <p:cNvSpPr txBox="1"/>
-          <p:nvPr/>
-        </p:nvSpPr>
-        <p:spPr>
-          <a:xfrm>
-            <a:off x="5715000" y="4187952"/>
-            <a:ext cx="1417320" cy="274320"/>
-          </a:xfrm>
-          <a:prstGeom prst="rect">
-            <a:avLst/>
-          </a:prstGeom>
-          <a:noFill/>
-          <a:ln/>
-        </p:spPr>
-        <p:txBody>
-          <a:bodyPr wrap="square" lIns="0" tIns="0" rIns="0" bIns="0" rtlCol="0" anchor="ctr"/>
-          <a:lstStyle/>
-          <a:p>
-            <a:pPr indent="0" marL="0">
-              <a:buNone/>
-            </a:pPr>
-            <a:r>
-              <a:rPr lang="en-US" sz="1250" b="1" dirty="0">
-                <a:solidFill>
-                  <a:srgbClr val="14181A"/>
-                </a:solidFill>
-                <a:latin typeface="Calibri" pitchFamily="34" charset="0"/>
-                <a:ea typeface="Calibri" pitchFamily="34" charset="-122"/>
-                <a:cs typeface="Calibri" pitchFamily="34" charset="-120"/>
-              </a:rPr>
-              <a:t>6  Output</a:t>
-            </a:r>
-            <a:endParaRPr lang="en-US" sz="1250" dirty="0"/>
-          </a:p>
-        </p:txBody>
-      </p:sp>
-      <p:sp>
-        <p:nvSpPr>
-          <p:cNvPr id="24" name="Text 20"/>
-          <p:cNvSpPr txBox="1"/>
-          <p:nvPr/>
-        </p:nvSpPr>
-        <p:spPr>
-          <a:xfrm>
-            <a:off x="7178040" y="4169664"/>
-            <a:ext cx="4663440" cy="512064"/>
-          </a:xfrm>
-          <a:prstGeom prst="rect">
-            <a:avLst/>
-          </a:prstGeom>
-          <a:noFill/>
-          <a:ln/>
-        </p:spPr>
-        <p:txBody>
-          <a:bodyPr wrap="square" lIns="0" tIns="0" rIns="0" bIns="0" rtlCol="0" anchor="ctr"/>
-          <a:lstStyle/>
-          <a:p>
-            <a:pPr indent="0" marL="0">
-              <a:lnSpc>
-                <a:spcPct val="105000"/>
-              </a:lnSpc>
-              <a:buNone/>
-            </a:pPr>
-            <a:r>
-              <a:rPr lang="en-US" sz="1150" dirty="0">
-                <a:solidFill>
-                  <a:srgbClr val="43504F"/>
-                </a:solidFill>
-                <a:latin typeface="Calibri" pitchFamily="34" charset="0"/>
-                <a:ea typeface="Calibri" pitchFamily="34" charset="-122"/>
-                <a:cs typeface="Calibri" pitchFamily="34" charset="-120"/>
-              </a:rPr>
-              <a:t>three-valued traversability — traversable / blocked / unknown</a:t>
-            </a:r>
-            <a:endParaRPr lang="en-US" sz="1150" dirty="0"/>
-          </a:p>
-        </p:txBody>
-      </p:sp>
-      <p:sp>
-        <p:nvSpPr>
-          <p:cNvPr id="25" name="Shape 21"/>
+          <p:cNvPr id="12" name="Shape 7"/>
           <p:cNvSpPr/>
           <p:nvPr/>
         </p:nvSpPr>
         <p:spPr>
           <a:xfrm>
-            <a:off x="5715000" y="4892040"/>
-            <a:ext cx="6126480" cy="749808"/>
+            <a:off x="6144768" y="4956048"/>
+            <a:ext cx="5669280" cy="786384"/>
           </a:xfrm>
           <a:prstGeom prst="roundRect">
             <a:avLst>
-              <a:gd name="adj" fmla="val 4878"/>
+              <a:gd name="adj" fmla="val 5814"/>
             </a:avLst>
           </a:prstGeom>
           <a:solidFill>
-            <a:srgbClr val="F4F6F3"/>
-          </a:solidFill>
-          <a:ln w="9525">
+            <a:srgbClr val="FDF1EA"/>
+          </a:solidFill>
+          <a:ln w="12700">
             <a:solidFill>
-              <a:srgbClr val="D2D8D3"/>
+              <a:srgbClr val="D2622A"/>
             </a:solidFill>
             <a:prstDash val="solid"/>
           </a:ln>
@@ -3628,14 +3263,128 @@
       </p:sp>
       <p:sp>
         <p:nvSpPr>
-          <p:cNvPr id="26" name="Text 22"/>
-          <p:cNvSpPr txBox="1"/>
-          <p:nvPr/>
-        </p:nvSpPr>
-        <p:spPr>
-          <a:xfrm>
-            <a:off x="5897880" y="5102352"/>
-            <a:ext cx="5760720" cy="365760"/>
+          <p:cNvPr id="13" name="Text 8"/>
+          <p:cNvSpPr txBox="1"/>
+          <p:nvPr/>
+        </p:nvSpPr>
+        <p:spPr>
+          <a:xfrm>
+            <a:off x="6144768" y="5074920"/>
+            <a:ext cx="5669280" cy="548640"/>
+          </a:xfrm>
+          <a:prstGeom prst="rect">
+            <a:avLst/>
+          </a:prstGeom>
+          <a:noFill/>
+          <a:ln/>
+        </p:spPr>
+        <p:txBody>
+          <a:bodyPr wrap="square" rtlCol="0" anchor="ctr"/>
+          <a:lstStyle/>
+          <a:p>
+            <a:pPr algn="ctr" indent="0" marL="0">
+              <a:buNone/>
+            </a:pPr>
+            <a:r>
+              <a:rPr lang="en-US" sz="2100" b="1" dirty="0">
+                <a:solidFill>
+                  <a:srgbClr val="D2622A"/>
+                </a:solidFill>
+                <a:latin typeface="Calibri" pitchFamily="34" charset="0"/>
+                <a:ea typeface="Calibri" pitchFamily="34" charset="-122"/>
+                <a:cs typeface="Calibri" pitchFamily="34" charset="-120"/>
+              </a:rPr>
+              <a:t>Δθ  ≤  w · h</a:t>
+            </a:r>
+            <a:pPr algn="ctr" indent="0" marL="0">
+              <a:buNone/>
+            </a:pPr>
+            <a:r>
+              <a:rPr lang="en-US" sz="2100" b="1" baseline="-40000" dirty="0">
+                <a:solidFill>
+                  <a:srgbClr val="D2622A"/>
+                </a:solidFill>
+                <a:latin typeface="Calibri" pitchFamily="34" charset="0"/>
+                <a:ea typeface="Calibri" pitchFamily="34" charset="-122"/>
+                <a:cs typeface="Calibri" pitchFamily="34" charset="-120"/>
+              </a:rPr>
+              <a:t>sensor</a:t>
+            </a:r>
+            <a:pPr algn="ctr" indent="0" marL="0">
+              <a:buNone/>
+            </a:pPr>
+            <a:r>
+              <a:rPr lang="en-US" sz="2100" b="1" dirty="0">
+                <a:solidFill>
+                  <a:srgbClr val="D2622A"/>
+                </a:solidFill>
+                <a:latin typeface="Calibri" pitchFamily="34" charset="0"/>
+                <a:ea typeface="Calibri" pitchFamily="34" charset="-122"/>
+                <a:cs typeface="Calibri" pitchFamily="34" charset="-120"/>
+              </a:rPr>
+              <a:t>  /  r²</a:t>
+            </a:r>
+            <a:endParaRPr lang="en-US" sz="2100" dirty="0"/>
+          </a:p>
+        </p:txBody>
+      </p:sp>
+      <p:sp>
+        <p:nvSpPr>
+          <p:cNvPr id="14" name="Shape 9"/>
+          <p:cNvSpPr/>
+          <p:nvPr/>
+        </p:nvSpPr>
+        <p:spPr>
+          <a:xfrm>
+            <a:off x="6144768" y="5888736"/>
+            <a:ext cx="2761488" cy="420624"/>
+          </a:xfrm>
+          <a:prstGeom prst="roundRect">
+            <a:avLst>
+              <a:gd name="adj" fmla="val 10870"/>
+            </a:avLst>
+          </a:prstGeom>
+          <a:solidFill>
+            <a:srgbClr val="F6F8F5"/>
+          </a:solidFill>
+          <a:ln w="12700">
+            <a:solidFill>
+              <a:srgbClr val="D9DED6"/>
+            </a:solidFill>
+            <a:prstDash val="solid"/>
+          </a:ln>
+        </p:spPr>
+      </p:sp>
+      <p:sp>
+        <p:nvSpPr>
+          <p:cNvPr id="15" name="Shape 10"/>
+          <p:cNvSpPr/>
+          <p:nvPr/>
+        </p:nvSpPr>
+        <p:spPr>
+          <a:xfrm>
+            <a:off x="6272784" y="6016752"/>
+            <a:ext cx="164592" cy="164592"/>
+          </a:xfrm>
+          <a:prstGeom prst="ellipse">
+            <a:avLst/>
+          </a:prstGeom>
+          <a:solidFill>
+            <a:srgbClr val="2C8FBF"/>
+          </a:solidFill>
+          <a:ln/>
+        </p:spPr>
+      </p:sp>
+      <p:sp>
+        <p:nvSpPr>
+          <p:cNvPr id="16" name="Text 11"/>
+          <p:cNvSpPr txBox="1"/>
+          <p:nvPr/>
+        </p:nvSpPr>
+        <p:spPr>
+          <a:xfrm>
+            <a:off x="6528816" y="5888736"/>
+            <a:ext cx="2286000" cy="420624"/>
           </a:xfrm>
           <a:prstGeom prst="rect">
             <a:avLst/>
@@ -3648,13 +3397,10 @@
           <a:lstStyle/>
           <a:p>
             <a:pPr indent="0" marL="0">
-              <a:lnSpc>
-                <a:spcPct val="112000"/>
-              </a:lnSpc>
-              <a:buNone/>
-            </a:pPr>
-            <a:r>
-              <a:rPr lang="en-US" sz="1250" dirty="0">
+              <a:buNone/>
+            </a:pPr>
+            <a:r>
+              <a:rPr lang="en-US" sz="1100" b="1" dirty="0">
                 <a:solidFill>
                   <a:srgbClr val="43504F"/>
                 </a:solidFill>
@@ -3662,9 +3408,267 @@
                 <a:ea typeface="Calibri" pitchFamily="34" charset="-122"/>
                 <a:cs typeface="Calibri" pitchFamily="34" charset="-120"/>
               </a:rPr>
-              <a:t>Python · NumPy · Numba · Open3D · quadtree elevation map.  Detector cost: 43 ms per frame.</a:t>
-            </a:r>
-            <a:endParaRPr lang="en-US" sz="1250" dirty="0"/>
+              <a:t>Python · NumPy · Numba</a:t>
+            </a:r>
+            <a:endParaRPr lang="en-US" sz="1100" dirty="0"/>
+          </a:p>
+        </p:txBody>
+      </p:sp>
+      <p:sp>
+        <p:nvSpPr>
+          <p:cNvPr id="17" name="Shape 12"/>
+          <p:cNvSpPr/>
+          <p:nvPr/>
+        </p:nvSpPr>
+        <p:spPr>
+          <a:xfrm>
+            <a:off x="9052560" y="5888736"/>
+            <a:ext cx="2761488" cy="420624"/>
+          </a:xfrm>
+          <a:prstGeom prst="roundRect">
+            <a:avLst>
+              <a:gd name="adj" fmla="val 10870"/>
+            </a:avLst>
+          </a:prstGeom>
+          <a:solidFill>
+            <a:srgbClr val="F6F8F5"/>
+          </a:solidFill>
+          <a:ln w="12700">
+            <a:solidFill>
+              <a:srgbClr val="D9DED6"/>
+            </a:solidFill>
+            <a:prstDash val="solid"/>
+          </a:ln>
+        </p:spPr>
+      </p:sp>
+      <p:sp>
+        <p:nvSpPr>
+          <p:cNvPr id="18" name="Shape 13"/>
+          <p:cNvSpPr/>
+          <p:nvPr/>
+        </p:nvSpPr>
+        <p:spPr>
+          <a:xfrm>
+            <a:off x="9180576" y="6016752"/>
+            <a:ext cx="164592" cy="164592"/>
+          </a:xfrm>
+          <a:prstGeom prst="ellipse">
+            <a:avLst/>
+          </a:prstGeom>
+          <a:solidFill>
+            <a:srgbClr val="7A55B5"/>
+          </a:solidFill>
+          <a:ln/>
+        </p:spPr>
+      </p:sp>
+      <p:sp>
+        <p:nvSpPr>
+          <p:cNvPr id="19" name="Text 14"/>
+          <p:cNvSpPr txBox="1"/>
+          <p:nvPr/>
+        </p:nvSpPr>
+        <p:spPr>
+          <a:xfrm>
+            <a:off x="9436608" y="5888736"/>
+            <a:ext cx="2286000" cy="420624"/>
+          </a:xfrm>
+          <a:prstGeom prst="rect">
+            <a:avLst/>
+          </a:prstGeom>
+          <a:noFill/>
+          <a:ln/>
+        </p:spPr>
+        <p:txBody>
+          <a:bodyPr wrap="square" lIns="0" tIns="0" rIns="0" bIns="0" rtlCol="0" anchor="ctr"/>
+          <a:lstStyle/>
+          <a:p>
+            <a:pPr indent="0" marL="0">
+              <a:buNone/>
+            </a:pPr>
+            <a:r>
+              <a:rPr lang="en-US" sz="1100" b="1" dirty="0">
+                <a:solidFill>
+                  <a:srgbClr val="43504F"/>
+                </a:solidFill>
+                <a:latin typeface="Calibri" pitchFamily="34" charset="0"/>
+                <a:ea typeface="Calibri" pitchFamily="34" charset="-122"/>
+                <a:cs typeface="Calibri" pitchFamily="34" charset="-120"/>
+              </a:rPr>
+              <a:t>Open3D · quadtree map</a:t>
+            </a:r>
+            <a:endParaRPr lang="en-US" sz="1100" dirty="0"/>
+          </a:p>
+        </p:txBody>
+      </p:sp>
+      <p:sp>
+        <p:nvSpPr>
+          <p:cNvPr id="20" name="Shape 15"/>
+          <p:cNvSpPr/>
+          <p:nvPr/>
+        </p:nvSpPr>
+        <p:spPr>
+          <a:xfrm>
+            <a:off x="6144768" y="5888736"/>
+            <a:ext cx="2761488" cy="420624"/>
+          </a:xfrm>
+          <a:prstGeom prst="roundRect">
+            <a:avLst>
+              <a:gd name="adj" fmla="val 10870"/>
+            </a:avLst>
+          </a:prstGeom>
+          <a:solidFill>
+            <a:srgbClr val="F6F8F5"/>
+          </a:solidFill>
+          <a:ln w="12700">
+            <a:solidFill>
+              <a:srgbClr val="D9DED6"/>
+            </a:solidFill>
+            <a:prstDash val="solid"/>
+          </a:ln>
+        </p:spPr>
+      </p:sp>
+      <p:sp>
+        <p:nvSpPr>
+          <p:cNvPr id="21" name="Shape 16"/>
+          <p:cNvSpPr/>
+          <p:nvPr/>
+        </p:nvSpPr>
+        <p:spPr>
+          <a:xfrm>
+            <a:off x="6272784" y="6016752"/>
+            <a:ext cx="164592" cy="164592"/>
+          </a:xfrm>
+          <a:prstGeom prst="ellipse">
+            <a:avLst/>
+          </a:prstGeom>
+          <a:solidFill>
+            <a:srgbClr val="2E9E68"/>
+          </a:solidFill>
+          <a:ln/>
+        </p:spPr>
+      </p:sp>
+      <p:sp>
+        <p:nvSpPr>
+          <p:cNvPr id="22" name="Text 17"/>
+          <p:cNvSpPr txBox="1"/>
+          <p:nvPr/>
+        </p:nvSpPr>
+        <p:spPr>
+          <a:xfrm>
+            <a:off x="6528816" y="5888736"/>
+            <a:ext cx="2286000" cy="420624"/>
+          </a:xfrm>
+          <a:prstGeom prst="rect">
+            <a:avLst/>
+          </a:prstGeom>
+          <a:noFill/>
+          <a:ln/>
+        </p:spPr>
+        <p:txBody>
+          <a:bodyPr wrap="square" lIns="0" tIns="0" rIns="0" bIns="0" rtlCol="0" anchor="ctr"/>
+          <a:lstStyle/>
+          <a:p>
+            <a:pPr indent="0" marL="0">
+              <a:buNone/>
+            </a:pPr>
+            <a:r>
+              <a:rPr lang="en-US" sz="1100" b="1" dirty="0">
+                <a:solidFill>
+                  <a:srgbClr val="43504F"/>
+                </a:solidFill>
+                <a:latin typeface="Calibri" pitchFamily="34" charset="0"/>
+                <a:ea typeface="Calibri" pitchFamily="34" charset="-122"/>
+                <a:cs typeface="Calibri" pitchFamily="34" charset="-120"/>
+              </a:rPr>
+              <a:t>3 sensor backends</a:t>
+            </a:r>
+            <a:endParaRPr lang="en-US" sz="1100" dirty="0"/>
+          </a:p>
+        </p:txBody>
+      </p:sp>
+      <p:sp>
+        <p:nvSpPr>
+          <p:cNvPr id="23" name="Shape 18"/>
+          <p:cNvSpPr/>
+          <p:nvPr/>
+        </p:nvSpPr>
+        <p:spPr>
+          <a:xfrm>
+            <a:off x="9052560" y="5888736"/>
+            <a:ext cx="2761488" cy="420624"/>
+          </a:xfrm>
+          <a:prstGeom prst="roundRect">
+            <a:avLst>
+              <a:gd name="adj" fmla="val 10870"/>
+            </a:avLst>
+          </a:prstGeom>
+          <a:solidFill>
+            <a:srgbClr val="F6F8F5"/>
+          </a:solidFill>
+          <a:ln w="12700">
+            <a:solidFill>
+              <a:srgbClr val="D9DED6"/>
+            </a:solidFill>
+            <a:prstDash val="solid"/>
+          </a:ln>
+        </p:spPr>
+      </p:sp>
+      <p:sp>
+        <p:nvSpPr>
+          <p:cNvPr id="24" name="Shape 19"/>
+          <p:cNvSpPr/>
+          <p:nvPr/>
+        </p:nvSpPr>
+        <p:spPr>
+          <a:xfrm>
+            <a:off x="9180576" y="6016752"/>
+            <a:ext cx="164592" cy="164592"/>
+          </a:xfrm>
+          <a:prstGeom prst="ellipse">
+            <a:avLst/>
+          </a:prstGeom>
+          <a:solidFill>
+            <a:srgbClr val="D2622A"/>
+          </a:solidFill>
+          <a:ln/>
+        </p:spPr>
+      </p:sp>
+      <p:sp>
+        <p:nvSpPr>
+          <p:cNvPr id="25" name="Text 20"/>
+          <p:cNvSpPr txBox="1"/>
+          <p:nvPr/>
+        </p:nvSpPr>
+        <p:spPr>
+          <a:xfrm>
+            <a:off x="9436608" y="5888736"/>
+            <a:ext cx="2286000" cy="420624"/>
+          </a:xfrm>
+          <a:prstGeom prst="rect">
+            <a:avLst/>
+          </a:prstGeom>
+          <a:noFill/>
+          <a:ln/>
+        </p:spPr>
+        <p:txBody>
+          <a:bodyPr wrap="square" lIns="0" tIns="0" rIns="0" bIns="0" rtlCol="0" anchor="ctr"/>
+          <a:lstStyle/>
+          <a:p>
+            <a:pPr indent="0" marL="0">
+              <a:buNone/>
+            </a:pPr>
+            <a:r>
+              <a:rPr lang="en-US" sz="1100" b="1" dirty="0">
+                <a:solidFill>
+                  <a:srgbClr val="43504F"/>
+                </a:solidFill>
+                <a:latin typeface="Calibri" pitchFamily="34" charset="0"/>
+                <a:ea typeface="Calibri" pitchFamily="34" charset="-122"/>
+                <a:cs typeface="Calibri" pitchFamily="34" charset="-120"/>
+              </a:rPr>
+              <a:t>43 ms / frame</a:t>
+            </a:r>
+            <a:endParaRPr lang="en-US" sz="1100" dirty="0"/>
           </a:p>
         </p:txBody>
       </p:sp>
@@ -3708,8 +3712,8 @@
         </p:nvSpPr>
         <p:spPr>
           <a:xfrm>
-            <a:off x="256032" y="146304"/>
-            <a:ext cx="1207008" cy="566928"/>
+            <a:off x="237744" y="128016"/>
+            <a:ext cx="1152144" cy="530352"/>
           </a:xfrm>
           <a:prstGeom prst="ellipse">
             <a:avLst/>
@@ -3733,8 +3737,8 @@
         </p:nvSpPr>
         <p:spPr>
           <a:xfrm>
-            <a:off x="256032" y="146304"/>
-            <a:ext cx="1207008" cy="566928"/>
+            <a:off x="237744" y="128016"/>
+            <a:ext cx="1152144" cy="530352"/>
           </a:xfrm>
           <a:prstGeom prst="rect">
             <a:avLst/>
@@ -3750,7 +3754,7 @@
               <a:buNone/>
             </a:pPr>
             <a:r>
-              <a:rPr lang="en-US" sz="1300" dirty="0">
+              <a:rPr lang="en-US" sz="1250" dirty="0">
                 <a:solidFill>
                   <a:srgbClr val="14181A"/>
                 </a:solidFill>
@@ -3760,7 +3764,7 @@
               </a:rPr>
               <a:t>Raysense</a:t>
             </a:r>
-            <a:endParaRPr lang="en-US" sz="1300" dirty="0"/>
+            <a:endParaRPr lang="en-US" sz="1250" dirty="0"/>
           </a:p>
         </p:txBody>
       </p:sp>
@@ -3780,8 +3784,8 @@
         </p:blipFill>
         <p:spPr>
           <a:xfrm>
-            <a:off x="10378440" y="91440"/>
-            <a:ext cx="1572768" cy="786384"/>
+            <a:off x="10469880" y="91440"/>
+            <a:ext cx="1481328" cy="585216"/>
           </a:xfrm>
           <a:prstGeom prst="rect">
             <a:avLst/>
@@ -3796,8 +3800,8 @@
         </p:nvSpPr>
         <p:spPr>
           <a:xfrm>
-            <a:off x="1645920" y="146304"/>
-            <a:ext cx="8595360" cy="658368"/>
+            <a:off x="1554480" y="118872"/>
+            <a:ext cx="8778240" cy="566928"/>
           </a:xfrm>
           <a:prstGeom prst="rect">
             <a:avLst/>
@@ -3813,7 +3817,7 @@
               <a:buNone/>
             </a:pPr>
             <a:r>
-              <a:rPr lang="en-US" sz="3100" b="1" dirty="0">
+              <a:rPr lang="en-US" sz="2900" b="1" dirty="0">
                 <a:solidFill>
                   <a:srgbClr val="14181A"/>
                 </a:solidFill>
@@ -3823,7 +3827,7 @@
               </a:rPr>
               <a:t>FEASIBILITY AND VIABILITY</a:t>
             </a:r>
-            <a:endParaRPr lang="en-US" sz="3100" dirty="0"/>
+            <a:endParaRPr lang="en-US" sz="2900" dirty="0"/>
           </a:p>
         </p:txBody>
       </p:sp>
@@ -3835,8 +3839,8 @@
         </p:nvSpPr>
         <p:spPr>
           <a:xfrm>
-            <a:off x="0" y="6437376"/>
-            <a:ext cx="12191695" cy="420624"/>
+            <a:off x="0" y="6473952"/>
+            <a:ext cx="12191695" cy="384048"/>
           </a:xfrm>
           <a:prstGeom prst="rect">
             <a:avLst/>
@@ -3855,8 +3859,8 @@
         </p:nvSpPr>
         <p:spPr>
           <a:xfrm>
-            <a:off x="0" y="6437376"/>
-            <a:ext cx="12191695" cy="420624"/>
+            <a:off x="0" y="6473952"/>
+            <a:ext cx="12191695" cy="384048"/>
           </a:xfrm>
           <a:prstGeom prst="rect">
             <a:avLst/>
@@ -3872,7 +3876,7 @@
               <a:buNone/>
             </a:pPr>
             <a:r>
-              <a:rPr lang="en-US" sz="1200" dirty="0">
+              <a:rPr lang="en-US" sz="1100" dirty="0">
                 <a:solidFill>
                   <a:srgbClr val="FFFFFF"/>
                 </a:solidFill>
@@ -3882,7 +3886,7 @@
               </a:rPr>
               <a:t>@SIH Idea submission- Template</a:t>
             </a:r>
-            <a:endParaRPr lang="en-US" sz="1200" dirty="0"/>
+            <a:endParaRPr lang="en-US" sz="1100" dirty="0"/>
           </a:p>
         </p:txBody>
       </p:sp>
@@ -3894,8 +3898,8 @@
         </p:nvSpPr>
         <p:spPr>
           <a:xfrm>
-            <a:off x="11277295" y="6437376"/>
-            <a:ext cx="548640" cy="420624"/>
+            <a:off x="11323015" y="6473952"/>
+            <a:ext cx="502920" cy="384048"/>
           </a:xfrm>
           <a:prstGeom prst="rect">
             <a:avLst/>
@@ -3911,7 +3915,7 @@
               <a:buNone/>
             </a:pPr>
             <a:r>
-              <a:rPr lang="en-US" sz="1200" b="1" dirty="0">
+              <a:rPr lang="en-US" sz="1100" b="1" dirty="0">
                 <a:solidFill>
                   <a:srgbClr val="FFFFFF"/>
                 </a:solidFill>
@@ -3921,32 +3925,158 @@
               </a:rPr>
               <a:t>4</a:t>
             </a:r>
-            <a:endParaRPr lang="en-US" sz="1200" dirty="0"/>
-          </a:p>
-        </p:txBody>
-      </p:sp>
-      <p:sp>
-        <p:nvSpPr>
-          <p:cNvPr id="9" name="Shape 6"/>
+            <a:endParaRPr lang="en-US" sz="1100" dirty="0"/>
+          </a:p>
+        </p:txBody>
+      </p:sp>
+      <p:pic>
+        <p:nvPicPr>
+          <p:cNvPr id="9" name="Image 1" descr="deckbuild/fig_threshold.png">    </p:cNvPr>
+          <p:cNvPicPr>
+            <a:picLocks noChangeAspect="1"/>
+          </p:cNvPicPr>
+          <p:nvPr/>
+        </p:nvPicPr>
+        <p:blipFill>
+          <a:blip r:embed="rId2"/>
+          <a:stretch>
+            <a:fillRect/>
+          </a:stretch>
+        </p:blipFill>
+        <p:spPr>
+          <a:xfrm>
+            <a:off x="365760" y="896112"/>
+            <a:ext cx="5486400" cy="3429000"/>
+          </a:xfrm>
+          <a:prstGeom prst="rect">
+            <a:avLst/>
+          </a:prstGeom>
+        </p:spPr>
+      </p:pic>
+      <p:sp>
+        <p:nvSpPr>
+          <p:cNvPr id="10" name="Text 6"/>
+          <p:cNvSpPr txBox="1"/>
+          <p:nvPr/>
+        </p:nvSpPr>
+        <p:spPr>
+          <a:xfrm>
+            <a:off x="365760" y="4370832"/>
+            <a:ext cx="5486400" cy="274320"/>
+          </a:xfrm>
+          <a:prstGeom prst="rect">
+            <a:avLst/>
+          </a:prstGeom>
+          <a:noFill/>
+          <a:ln/>
+        </p:spPr>
+        <p:txBody>
+          <a:bodyPr wrap="square" lIns="0" tIns="0" rIns="0" bIns="0" rtlCol="0" anchor="ctr"/>
+          <a:lstStyle/>
+          <a:p>
+            <a:pPr algn="ctr" indent="0" marL="0">
+              <a:buNone/>
+            </a:pPr>
+            <a:r>
+              <a:rPr lang="en-US" sz="1150" b="1" spc="80" kern="0" dirty="0">
+                <a:solidFill>
+                  <a:srgbClr val="6E7B79"/>
+                </a:solidFill>
+                <a:latin typeface="Calibri" pitchFamily="34" charset="0"/>
+                <a:ea typeface="Calibri" pitchFamily="34" charset="-122"/>
+                <a:cs typeface="Calibri" pitchFamily="34" charset="-120"/>
+              </a:rPr>
+              <a:t>EVERY PARAMETER CHOSEN BY SWEEP, NOT BY EYE</a:t>
+            </a:r>
+            <a:endParaRPr lang="en-US" sz="1150" dirty="0"/>
+          </a:p>
+        </p:txBody>
+      </p:sp>
+      <p:pic>
+        <p:nvPicPr>
+          <p:cNvPr id="11" name="Image 2" descr="deckbuild/demo_frame.png">    </p:cNvPr>
+          <p:cNvPicPr>
+            <a:picLocks noChangeAspect="1"/>
+          </p:cNvPicPr>
+          <p:nvPr/>
+        </p:nvPicPr>
+        <p:blipFill>
+          <a:blip r:embed="rId3"/>
+          <a:stretch>
+            <a:fillRect/>
+          </a:stretch>
+        </p:blipFill>
+        <p:spPr>
+          <a:xfrm>
+            <a:off x="6126480" y="896112"/>
+            <a:ext cx="5687568" cy="2426437"/>
+          </a:xfrm>
+          <a:prstGeom prst="rect">
+            <a:avLst/>
+          </a:prstGeom>
+        </p:spPr>
+      </p:pic>
+      <p:sp>
+        <p:nvSpPr>
+          <p:cNvPr id="12" name="Text 7"/>
+          <p:cNvSpPr txBox="1"/>
+          <p:nvPr/>
+        </p:nvSpPr>
+        <p:spPr>
+          <a:xfrm>
+            <a:off x="6126480" y="3328416"/>
+            <a:ext cx="5687568" cy="274320"/>
+          </a:xfrm>
+          <a:prstGeom prst="rect">
+            <a:avLst/>
+          </a:prstGeom>
+          <a:noFill/>
+          <a:ln/>
+        </p:spPr>
+        <p:txBody>
+          <a:bodyPr wrap="square" lIns="0" tIns="0" rIns="0" bIns="0" rtlCol="0" anchor="ctr"/>
+          <a:lstStyle/>
+          <a:p>
+            <a:pPr algn="ctr" indent="0" marL="0">
+              <a:buNone/>
+            </a:pPr>
+            <a:r>
+              <a:rPr lang="en-US" sz="1150" b="1" spc="80" kern="0" dirty="0">
+                <a:solidFill>
+                  <a:srgbClr val="2E9E68"/>
+                </a:solidFill>
+                <a:latin typeface="Calibri" pitchFamily="34" charset="0"/>
+                <a:ea typeface="Calibri" pitchFamily="34" charset="-122"/>
+                <a:cs typeface="Calibri" pitchFamily="34" charset="-120"/>
+              </a:rPr>
+              <a:t>IT RUNS TODAY — 103 TESTS, REPRODUCIBLE BIT-FOR-BIT</a:t>
+            </a:r>
+            <a:endParaRPr lang="en-US" sz="1150" dirty="0"/>
+          </a:p>
+        </p:txBody>
+      </p:sp>
+      <p:sp>
+        <p:nvSpPr>
+          <p:cNvPr id="13" name="Shape 8"/>
           <p:cNvSpPr/>
           <p:nvPr/>
         </p:nvSpPr>
         <p:spPr>
           <a:xfrm>
-            <a:off x="384048" y="1097280"/>
-            <a:ext cx="3703320" cy="2286000"/>
+            <a:off x="6126480" y="3712464"/>
+            <a:ext cx="1792224" cy="658368"/>
           </a:xfrm>
           <a:prstGeom prst="roundRect">
             <a:avLst>
-              <a:gd name="adj" fmla="val 1600"/>
+              <a:gd name="adj" fmla="val 6944"/>
             </a:avLst>
           </a:prstGeom>
           <a:solidFill>
-            <a:srgbClr val="F4F6F3"/>
-          </a:solidFill>
-          <a:ln w="9525">
+            <a:srgbClr val="F0F5F1"/>
+          </a:solidFill>
+          <a:ln w="12700">
             <a:solidFill>
-              <a:srgbClr val="D2D8D3"/>
+              <a:srgbClr val="2E9E68"/>
             </a:solidFill>
             <a:prstDash val="solid"/>
           </a:ln>
@@ -3954,14 +4084,14 @@
       </p:sp>
       <p:sp>
         <p:nvSpPr>
-          <p:cNvPr id="10" name="Text 7"/>
-          <p:cNvSpPr txBox="1"/>
-          <p:nvPr/>
-        </p:nvSpPr>
-        <p:spPr>
-          <a:xfrm>
-            <a:off x="585216" y="1298448"/>
-            <a:ext cx="3291840" cy="256032"/>
+          <p:cNvPr id="14" name="Text 9"/>
+          <p:cNvSpPr txBox="1"/>
+          <p:nvPr/>
+        </p:nvSpPr>
+        <p:spPr>
+          <a:xfrm>
+            <a:off x="6217920" y="3712464"/>
+            <a:ext cx="1609344" cy="658368"/>
           </a:xfrm>
           <a:prstGeom prst="rect">
             <a:avLst/>
@@ -3973,11 +4103,11 @@
           <a:bodyPr wrap="square" lIns="0" tIns="0" rIns="0" bIns="0" rtlCol="0" anchor="ctr"/>
           <a:lstStyle/>
           <a:p>
-            <a:pPr indent="0" marL="0">
-              <a:buNone/>
-            </a:pPr>
-            <a:r>
-              <a:rPr lang="en-US" sz="1100" b="1" spc="120" kern="0" dirty="0">
+            <a:pPr algn="ctr" indent="0" marL="0">
+              <a:buNone/>
+            </a:pPr>
+            <a:r>
+              <a:rPr lang="en-US" sz="1050" b="1" dirty="0">
                 <a:solidFill>
                   <a:srgbClr val="2E9E68"/>
                 </a:solidFill>
@@ -3987,74 +4117,32 @@
               </a:rPr>
               <a:t>NO NEW HARDWARE</a:t>
             </a:r>
-            <a:endParaRPr lang="en-US" sz="1100" dirty="0"/>
-          </a:p>
-        </p:txBody>
-      </p:sp>
-      <p:sp>
-        <p:nvSpPr>
-          <p:cNvPr id="11" name="Text 8"/>
-          <p:cNvSpPr txBox="1"/>
-          <p:nvPr/>
-        </p:nvSpPr>
-        <p:spPr>
-          <a:xfrm>
-            <a:off x="585216" y="1609344"/>
-            <a:ext cx="3291840" cy="1645920"/>
-          </a:xfrm>
-          <a:prstGeom prst="rect">
-            <a:avLst/>
-          </a:prstGeom>
-          <a:noFill/>
-          <a:ln/>
-        </p:spPr>
-        <p:txBody>
-          <a:bodyPr wrap="square" lIns="0" tIns="0" rIns="0" bIns="0" rtlCol="0" anchor="ctr"/>
-          <a:lstStyle/>
-          <a:p>
-            <a:pPr indent="0" marL="0">
-              <a:lnSpc>
-                <a:spcPct val="112000"/>
-              </a:lnSpc>
-              <a:buNone/>
-            </a:pPr>
-            <a:r>
-              <a:rPr lang="en-US" sz="1200" dirty="0">
-                <a:solidFill>
-                  <a:srgbClr val="43504F"/>
-                </a:solidFill>
-                <a:latin typeface="Calibri" pitchFamily="34" charset="0"/>
-                <a:ea typeface="Calibri" pitchFamily="34" charset="-122"/>
-                <a:cs typeface="Calibri" pitchFamily="34" charset="-120"/>
-              </a:rPr>
-              <a:t>Software on data a deployed vehicle already produces, running on the lidar that platform already carries. Sensor-agnostic across three backends.</a:t>
-            </a:r>
-            <a:endParaRPr lang="en-US" sz="1200" dirty="0"/>
-          </a:p>
-        </p:txBody>
-      </p:sp>
-      <p:sp>
-        <p:nvSpPr>
-          <p:cNvPr id="12" name="Shape 9"/>
+            <a:endParaRPr lang="en-US" sz="1050" dirty="0"/>
+          </a:p>
+        </p:txBody>
+      </p:sp>
+      <p:sp>
+        <p:nvSpPr>
+          <p:cNvPr id="15" name="Shape 10"/>
           <p:cNvSpPr/>
           <p:nvPr/>
         </p:nvSpPr>
         <p:spPr>
           <a:xfrm>
-            <a:off x="4288536" y="1097280"/>
-            <a:ext cx="3703320" cy="2286000"/>
+            <a:off x="8055864" y="3712464"/>
+            <a:ext cx="1792224" cy="658368"/>
           </a:xfrm>
           <a:prstGeom prst="roundRect">
             <a:avLst>
-              <a:gd name="adj" fmla="val 1600"/>
+              <a:gd name="adj" fmla="val 6944"/>
             </a:avLst>
           </a:prstGeom>
           <a:solidFill>
-            <a:srgbClr val="F4F6F3"/>
-          </a:solidFill>
-          <a:ln w="9525">
+            <a:srgbClr val="F0F5F1"/>
+          </a:solidFill>
+          <a:ln w="12700">
             <a:solidFill>
-              <a:srgbClr val="D2D8D3"/>
+              <a:srgbClr val="2C8FBF"/>
             </a:solidFill>
             <a:prstDash val="solid"/>
           </a:ln>
@@ -4062,14 +4150,14 @@
       </p:sp>
       <p:sp>
         <p:nvSpPr>
-          <p:cNvPr id="13" name="Text 10"/>
-          <p:cNvSpPr txBox="1"/>
-          <p:nvPr/>
-        </p:nvSpPr>
-        <p:spPr>
-          <a:xfrm>
-            <a:off x="4489704" y="1298448"/>
-            <a:ext cx="3291840" cy="256032"/>
+          <p:cNvPr id="16" name="Text 11"/>
+          <p:cNvSpPr txBox="1"/>
+          <p:nvPr/>
+        </p:nvSpPr>
+        <p:spPr>
+          <a:xfrm>
+            <a:off x="8147304" y="3712464"/>
+            <a:ext cx="1609344" cy="658368"/>
           </a:xfrm>
           <a:prstGeom prst="rect">
             <a:avLst/>
@@ -4081,11 +4169,11 @@
           <a:bodyPr wrap="square" lIns="0" tIns="0" rIns="0" bIns="0" rtlCol="0" anchor="ctr"/>
           <a:lstStyle/>
           <a:p>
-            <a:pPr indent="0" marL="0">
-              <a:buNone/>
-            </a:pPr>
-            <a:r>
-              <a:rPr lang="en-US" sz="1100" b="1" spc="120" kern="0" dirty="0">
+            <a:pPr algn="ctr" indent="0" marL="0">
+              <a:buNone/>
+            </a:pPr>
+            <a:r>
+              <a:rPr lang="en-US" sz="1050" b="1" dirty="0">
                 <a:solidFill>
                   <a:srgbClr val="2C8FBF"/>
                 </a:solidFill>
@@ -4093,76 +4181,34 @@
                 <a:ea typeface="Calibri" pitchFamily="34" charset="-122"/>
                 <a:cs typeface="Calibri" pitchFamily="34" charset="-120"/>
               </a:rPr>
-              <a:t>EVIDENCE BASE</a:t>
-            </a:r>
-            <a:endParaRPr lang="en-US" sz="1100" dirty="0"/>
-          </a:p>
-        </p:txBody>
-      </p:sp>
-      <p:sp>
-        <p:nvSpPr>
-          <p:cNvPr id="14" name="Text 11"/>
-          <p:cNvSpPr txBox="1"/>
-          <p:nvPr/>
-        </p:nvSpPr>
-        <p:spPr>
-          <a:xfrm>
-            <a:off x="4489704" y="1609344"/>
-            <a:ext cx="3291840" cy="1645920"/>
-          </a:xfrm>
-          <a:prstGeom prst="rect">
-            <a:avLst/>
-          </a:prstGeom>
-          <a:noFill/>
-          <a:ln/>
-        </p:spPr>
-        <p:txBody>
-          <a:bodyPr wrap="square" lIns="0" tIns="0" rIns="0" bIns="0" rtlCol="0" anchor="ctr"/>
-          <a:lstStyle/>
-          <a:p>
-            <a:pPr indent="0" marL="0">
-              <a:lnSpc>
-                <a:spcPct val="112000"/>
-              </a:lnSpc>
-              <a:buNone/>
-            </a:pPr>
-            <a:r>
-              <a:rPr lang="en-US" sz="1200" dirty="0">
-                <a:solidFill>
-                  <a:srgbClr val="43504F"/>
-                </a:solidFill>
-                <a:latin typeface="Calibri" pitchFamily="34" charset="0"/>
-                <a:ea typeface="Calibri" pitchFamily="34" charset="-122"/>
-                <a:cs typeface="Calibri" pitchFamily="34" charset="-120"/>
-              </a:rPr>
-              <a:t>A controlled off-road testbed where ground truth is KNOWN rather than inferred. Deliberate: public off-road datasets contain almost no labelled ditches, so scoring against them means scoring against the sensor’s own blind spots.</a:t>
-            </a:r>
-            <a:endParaRPr lang="en-US" sz="1200" dirty="0"/>
-          </a:p>
-        </p:txBody>
-      </p:sp>
-      <p:sp>
-        <p:nvSpPr>
-          <p:cNvPr id="15" name="Shape 12"/>
+              <a:t>GROUND TRUTH KNOWN</a:t>
+            </a:r>
+            <a:endParaRPr lang="en-US" sz="1050" dirty="0"/>
+          </a:p>
+        </p:txBody>
+      </p:sp>
+      <p:sp>
+        <p:nvSpPr>
+          <p:cNvPr id="17" name="Shape 12"/>
           <p:cNvSpPr/>
           <p:nvPr/>
         </p:nvSpPr>
         <p:spPr>
           <a:xfrm>
-            <a:off x="8193024" y="1097280"/>
-            <a:ext cx="3703320" cy="2286000"/>
+            <a:off x="9985248" y="3712464"/>
+            <a:ext cx="1792224" cy="658368"/>
           </a:xfrm>
           <a:prstGeom prst="roundRect">
             <a:avLst>
-              <a:gd name="adj" fmla="val 1600"/>
+              <a:gd name="adj" fmla="val 6944"/>
             </a:avLst>
           </a:prstGeom>
           <a:solidFill>
-            <a:srgbClr val="F4F6F3"/>
-          </a:solidFill>
-          <a:ln w="9525">
+            <a:srgbClr val="F0F5F1"/>
+          </a:solidFill>
+          <a:ln w="12700">
             <a:solidFill>
-              <a:srgbClr val="D2D8D3"/>
+              <a:srgbClr val="7A55B5"/>
             </a:solidFill>
             <a:prstDash val="solid"/>
           </a:ln>
@@ -4170,14 +4216,14 @@
       </p:sp>
       <p:sp>
         <p:nvSpPr>
-          <p:cNvPr id="16" name="Text 13"/>
-          <p:cNvSpPr txBox="1"/>
-          <p:nvPr/>
-        </p:nvSpPr>
-        <p:spPr>
-          <a:xfrm>
-            <a:off x="8394192" y="1298448"/>
-            <a:ext cx="3291840" cy="256032"/>
+          <p:cNvPr id="18" name="Text 13"/>
+          <p:cNvSpPr txBox="1"/>
+          <p:nvPr/>
+        </p:nvSpPr>
+        <p:spPr>
+          <a:xfrm>
+            <a:off x="10076688" y="3712464"/>
+            <a:ext cx="1609344" cy="658368"/>
           </a:xfrm>
           <a:prstGeom prst="rect">
             <a:avLst/>
@@ -4189,61 +4235,58 @@
           <a:bodyPr wrap="square" lIns="0" tIns="0" rIns="0" bIns="0" rtlCol="0" anchor="ctr"/>
           <a:lstStyle/>
           <a:p>
+            <a:pPr algn="ctr" indent="0" marL="0">
+              <a:buNone/>
+            </a:pPr>
+            <a:r>
+              <a:rPr lang="en-US" sz="1050" b="1" dirty="0">
+                <a:solidFill>
+                  <a:srgbClr val="7A55B5"/>
+                </a:solidFill>
+                <a:latin typeface="Calibri" pitchFamily="34" charset="0"/>
+                <a:ea typeface="Calibri" pitchFamily="34" charset="-122"/>
+                <a:cs typeface="Calibri" pitchFamily="34" charset="-120"/>
+              </a:rPr>
+              <a:t>103 TESTS PASS</a:t>
+            </a:r>
+            <a:endParaRPr lang="en-US" sz="1050" dirty="0"/>
+          </a:p>
+        </p:txBody>
+      </p:sp>
+      <p:sp>
+        <p:nvSpPr>
+          <p:cNvPr id="19" name="Text 14"/>
+          <p:cNvSpPr txBox="1"/>
+          <p:nvPr/>
+        </p:nvSpPr>
+        <p:spPr>
+          <a:xfrm>
+            <a:off x="365760" y="4791456"/>
+            <a:ext cx="11430000" cy="292608"/>
+          </a:xfrm>
+          <a:prstGeom prst="rect">
+            <a:avLst/>
+          </a:prstGeom>
+          <a:noFill/>
+          <a:ln/>
+        </p:spPr>
+        <p:txBody>
+          <a:bodyPr wrap="square" lIns="0" tIns="0" rIns="0" bIns="0" rtlCol="0" anchor="ctr"/>
+          <a:lstStyle/>
+          <a:p>
             <a:pPr indent="0" marL="0">
               <a:buNone/>
             </a:pPr>
             <a:r>
-              <a:rPr lang="en-US" sz="1100" b="1" spc="120" kern="0" dirty="0">
-                <a:solidFill>
-                  <a:srgbClr val="7A55B5"/>
-                </a:solidFill>
-                <a:latin typeface="Calibri" pitchFamily="34" charset="0"/>
-                <a:ea typeface="Calibri" pitchFamily="34" charset="-122"/>
-                <a:cs typeface="Calibri" pitchFamily="34" charset="-120"/>
-              </a:rPr>
-              <a:t>REPRODUCIBLE</a:t>
-            </a:r>
-            <a:endParaRPr lang="en-US" sz="1100" dirty="0"/>
-          </a:p>
-        </p:txBody>
-      </p:sp>
-      <p:sp>
-        <p:nvSpPr>
-          <p:cNvPr id="17" name="Text 14"/>
-          <p:cNvSpPr txBox="1"/>
-          <p:nvPr/>
-        </p:nvSpPr>
-        <p:spPr>
-          <a:xfrm>
-            <a:off x="8394192" y="1609344"/>
-            <a:ext cx="3291840" cy="1645920"/>
-          </a:xfrm>
-          <a:prstGeom prst="rect">
-            <a:avLst/>
-          </a:prstGeom>
-          <a:noFill/>
-          <a:ln/>
-        </p:spPr>
-        <p:txBody>
-          <a:bodyPr wrap="square" lIns="0" tIns="0" rIns="0" bIns="0" rtlCol="0" anchor="ctr"/>
-          <a:lstStyle/>
-          <a:p>
-            <a:pPr indent="0" marL="0">
-              <a:lnSpc>
-                <a:spcPct val="112000"/>
-              </a:lnSpc>
-              <a:buNone/>
-            </a:pPr>
-            <a:r>
-              <a:rPr lang="en-US" sz="1200" dirty="0">
-                <a:solidFill>
-                  <a:srgbClr val="43504F"/>
-                </a:solidFill>
-                <a:latin typeface="Calibri" pitchFamily="34" charset="0"/>
-                <a:ea typeface="Calibri" pitchFamily="34" charset="-122"/>
-                <a:cs typeface="Calibri" pitchFamily="34" charset="-120"/>
-              </a:rPr>
-              <a:t>103 automated tests. Every figure generated from a committed CSV. Verified to rebuild bit-identically from a clean environment.</a:t>
+              <a:rPr lang="en-US" sz="1200" b="1" spc="140" kern="0" dirty="0">
+                <a:solidFill>
+                  <a:srgbClr val="D2622A"/>
+                </a:solidFill>
+                <a:latin typeface="Calibri" pitchFamily="34" charset="0"/>
+                <a:ea typeface="Calibri" pitchFamily="34" charset="-122"/>
+                <a:cs typeface="Calibri" pitchFamily="34" charset="-120"/>
+              </a:rPr>
+              <a:t>HONEST RISKS</a:t>
             </a:r>
             <a:endParaRPr lang="en-US" sz="1200" dirty="0"/>
           </a:p>
@@ -4251,63 +4294,24 @@
       </p:sp>
       <p:sp>
         <p:nvSpPr>
-          <p:cNvPr id="18" name="Text 15"/>
-          <p:cNvSpPr txBox="1"/>
-          <p:nvPr/>
-        </p:nvSpPr>
-        <p:spPr>
-          <a:xfrm>
-            <a:off x="384048" y="3657600"/>
-            <a:ext cx="11430000" cy="256032"/>
-          </a:xfrm>
-          <a:prstGeom prst="rect">
-            <a:avLst/>
-          </a:prstGeom>
-          <a:noFill/>
-          <a:ln/>
-        </p:spPr>
-        <p:txBody>
-          <a:bodyPr wrap="square" lIns="0" tIns="0" rIns="0" bIns="0" rtlCol="0" anchor="ctr"/>
-          <a:lstStyle/>
-          <a:p>
-            <a:pPr indent="0" marL="0">
-              <a:buNone/>
-            </a:pPr>
-            <a:r>
-              <a:rPr lang="en-US" sz="1100" b="1" spc="120" kern="0" dirty="0">
-                <a:solidFill>
-                  <a:srgbClr val="D2622A"/>
-                </a:solidFill>
-                <a:latin typeface="Calibri" pitchFamily="34" charset="0"/>
-                <a:ea typeface="Calibri" pitchFamily="34" charset="-122"/>
-                <a:cs typeface="Calibri" pitchFamily="34" charset="-120"/>
-              </a:rPr>
-              <a:t>HONEST RISKS, AND WHAT WE DO ABOUT THEM</a:t>
-            </a:r>
-            <a:endParaRPr lang="en-US" sz="1100" dirty="0"/>
-          </a:p>
-        </p:txBody>
-      </p:sp>
-      <p:sp>
-        <p:nvSpPr>
-          <p:cNvPr id="19" name="Shape 16"/>
+          <p:cNvPr id="20" name="Shape 15"/>
           <p:cNvSpPr/>
           <p:nvPr/>
         </p:nvSpPr>
         <p:spPr>
           <a:xfrm>
-            <a:off x="384048" y="3986784"/>
-            <a:ext cx="3429000" cy="603504"/>
+            <a:off x="365760" y="5102352"/>
+            <a:ext cx="3657600" cy="960120"/>
           </a:xfrm>
           <a:prstGeom prst="roundRect">
             <a:avLst>
-              <a:gd name="adj" fmla="val 7576"/>
+              <a:gd name="adj" fmla="val 4762"/>
             </a:avLst>
           </a:prstGeom>
           <a:solidFill>
-            <a:srgbClr val="F8EDE7"/>
-          </a:solidFill>
-          <a:ln w="9525">
+            <a:srgbClr val="FBF3EE"/>
+          </a:solidFill>
+          <a:ln w="12700">
             <a:solidFill>
               <a:srgbClr val="E4C4B2"/>
             </a:solidFill>
@@ -4317,14 +4321,14 @@
       </p:sp>
       <p:sp>
         <p:nvSpPr>
-          <p:cNvPr id="20" name="Text 17"/>
-          <p:cNvSpPr txBox="1"/>
-          <p:nvPr/>
-        </p:nvSpPr>
-        <p:spPr>
-          <a:xfrm>
-            <a:off x="548640" y="4041648"/>
-            <a:ext cx="3154680" cy="493776"/>
+          <p:cNvPr id="21" name="Text 16"/>
+          <p:cNvSpPr txBox="1"/>
+          <p:nvPr/>
+        </p:nvSpPr>
+        <p:spPr>
+          <a:xfrm>
+            <a:off x="530352" y="5212080"/>
+            <a:ext cx="960120" cy="548640"/>
           </a:xfrm>
           <a:prstGeom prst="rect">
             <a:avLst/>
@@ -4337,13 +4341,10 @@
           <a:lstStyle/>
           <a:p>
             <a:pPr indent="0" marL="0">
-              <a:lnSpc>
-                <a:spcPct val="100000"/>
-              </a:lnSpc>
-              <a:buNone/>
-            </a:pPr>
-            <a:r>
-              <a:rPr lang="en-US" sz="1150" b="1" dirty="0">
+              <a:buNone/>
+            </a:pPr>
+            <a:r>
+              <a:rPr lang="en-US" sz="2600" b="1" dirty="0">
                 <a:solidFill>
                   <a:srgbClr val="D2622A"/>
                 </a:solidFill>
@@ -4351,7 +4352,46 @@
                 <a:ea typeface="Calibri" pitchFamily="34" charset="-122"/>
                 <a:cs typeface="Calibri" pitchFamily="34" charset="-120"/>
               </a:rPr>
-              <a:t>Precision is 73%, not 100%</a:t>
+              <a:t>73%</a:t>
+            </a:r>
+            <a:endParaRPr lang="en-US" sz="2600" dirty="0"/>
+          </a:p>
+        </p:txBody>
+      </p:sp>
+      <p:sp>
+        <p:nvSpPr>
+          <p:cNvPr id="22" name="Text 17"/>
+          <p:cNvSpPr txBox="1"/>
+          <p:nvPr/>
+        </p:nvSpPr>
+        <p:spPr>
+          <a:xfrm>
+            <a:off x="1572768" y="5175504"/>
+            <a:ext cx="2286000" cy="822960"/>
+          </a:xfrm>
+          <a:prstGeom prst="rect">
+            <a:avLst/>
+          </a:prstGeom>
+          <a:noFill/>
+          <a:ln/>
+        </p:spPr>
+        <p:txBody>
+          <a:bodyPr wrap="square" lIns="0" tIns="0" rIns="0" bIns="0" rtlCol="0" anchor="ctr"/>
+          <a:lstStyle/>
+          <a:p>
+            <a:pPr indent="0" marL="0">
+              <a:buNone/>
+            </a:pPr>
+            <a:r>
+              <a:rPr lang="en-US" sz="1150" dirty="0">
+                <a:solidFill>
+                  <a:srgbClr val="43504F"/>
+                </a:solidFill>
+                <a:latin typeface="Calibri" pitchFamily="34" charset="0"/>
+                <a:ea typeface="Calibri" pitchFamily="34" charset="-122"/>
+                <a:cs typeface="Calibri" pitchFamily="34" charset="-120"/>
+              </a:rPr>
+              <a:t>precision, not 100% — crest occlusions</a:t>
             </a:r>
             <a:endParaRPr lang="en-US" sz="1150" dirty="0"/>
           </a:p>
@@ -4359,66 +4399,24 @@
       </p:sp>
       <p:sp>
         <p:nvSpPr>
-          <p:cNvPr id="21" name="Text 18"/>
-          <p:cNvSpPr txBox="1"/>
-          <p:nvPr/>
-        </p:nvSpPr>
-        <p:spPr>
-          <a:xfrm>
-            <a:off x="3977640" y="4005072"/>
-            <a:ext cx="7863840" cy="566928"/>
-          </a:xfrm>
-          <a:prstGeom prst="rect">
-            <a:avLst/>
-          </a:prstGeom>
-          <a:noFill/>
-          <a:ln/>
-        </p:spPr>
-        <p:txBody>
-          <a:bodyPr wrap="square" lIns="0" tIns="0" rIns="0" bIns="0" rtlCol="0" anchor="ctr"/>
-          <a:lstStyle/>
-          <a:p>
-            <a:pPr indent="0" marL="0">
-              <a:lnSpc>
-                <a:spcPct val="105000"/>
-              </a:lnSpc>
-              <a:buNone/>
-            </a:pPr>
-            <a:r>
-              <a:rPr lang="en-US" sz="1150" dirty="0">
-                <a:solidFill>
-                  <a:srgbClr val="43504F"/>
-                </a:solidFill>
-                <a:latin typeface="Calibri" pitchFamily="34" charset="0"/>
-                <a:ea typeface="Calibri" pitchFamily="34" charset="-122"/>
-                <a:cs typeface="Calibri" pitchFamily="34" charset="-120"/>
-              </a:rPr>
-              <a:t>Crest occlusions produce genuine range gaps. Threshold chosen by sweep against terrain with the ditches removed — 2.0 gives 94% recall at 46% precision, 3.0 gives 88% at 73%.</a:t>
-            </a:r>
-            <a:endParaRPr lang="en-US" sz="1150" dirty="0"/>
-          </a:p>
-        </p:txBody>
-      </p:sp>
-      <p:sp>
-        <p:nvSpPr>
-          <p:cNvPr id="22" name="Shape 19"/>
+          <p:cNvPr id="23" name="Shape 18"/>
           <p:cNvSpPr/>
           <p:nvPr/>
         </p:nvSpPr>
         <p:spPr>
           <a:xfrm>
-            <a:off x="384048" y="4700016"/>
-            <a:ext cx="3429000" cy="603504"/>
+            <a:off x="4224528" y="5102352"/>
+            <a:ext cx="3657600" cy="960120"/>
           </a:xfrm>
           <a:prstGeom prst="roundRect">
             <a:avLst>
-              <a:gd name="adj" fmla="val 7576"/>
+              <a:gd name="adj" fmla="val 4762"/>
             </a:avLst>
           </a:prstGeom>
           <a:solidFill>
-            <a:srgbClr val="F8EDE7"/>
-          </a:solidFill>
-          <a:ln w="9525">
+            <a:srgbClr val="FBF3EE"/>
+          </a:solidFill>
+          <a:ln w="12700">
             <a:solidFill>
               <a:srgbClr val="E4C4B2"/>
             </a:solidFill>
@@ -4428,14 +4426,14 @@
       </p:sp>
       <p:sp>
         <p:nvSpPr>
-          <p:cNvPr id="23" name="Text 20"/>
-          <p:cNvSpPr txBox="1"/>
-          <p:nvPr/>
-        </p:nvSpPr>
-        <p:spPr>
-          <a:xfrm>
-            <a:off x="548640" y="4754880"/>
-            <a:ext cx="3154680" cy="493776"/>
+          <p:cNvPr id="24" name="Text 19"/>
+          <p:cNvSpPr txBox="1"/>
+          <p:nvPr/>
+        </p:nvSpPr>
+        <p:spPr>
+          <a:xfrm>
+            <a:off x="4389120" y="5212080"/>
+            <a:ext cx="960120" cy="548640"/>
           </a:xfrm>
           <a:prstGeom prst="rect">
             <a:avLst/>
@@ -4448,13 +4446,10 @@
           <a:lstStyle/>
           <a:p>
             <a:pPr indent="0" marL="0">
-              <a:lnSpc>
-                <a:spcPct val="100000"/>
-              </a:lnSpc>
-              <a:buNone/>
-            </a:pPr>
-            <a:r>
-              <a:rPr lang="en-US" sz="1150" b="1" dirty="0">
+              <a:buNone/>
+            </a:pPr>
+            <a:r>
+              <a:rPr lang="en-US" sz="2600" b="1" dirty="0">
                 <a:solidFill>
                   <a:srgbClr val="D2622A"/>
                 </a:solidFill>
@@ -4462,7 +4457,46 @@
                 <a:ea typeface="Calibri" pitchFamily="34" charset="-122"/>
                 <a:cs typeface="Calibri" pitchFamily="34" charset="-120"/>
               </a:rPr>
-              <a:t>RELLIS-3D corroboration is outstanding</a:t>
+              <a:t>0</a:t>
+            </a:r>
+            <a:endParaRPr lang="en-US" sz="2600" dirty="0"/>
+          </a:p>
+        </p:txBody>
+      </p:sp>
+      <p:sp>
+        <p:nvSpPr>
+          <p:cNvPr id="25" name="Text 20"/>
+          <p:cNvSpPr txBox="1"/>
+          <p:nvPr/>
+        </p:nvSpPr>
+        <p:spPr>
+          <a:xfrm>
+            <a:off x="5431536" y="5175504"/>
+            <a:ext cx="2286000" cy="822960"/>
+          </a:xfrm>
+          <a:prstGeom prst="rect">
+            <a:avLst/>
+          </a:prstGeom>
+          <a:noFill/>
+          <a:ln/>
+        </p:spPr>
+        <p:txBody>
+          <a:bodyPr wrap="square" lIns="0" tIns="0" rIns="0" bIns="0" rtlCol="0" anchor="ctr"/>
+          <a:lstStyle/>
+          <a:p>
+            <a:pPr indent="0" marL="0">
+              <a:buNone/>
+            </a:pPr>
+            <a:r>
+              <a:rPr lang="en-US" sz="1150" dirty="0">
+                <a:solidFill>
+                  <a:srgbClr val="43504F"/>
+                </a:solidFill>
+                <a:latin typeface="Calibri" pitchFamily="34" charset="0"/>
+                <a:ea typeface="Calibri" pitchFamily="34" charset="-122"/>
+                <a:cs typeface="Calibri" pitchFamily="34" charset="-120"/>
+              </a:rPr>
+              <a:t>frames of RELLIS-3D run so far — next step</a:t>
             </a:r>
             <a:endParaRPr lang="en-US" sz="1150" dirty="0"/>
           </a:p>
@@ -4470,66 +4504,24 @@
       </p:sp>
       <p:sp>
         <p:nvSpPr>
-          <p:cNvPr id="24" name="Text 21"/>
-          <p:cNvSpPr txBox="1"/>
-          <p:nvPr/>
-        </p:nvSpPr>
-        <p:spPr>
-          <a:xfrm>
-            <a:off x="3977640" y="4718304"/>
-            <a:ext cx="7863840" cy="566928"/>
-          </a:xfrm>
-          <a:prstGeom prst="rect">
-            <a:avLst/>
-          </a:prstGeom>
-          <a:noFill/>
-          <a:ln/>
-        </p:spPr>
-        <p:txBody>
-          <a:bodyPr wrap="square" lIns="0" tIns="0" rIns="0" bIns="0" rtlCol="0" anchor="ctr"/>
-          <a:lstStyle/>
-          <a:p>
-            <a:pPr indent="0" marL="0">
-              <a:lnSpc>
-                <a:spcPct val="105000"/>
-              </a:lnSpc>
-              <a:buNone/>
-            </a:pPr>
-            <a:r>
-              <a:rPr lang="en-US" sz="1150" dirty="0">
-                <a:solidFill>
-                  <a:srgbClr val="43504F"/>
-                </a:solidFill>
-                <a:latin typeface="Calibri" pitchFamily="34" charset="0"/>
-                <a:ea typeface="Calibri" pitchFamily="34" charset="-122"/>
-                <a:cs typeface="Calibri" pitchFamily="34" charset="-120"/>
-              </a:rPr>
-              <a:t>Real-data validation has NOT yet been run. The loader is written and it is the next step.</a:t>
-            </a:r>
-            <a:endParaRPr lang="en-US" sz="1150" dirty="0"/>
-          </a:p>
-        </p:txBody>
-      </p:sp>
-      <p:sp>
-        <p:nvSpPr>
-          <p:cNvPr id="25" name="Shape 22"/>
+          <p:cNvPr id="26" name="Shape 21"/>
           <p:cNvSpPr/>
           <p:nvPr/>
         </p:nvSpPr>
         <p:spPr>
           <a:xfrm>
-            <a:off x="384048" y="5413248"/>
-            <a:ext cx="3429000" cy="603504"/>
+            <a:off x="8083296" y="5102352"/>
+            <a:ext cx="3657600" cy="960120"/>
           </a:xfrm>
           <a:prstGeom prst="roundRect">
             <a:avLst>
-              <a:gd name="adj" fmla="val 7576"/>
+              <a:gd name="adj" fmla="val 4762"/>
             </a:avLst>
           </a:prstGeom>
           <a:solidFill>
-            <a:srgbClr val="F8EDE7"/>
-          </a:solidFill>
-          <a:ln w="9525">
+            <a:srgbClr val="FBF3EE"/>
+          </a:solidFill>
+          <a:ln w="12700">
             <a:solidFill>
               <a:srgbClr val="E4C4B2"/>
             </a:solidFill>
@@ -4539,14 +4531,14 @@
       </p:sp>
       <p:sp>
         <p:nvSpPr>
-          <p:cNvPr id="26" name="Text 23"/>
-          <p:cNvSpPr txBox="1"/>
-          <p:nvPr/>
-        </p:nvSpPr>
-        <p:spPr>
-          <a:xfrm>
-            <a:off x="548640" y="5468112"/>
-            <a:ext cx="3154680" cy="493776"/>
+          <p:cNvPr id="27" name="Text 22"/>
+          <p:cNvSpPr txBox="1"/>
+          <p:nvPr/>
+        </p:nvSpPr>
+        <p:spPr>
+          <a:xfrm>
+            <a:off x="8247888" y="5212080"/>
+            <a:ext cx="960120" cy="548640"/>
           </a:xfrm>
           <a:prstGeom prst="rect">
             <a:avLst/>
@@ -4559,13 +4551,10 @@
           <a:lstStyle/>
           <a:p>
             <a:pPr indent="0" marL="0">
-              <a:lnSpc>
-                <a:spcPct val="100000"/>
-              </a:lnSpc>
-              <a:buNone/>
-            </a:pPr>
-            <a:r>
-              <a:rPr lang="en-US" sz="1150" b="1" dirty="0">
+              <a:buNone/>
+            </a:pPr>
+            <a:r>
+              <a:rPr lang="en-US" sz="2600" b="1" dirty="0">
                 <a:solidFill>
                   <a:srgbClr val="D2622A"/>
                 </a:solidFill>
@@ -4573,22 +4562,22 @@
                 <a:ea typeface="Calibri" pitchFamily="34" charset="-122"/>
                 <a:cs typeface="Calibri" pitchFamily="34" charset="-120"/>
               </a:rPr>
-              <a:t>No embedded-hardware benchmark</a:t>
-            </a:r>
-            <a:endParaRPr lang="en-US" sz="1150" dirty="0"/>
-          </a:p>
-        </p:txBody>
-      </p:sp>
-      <p:sp>
-        <p:nvSpPr>
-          <p:cNvPr id="27" name="Text 24"/>
-          <p:cNvSpPr txBox="1"/>
-          <p:nvPr/>
-        </p:nvSpPr>
-        <p:spPr>
-          <a:xfrm>
-            <a:off x="3977640" y="5431536"/>
-            <a:ext cx="7863840" cy="566928"/>
+              <a:t>no</a:t>
+            </a:r>
+            <a:endParaRPr lang="en-US" sz="2600" dirty="0"/>
+          </a:p>
+        </p:txBody>
+      </p:sp>
+      <p:sp>
+        <p:nvSpPr>
+          <p:cNvPr id="28" name="Text 23"/>
+          <p:cNvSpPr txBox="1"/>
+          <p:nvPr/>
+        </p:nvSpPr>
+        <p:spPr>
+          <a:xfrm>
+            <a:off x="9290304" y="5175504"/>
+            <a:ext cx="2286000" cy="822960"/>
           </a:xfrm>
           <a:prstGeom prst="rect">
             <a:avLst/>
@@ -4601,9 +4590,6 @@
           <a:lstStyle/>
           <a:p>
             <a:pPr indent="0" marL="0">
-              <a:lnSpc>
-                <a:spcPct val="105000"/>
-              </a:lnSpc>
               <a:buNone/>
             </a:pPr>
             <a:r>
@@ -4615,7 +4601,7 @@
                 <a:ea typeface="Calibri" pitchFamily="34" charset="-122"/>
                 <a:cs typeface="Calibri" pitchFamily="34" charset="-120"/>
               </a:rPr>
-              <a:t>43 ms/frame measured on a laptop CPU. We do not quote a Jetson figure we have not measured.</a:t>
+              <a:t>Jetson benchmark — we will not quote one</a:t>
             </a:r>
             <a:endParaRPr lang="en-US" sz="1150" dirty="0"/>
           </a:p>
@@ -4661,8 +4647,8 @@
         </p:nvSpPr>
         <p:spPr>
           <a:xfrm>
-            <a:off x="256032" y="146304"/>
-            <a:ext cx="1207008" cy="566928"/>
+            <a:off x="237744" y="128016"/>
+            <a:ext cx="1152144" cy="530352"/>
           </a:xfrm>
           <a:prstGeom prst="ellipse">
             <a:avLst/>
@@ -4686,8 +4672,8 @@
         </p:nvSpPr>
         <p:spPr>
           <a:xfrm>
-            <a:off x="256032" y="146304"/>
-            <a:ext cx="1207008" cy="566928"/>
+            <a:off x="237744" y="128016"/>
+            <a:ext cx="1152144" cy="530352"/>
           </a:xfrm>
           <a:prstGeom prst="rect">
             <a:avLst/>
@@ -4703,7 +4689,7 @@
               <a:buNone/>
             </a:pPr>
             <a:r>
-              <a:rPr lang="en-US" sz="1300" dirty="0">
+              <a:rPr lang="en-US" sz="1250" dirty="0">
                 <a:solidFill>
                   <a:srgbClr val="14181A"/>
                 </a:solidFill>
@@ -4713,7 +4699,7 @@
               </a:rPr>
               <a:t>Raysense</a:t>
             </a:r>
-            <a:endParaRPr lang="en-US" sz="1300" dirty="0"/>
+            <a:endParaRPr lang="en-US" sz="1250" dirty="0"/>
           </a:p>
         </p:txBody>
       </p:sp>
@@ -4733,8 +4719,8 @@
         </p:blipFill>
         <p:spPr>
           <a:xfrm>
-            <a:off x="10378440" y="91440"/>
-            <a:ext cx="1572768" cy="786384"/>
+            <a:off x="10469880" y="91440"/>
+            <a:ext cx="1481328" cy="585216"/>
           </a:xfrm>
           <a:prstGeom prst="rect">
             <a:avLst/>
@@ -4749,8 +4735,8 @@
         </p:nvSpPr>
         <p:spPr>
           <a:xfrm>
-            <a:off x="1645920" y="146304"/>
-            <a:ext cx="8595360" cy="658368"/>
+            <a:off x="1554480" y="118872"/>
+            <a:ext cx="8778240" cy="566928"/>
           </a:xfrm>
           <a:prstGeom prst="rect">
             <a:avLst/>
@@ -4766,7 +4752,7 @@
               <a:buNone/>
             </a:pPr>
             <a:r>
-              <a:rPr lang="en-US" sz="3100" b="1" dirty="0">
+              <a:rPr lang="en-US" sz="2900" b="1" dirty="0">
                 <a:solidFill>
                   <a:srgbClr val="14181A"/>
                 </a:solidFill>
@@ -4776,7 +4762,7 @@
               </a:rPr>
               <a:t>IMPACT AND BENEFITS</a:t>
             </a:r>
-            <a:endParaRPr lang="en-US" sz="3100" dirty="0"/>
+            <a:endParaRPr lang="en-US" sz="2900" dirty="0"/>
           </a:p>
         </p:txBody>
       </p:sp>
@@ -4788,8 +4774,8 @@
         </p:nvSpPr>
         <p:spPr>
           <a:xfrm>
-            <a:off x="0" y="6437376"/>
-            <a:ext cx="12191695" cy="420624"/>
+            <a:off x="0" y="6473952"/>
+            <a:ext cx="12191695" cy="384048"/>
           </a:xfrm>
           <a:prstGeom prst="rect">
             <a:avLst/>
@@ -4808,8 +4794,8 @@
         </p:nvSpPr>
         <p:spPr>
           <a:xfrm>
-            <a:off x="0" y="6437376"/>
-            <a:ext cx="12191695" cy="420624"/>
+            <a:off x="0" y="6473952"/>
+            <a:ext cx="12191695" cy="384048"/>
           </a:xfrm>
           <a:prstGeom prst="rect">
             <a:avLst/>
@@ -4825,7 +4811,7 @@
               <a:buNone/>
             </a:pPr>
             <a:r>
-              <a:rPr lang="en-US" sz="1200" dirty="0">
+              <a:rPr lang="en-US" sz="1100" dirty="0">
                 <a:solidFill>
                   <a:srgbClr val="FFFFFF"/>
                 </a:solidFill>
@@ -4835,7 +4821,7 @@
               </a:rPr>
               <a:t>@SIH Idea submission- Template</a:t>
             </a:r>
-            <a:endParaRPr lang="en-US" sz="1200" dirty="0"/>
+            <a:endParaRPr lang="en-US" sz="1100" dirty="0"/>
           </a:p>
         </p:txBody>
       </p:sp>
@@ -4847,8 +4833,8 @@
         </p:nvSpPr>
         <p:spPr>
           <a:xfrm>
-            <a:off x="11277295" y="6437376"/>
-            <a:ext cx="548640" cy="420624"/>
+            <a:off x="11323015" y="6473952"/>
+            <a:ext cx="502920" cy="384048"/>
           </a:xfrm>
           <a:prstGeom prst="rect">
             <a:avLst/>
@@ -4864,7 +4850,7 @@
               <a:buNone/>
             </a:pPr>
             <a:r>
-              <a:rPr lang="en-US" sz="1200" b="1" dirty="0">
+              <a:rPr lang="en-US" sz="1100" b="1" dirty="0">
                 <a:solidFill>
                   <a:srgbClr val="FFFFFF"/>
                 </a:solidFill>
@@ -4874,7 +4860,7 @@
               </a:rPr>
               <a:t>5</a:t>
             </a:r>
-            <a:endParaRPr lang="en-US" sz="1200" dirty="0"/>
+            <a:endParaRPr lang="en-US" sz="1100" dirty="0"/>
           </a:p>
         </p:txBody>
       </p:sp>
@@ -4894,8 +4880,8 @@
         </p:blipFill>
         <p:spPr>
           <a:xfrm>
-            <a:off x="384048" y="1051560"/>
-            <a:ext cx="5257800" cy="3419856"/>
+            <a:off x="365760" y="914400"/>
+            <a:ext cx="5532120" cy="3603987"/>
           </a:xfrm>
           <a:prstGeom prst="rect">
             <a:avLst/>
@@ -4910,8 +4896,8 @@
         </p:nvSpPr>
         <p:spPr>
           <a:xfrm>
-            <a:off x="384048" y="4553712"/>
-            <a:ext cx="5257800" cy="256032"/>
+            <a:off x="365760" y="4590288"/>
+            <a:ext cx="5532120" cy="274320"/>
           </a:xfrm>
           <a:prstGeom prst="rect">
             <a:avLst/>
@@ -4923,11 +4909,11 @@
           <a:bodyPr wrap="square" lIns="0" tIns="0" rIns="0" bIns="0" rtlCol="0" anchor="ctr"/>
           <a:lstStyle/>
           <a:p>
-            <a:pPr indent="0" marL="0">
-              <a:buNone/>
-            </a:pPr>
-            <a:r>
-              <a:rPr lang="en-US" sz="1100" b="1" spc="120" kern="0" dirty="0">
+            <a:pPr algn="ctr" indent="0" marL="0">
+              <a:buNone/>
+            </a:pPr>
+            <a:r>
+              <a:rPr lang="en-US" sz="1150" b="1" spc="80" kern="0" dirty="0">
                 <a:solidFill>
                   <a:srgbClr val="2E9E68"/>
                 </a:solidFill>
@@ -4935,22 +4921,46 @@
                 <a:ea typeface="Calibri" pitchFamily="34" charset="-122"/>
                 <a:cs typeface="Calibri" pitchFamily="34" charset="-120"/>
               </a:rPr>
-              <a:t>20× FEWER POINTS, SEVEN TIMES THE DETECTION</a:t>
-            </a:r>
-            <a:endParaRPr lang="en-US" sz="1100" dirty="0"/>
-          </a:p>
-        </p:txBody>
-      </p:sp>
-      <p:sp>
-        <p:nvSpPr>
-          <p:cNvPr id="11" name="Text 7"/>
-          <p:cNvSpPr txBox="1"/>
-          <p:nvPr/>
-        </p:nvSpPr>
-        <p:spPr>
-          <a:xfrm>
-            <a:off x="384048" y="4846320"/>
-            <a:ext cx="5257800" cy="548640"/>
+              <a:t>91% OF DITCHES AT 5% OF THE POINTS · 20× FEWER</a:t>
+            </a:r>
+            <a:endParaRPr lang="en-US" sz="1150" dirty="0"/>
+          </a:p>
+        </p:txBody>
+      </p:sp>
+      <p:pic>
+        <p:nvPicPr>
+          <p:cNvPr id="11" name="Image 2" descr="deckbuild/fig_speedo.png">    </p:cNvPr>
+          <p:cNvPicPr>
+            <a:picLocks noChangeAspect="1"/>
+          </p:cNvPicPr>
+          <p:nvPr/>
+        </p:nvPicPr>
+        <p:blipFill>
+          <a:blip r:embed="rId3"/>
+          <a:stretch>
+            <a:fillRect/>
+          </a:stretch>
+        </p:blipFill>
+        <p:spPr>
+          <a:xfrm>
+            <a:off x="6537960" y="896112"/>
+            <a:ext cx="4663440" cy="3263429"/>
+          </a:xfrm>
+          <a:prstGeom prst="rect">
+            <a:avLst/>
+          </a:prstGeom>
+        </p:spPr>
+      </p:pic>
+      <p:sp>
+        <p:nvSpPr>
+          <p:cNvPr id="12" name="Text 7"/>
+          <p:cNvSpPr txBox="1"/>
+          <p:nvPr/>
+        </p:nvSpPr>
+        <p:spPr>
+          <a:xfrm>
+            <a:off x="6537960" y="4187952"/>
+            <a:ext cx="4663440" cy="274320"/>
           </a:xfrm>
           <a:prstGeom prst="rect">
             <a:avLst/>
@@ -4962,49 +4972,46 @@
           <a:bodyPr wrap="square" lIns="0" tIns="0" rIns="0" bIns="0" rtlCol="0" anchor="ctr"/>
           <a:lstStyle/>
           <a:p>
-            <a:pPr indent="0" marL="0">
-              <a:lnSpc>
-                <a:spcPct val="112000"/>
-              </a:lnSpc>
-              <a:buNone/>
-            </a:pPr>
-            <a:r>
-              <a:rPr lang="en-US" sz="1250" dirty="0">
-                <a:solidFill>
-                  <a:srgbClr val="43504F"/>
-                </a:solidFill>
-                <a:latin typeface="Calibri" pitchFamily="34" charset="0"/>
-                <a:ea typeface="Calibri" pitchFamily="34" charset="-122"/>
-                <a:cs typeface="Calibri" pitchFamily="34" charset="-120"/>
-              </a:rPr>
-              <a:t>91% of negative obstacles at a 5% budget. A full scan with no absence reasoning finds 12%.</a:t>
-            </a:r>
-            <a:endParaRPr lang="en-US" sz="1250" dirty="0"/>
-          </a:p>
-        </p:txBody>
-      </p:sp>
-      <p:sp>
-        <p:nvSpPr>
-          <p:cNvPr id="12" name="Shape 8"/>
+            <a:pPr algn="ctr" indent="0" marL="0">
+              <a:buNone/>
+            </a:pPr>
+            <a:r>
+              <a:rPr lang="en-US" sz="1150" b="1" spc="80" kern="0" dirty="0">
+                <a:solidFill>
+                  <a:srgbClr val="D2622A"/>
+                </a:solidFill>
+                <a:latin typeface="Calibri" pitchFamily="34" charset="0"/>
+                <a:ea typeface="Calibri" pitchFamily="34" charset="-122"/>
+                <a:cs typeface="Calibri" pitchFamily="34" charset="-120"/>
+              </a:rPr>
+              <a:t>THE SPEED LIMIT NOBODY PUBLISHED</a:t>
+            </a:r>
+            <a:endParaRPr lang="en-US" sz="1150" dirty="0"/>
+          </a:p>
+        </p:txBody>
+      </p:sp>
+      <p:sp>
+        <p:nvSpPr>
+          <p:cNvPr id="13" name="Shape 8"/>
           <p:cNvSpPr/>
           <p:nvPr/>
         </p:nvSpPr>
         <p:spPr>
           <a:xfrm>
-            <a:off x="5943600" y="1051560"/>
-            <a:ext cx="5897880" cy="1847088"/>
+            <a:off x="6144768" y="4645152"/>
+            <a:ext cx="5669280" cy="502920"/>
           </a:xfrm>
           <a:prstGeom prst="roundRect">
             <a:avLst>
-              <a:gd name="adj" fmla="val 1980"/>
+              <a:gd name="adj" fmla="val 9091"/>
             </a:avLst>
           </a:prstGeom>
           <a:solidFill>
-            <a:srgbClr val="FDF1EA"/>
-          </a:solidFill>
-          <a:ln w="9525">
+            <a:srgbClr val="F6F8F5"/>
+          </a:solidFill>
+          <a:ln w="12700">
             <a:solidFill>
-              <a:srgbClr val="D2D8D3"/>
+              <a:srgbClr val="D9DED6"/>
             </a:solidFill>
             <a:prstDash val="solid"/>
           </a:ln>
@@ -5012,14 +5019,34 @@
       </p:sp>
       <p:sp>
         <p:nvSpPr>
-          <p:cNvPr id="13" name="Text 9"/>
-          <p:cNvSpPr txBox="1"/>
-          <p:nvPr/>
-        </p:nvSpPr>
-        <p:spPr>
-          <a:xfrm>
-            <a:off x="6126480" y="1188720"/>
-            <a:ext cx="2743200" cy="868680"/>
+          <p:cNvPr id="14" name="Shape 9"/>
+          <p:cNvSpPr/>
+          <p:nvPr/>
+        </p:nvSpPr>
+        <p:spPr>
+          <a:xfrm>
+            <a:off x="6309360" y="4800600"/>
+            <a:ext cx="192024" cy="192024"/>
+          </a:xfrm>
+          <a:prstGeom prst="ellipse">
+            <a:avLst/>
+          </a:prstGeom>
+          <a:solidFill>
+            <a:srgbClr val="2E9E68"/>
+          </a:solidFill>
+          <a:ln/>
+        </p:spPr>
+      </p:sp>
+      <p:sp>
+        <p:nvSpPr>
+          <p:cNvPr id="15" name="Text 10"/>
+          <p:cNvSpPr txBox="1"/>
+          <p:nvPr/>
+        </p:nvSpPr>
+        <p:spPr>
+          <a:xfrm>
+            <a:off x="6601968" y="4645152"/>
+            <a:ext cx="1965960" cy="502920"/>
           </a:xfrm>
           <a:prstGeom prst="rect">
             <a:avLst/>
@@ -5035,30 +5062,30 @@
               <a:buNone/>
             </a:pPr>
             <a:r>
-              <a:rPr lang="en-US" sz="4600" b="1" dirty="0">
-                <a:solidFill>
-                  <a:srgbClr val="D2622A"/>
-                </a:solidFill>
-                <a:latin typeface="Calibri" pitchFamily="34" charset="0"/>
-                <a:ea typeface="Calibri" pitchFamily="34" charset="-122"/>
-                <a:cs typeface="Calibri" pitchFamily="34" charset="-120"/>
-              </a:rPr>
-              <a:t>23 km/h</a:t>
-            </a:r>
-            <a:endParaRPr lang="en-US" sz="4600" dirty="0"/>
-          </a:p>
-        </p:txBody>
-      </p:sp>
-      <p:sp>
-        <p:nvSpPr>
-          <p:cNvPr id="14" name="Text 10"/>
-          <p:cNvSpPr txBox="1"/>
-          <p:nvPr/>
-        </p:nvSpPr>
-        <p:spPr>
-          <a:xfrm>
-            <a:off x="6126480" y="2029968"/>
-            <a:ext cx="5486400" cy="292608"/>
+              <a:rPr lang="en-US" sz="1200" b="1" dirty="0">
+                <a:solidFill>
+                  <a:srgbClr val="14181A"/>
+                </a:solidFill>
+                <a:latin typeface="Calibri" pitchFamily="34" charset="0"/>
+                <a:ea typeface="Calibri" pitchFamily="34" charset="-122"/>
+                <a:cs typeface="Calibri" pitchFamily="34" charset="-120"/>
+              </a:rPr>
+              <a:t>Defence UGVs</a:t>
+            </a:r>
+            <a:endParaRPr lang="en-US" sz="1200" dirty="0"/>
+          </a:p>
+        </p:txBody>
+      </p:sp>
+      <p:sp>
+        <p:nvSpPr>
+          <p:cNvPr id="16" name="Text 11"/>
+          <p:cNvSpPr txBox="1"/>
+          <p:nvPr/>
+        </p:nvSpPr>
+        <p:spPr>
+          <a:xfrm>
+            <a:off x="8549640" y="4645152"/>
+            <a:ext cx="3154680" cy="502920"/>
           </a:xfrm>
           <a:prstGeom prst="rect">
             <a:avLst/>
@@ -5074,49 +5101,7 @@
               <a:buNone/>
             </a:pPr>
             <a:r>
-              <a:rPr lang="en-US" sz="1300" b="1" dirty="0">
-                <a:solidFill>
-                  <a:srgbClr val="D2622A"/>
-                </a:solidFill>
-                <a:latin typeface="Calibri" pitchFamily="34" charset="0"/>
-                <a:ea typeface="Calibri" pitchFamily="34" charset="-122"/>
-                <a:cs typeface="Calibri" pitchFamily="34" charset="-120"/>
-              </a:rPr>
-              <a:t>the speed limit nobody published</a:t>
-            </a:r>
-            <a:endParaRPr lang="en-US" sz="1300" dirty="0"/>
-          </a:p>
-        </p:txBody>
-      </p:sp>
-      <p:sp>
-        <p:nvSpPr>
-          <p:cNvPr id="15" name="Text 11"/>
-          <p:cNvSpPr txBox="1"/>
-          <p:nvPr/>
-        </p:nvSpPr>
-        <p:spPr>
-          <a:xfrm>
-            <a:off x="6126480" y="2322576"/>
-            <a:ext cx="5532120" cy="566928"/>
-          </a:xfrm>
-          <a:prstGeom prst="rect">
-            <a:avLst/>
-          </a:prstGeom>
-          <a:noFill/>
-          <a:ln/>
-        </p:spPr>
-        <p:txBody>
-          <a:bodyPr wrap="square" lIns="0" tIns="0" rIns="0" bIns="0" rtlCol="0" anchor="ctr"/>
-          <a:lstStyle/>
-          <a:p>
-            <a:pPr indent="0" marL="0">
-              <a:lnSpc>
-                <a:spcPct val="112000"/>
-              </a:lnSpc>
-              <a:buNone/>
-            </a:pPr>
-            <a:r>
-              <a:rPr lang="en-US" sz="1150" dirty="0">
+              <a:rPr lang="en-US" sz="1050" dirty="0">
                 <a:solidFill>
                   <a:srgbClr val="43504F"/>
                 </a:solidFill>
@@ -5124,34 +5109,34 @@
                 <a:ea typeface="Calibri" pitchFamily="34" charset="-122"/>
                 <a:cs typeface="Calibri" pitchFamily="34" charset="-120"/>
               </a:rPr>
-              <a:t>Run the geometry backwards and it states how fast a vehicle may safely drive. For a stock OS1-64 that must never enter a 1 m ditch, the honest answer is 23 km/h — and the sensor gives no indication of it.</a:t>
-            </a:r>
-            <a:endParaRPr lang="en-US" sz="1150" dirty="0"/>
-          </a:p>
-        </p:txBody>
-      </p:sp>
-      <p:sp>
-        <p:nvSpPr>
-          <p:cNvPr id="16" name="Shape 12"/>
+              <a:t>unmapped ground becomes navigable</a:t>
+            </a:r>
+            <a:endParaRPr lang="en-US" sz="1050" dirty="0"/>
+          </a:p>
+        </p:txBody>
+      </p:sp>
+      <p:sp>
+        <p:nvSpPr>
+          <p:cNvPr id="17" name="Shape 12"/>
           <p:cNvSpPr/>
           <p:nvPr/>
         </p:nvSpPr>
         <p:spPr>
           <a:xfrm>
-            <a:off x="5943600" y="3172968"/>
-            <a:ext cx="5897880" cy="932688"/>
+            <a:off x="6144768" y="5221224"/>
+            <a:ext cx="5669280" cy="502920"/>
           </a:xfrm>
           <a:prstGeom prst="roundRect">
             <a:avLst>
-              <a:gd name="adj" fmla="val 3922"/>
+              <a:gd name="adj" fmla="val 9091"/>
             </a:avLst>
           </a:prstGeom>
           <a:solidFill>
-            <a:srgbClr val="F4F6F3"/>
-          </a:solidFill>
-          <a:ln w="9525">
+            <a:srgbClr val="F6F8F5"/>
+          </a:solidFill>
+          <a:ln w="12700">
             <a:solidFill>
-              <a:srgbClr val="D2D8D3"/>
+              <a:srgbClr val="D9DED6"/>
             </a:solidFill>
             <a:prstDash val="solid"/>
           </a:ln>
@@ -5159,34 +5144,34 @@
       </p:sp>
       <p:sp>
         <p:nvSpPr>
-          <p:cNvPr id="17" name="Shape 13"/>
+          <p:cNvPr id="18" name="Shape 13"/>
           <p:cNvSpPr/>
           <p:nvPr/>
         </p:nvSpPr>
         <p:spPr>
           <a:xfrm>
-            <a:off x="6144768" y="3465576"/>
-            <a:ext cx="310896" cy="310896"/>
+            <a:off x="6309360" y="5376672"/>
+            <a:ext cx="192024" cy="192024"/>
           </a:xfrm>
           <a:prstGeom prst="ellipse">
             <a:avLst/>
           </a:prstGeom>
           <a:solidFill>
-            <a:srgbClr val="2E9E68"/>
-          </a:solidFill>
-          <a:ln/>
-        </p:spPr>
-      </p:sp>
-      <p:sp>
-        <p:nvSpPr>
-          <p:cNvPr id="18" name="Text 14"/>
-          <p:cNvSpPr txBox="1"/>
-          <p:nvPr/>
-        </p:nvSpPr>
-        <p:spPr>
-          <a:xfrm>
-            <a:off x="6601968" y="3282696"/>
-            <a:ext cx="5029200" cy="274320"/>
+            <a:srgbClr val="2C8FBF"/>
+          </a:solidFill>
+          <a:ln/>
+        </p:spPr>
+      </p:sp>
+      <p:sp>
+        <p:nvSpPr>
+          <p:cNvPr id="19" name="Text 14"/>
+          <p:cNvSpPr txBox="1"/>
+          <p:nvPr/>
+        </p:nvSpPr>
+        <p:spPr>
+          <a:xfrm>
+            <a:off x="6601968" y="5221224"/>
+            <a:ext cx="1965960" cy="502920"/>
           </a:xfrm>
           <a:prstGeom prst="rect">
             <a:avLst/>
@@ -5202,7 +5187,7 @@
               <a:buNone/>
             </a:pPr>
             <a:r>
-              <a:rPr lang="en-US" sz="1300" b="1" dirty="0">
+              <a:rPr lang="en-US" sz="1200" b="1" dirty="0">
                 <a:solidFill>
                   <a:srgbClr val="14181A"/>
                 </a:solidFill>
@@ -5210,22 +5195,22 @@
                 <a:ea typeface="Calibri" pitchFamily="34" charset="-122"/>
                 <a:cs typeface="Calibri" pitchFamily="34" charset="-120"/>
               </a:rPr>
-              <a:t>Defence UGVs / AUGVs</a:t>
-            </a:r>
-            <a:endParaRPr lang="en-US" sz="1300" dirty="0"/>
-          </a:p>
-        </p:txBody>
-      </p:sp>
-      <p:sp>
-        <p:nvSpPr>
-          <p:cNvPr id="19" name="Text 15"/>
-          <p:cNvSpPr txBox="1"/>
-          <p:nvPr/>
-        </p:nvSpPr>
-        <p:spPr>
-          <a:xfrm>
-            <a:off x="6601968" y="3557016"/>
-            <a:ext cx="5074920" cy="475488"/>
+              <a:t>Field operators</a:t>
+            </a:r>
+            <a:endParaRPr lang="en-US" sz="1200" dirty="0"/>
+          </a:p>
+        </p:txBody>
+      </p:sp>
+      <p:sp>
+        <p:nvSpPr>
+          <p:cNvPr id="20" name="Text 15"/>
+          <p:cNvSpPr txBox="1"/>
+          <p:nvPr/>
+        </p:nvSpPr>
+        <p:spPr>
+          <a:xfrm>
+            <a:off x="8549640" y="5221224"/>
+            <a:ext cx="3154680" cy="502920"/>
           </a:xfrm>
           <a:prstGeom prst="rect">
             <a:avLst/>
@@ -5238,13 +5223,10 @@
           <a:lstStyle/>
           <a:p>
             <a:pPr indent="0" marL="0">
-              <a:lnSpc>
-                <a:spcPct val="105000"/>
-              </a:lnSpc>
-              <a:buNone/>
-            </a:pPr>
-            <a:r>
-              <a:rPr lang="en-US" sz="1150" dirty="0">
+              <a:buNone/>
+            </a:pPr>
+            <a:r>
+              <a:rPr lang="en-US" sz="1050" dirty="0">
                 <a:solidFill>
                   <a:srgbClr val="43504F"/>
                 </a:solidFill>
@@ -5252,34 +5234,34 @@
                 <a:ea typeface="Calibri" pitchFamily="34" charset="-122"/>
                 <a:cs typeface="Calibri" pitchFamily="34" charset="-120"/>
               </a:rPr>
-              <a:t>Unmapped ground becomes navigable, without waiting for a human to survey it first.</a:t>
-            </a:r>
-            <a:endParaRPr lang="en-US" sz="1150" dirty="0"/>
-          </a:p>
-        </p:txBody>
-      </p:sp>
-      <p:sp>
-        <p:nvSpPr>
-          <p:cNvPr id="20" name="Shape 16"/>
+              <a:t>a ditch does not damage a vehicle — it ends it</a:t>
+            </a:r>
+            <a:endParaRPr lang="en-US" sz="1050" dirty="0"/>
+          </a:p>
+        </p:txBody>
+      </p:sp>
+      <p:sp>
+        <p:nvSpPr>
+          <p:cNvPr id="21" name="Shape 16"/>
           <p:cNvSpPr/>
           <p:nvPr/>
         </p:nvSpPr>
         <p:spPr>
           <a:xfrm>
-            <a:off x="5943600" y="4197096"/>
-            <a:ext cx="5897880" cy="932688"/>
+            <a:off x="6144768" y="5797296"/>
+            <a:ext cx="5669280" cy="502920"/>
           </a:xfrm>
           <a:prstGeom prst="roundRect">
             <a:avLst>
-              <a:gd name="adj" fmla="val 3922"/>
+              <a:gd name="adj" fmla="val 9091"/>
             </a:avLst>
           </a:prstGeom>
           <a:solidFill>
-            <a:srgbClr val="F4F6F3"/>
-          </a:solidFill>
-          <a:ln w="9525">
+            <a:srgbClr val="F6F8F5"/>
+          </a:solidFill>
+          <a:ln w="12700">
             <a:solidFill>
-              <a:srgbClr val="D2D8D3"/>
+              <a:srgbClr val="D9DED6"/>
             </a:solidFill>
             <a:prstDash val="solid"/>
           </a:ln>
@@ -5287,34 +5269,34 @@
       </p:sp>
       <p:sp>
         <p:nvSpPr>
-          <p:cNvPr id="21" name="Shape 17"/>
+          <p:cNvPr id="22" name="Shape 17"/>
           <p:cNvSpPr/>
           <p:nvPr/>
         </p:nvSpPr>
         <p:spPr>
           <a:xfrm>
-            <a:off x="6144768" y="4489704"/>
-            <a:ext cx="310896" cy="310896"/>
+            <a:off x="6309360" y="5952744"/>
+            <a:ext cx="192024" cy="192024"/>
           </a:xfrm>
           <a:prstGeom prst="ellipse">
             <a:avLst/>
           </a:prstGeom>
           <a:solidFill>
-            <a:srgbClr val="2C8FBF"/>
-          </a:solidFill>
-          <a:ln/>
-        </p:spPr>
-      </p:sp>
-      <p:sp>
-        <p:nvSpPr>
-          <p:cNvPr id="22" name="Text 18"/>
-          <p:cNvSpPr txBox="1"/>
-          <p:nvPr/>
-        </p:nvSpPr>
-        <p:spPr>
-          <a:xfrm>
-            <a:off x="6601968" y="4306824"/>
-            <a:ext cx="5029200" cy="274320"/>
+            <a:srgbClr val="7A55B5"/>
+          </a:solidFill>
+          <a:ln/>
+        </p:spPr>
+      </p:sp>
+      <p:sp>
+        <p:nvSpPr>
+          <p:cNvPr id="23" name="Text 18"/>
+          <p:cNvSpPr txBox="1"/>
+          <p:nvPr/>
+        </p:nvSpPr>
+        <p:spPr>
+          <a:xfrm>
+            <a:off x="6601968" y="5797296"/>
+            <a:ext cx="1965960" cy="502920"/>
           </a:xfrm>
           <a:prstGeom prst="rect">
             <a:avLst/>
@@ -5330,7 +5312,7 @@
               <a:buNone/>
             </a:pPr>
             <a:r>
-              <a:rPr lang="en-US" sz="1300" b="1" dirty="0">
+              <a:rPr lang="en-US" sz="1200" b="1" dirty="0">
                 <a:solidFill>
                   <a:srgbClr val="14181A"/>
                 </a:solidFill>
@@ -5338,22 +5320,22 @@
                 <a:ea typeface="Calibri" pitchFamily="34" charset="-122"/>
                 <a:cs typeface="Calibri" pitchFamily="34" charset="-120"/>
               </a:rPr>
-              <a:t>Field operators</a:t>
-            </a:r>
-            <a:endParaRPr lang="en-US" sz="1300" dirty="0"/>
-          </a:p>
-        </p:txBody>
-      </p:sp>
-      <p:sp>
-        <p:nvSpPr>
-          <p:cNvPr id="23" name="Text 19"/>
-          <p:cNvSpPr txBox="1"/>
-          <p:nvPr/>
-        </p:nvSpPr>
-        <p:spPr>
-          <a:xfrm>
-            <a:off x="6601968" y="4581144"/>
-            <a:ext cx="5074920" cy="475488"/>
+              <a:t>Platform designers</a:t>
+            </a:r>
+            <a:endParaRPr lang="en-US" sz="1200" dirty="0"/>
+          </a:p>
+        </p:txBody>
+      </p:sp>
+      <p:sp>
+        <p:nvSpPr>
+          <p:cNvPr id="24" name="Text 19"/>
+          <p:cNvSpPr txBox="1"/>
+          <p:nvPr/>
+        </p:nvSpPr>
+        <p:spPr>
+          <a:xfrm>
+            <a:off x="8549640" y="5797296"/>
+            <a:ext cx="3154680" cy="502920"/>
           </a:xfrm>
           <a:prstGeom prst="rect">
             <a:avLst/>
@@ -5366,13 +5348,10 @@
           <a:lstStyle/>
           <a:p>
             <a:pPr indent="0" marL="0">
-              <a:lnSpc>
-                <a:spcPct val="105000"/>
-              </a:lnSpc>
-              <a:buNone/>
-            </a:pPr>
-            <a:r>
-              <a:rPr lang="en-US" sz="1150" dirty="0">
+              <a:buNone/>
+            </a:pPr>
+            <a:r>
+              <a:rPr lang="en-US" sz="1050" dirty="0">
                 <a:solidFill>
                   <a:srgbClr val="43504F"/>
                 </a:solidFill>
@@ -5380,137 +5359,9 @@
                 <a:ea typeface="Calibri" pitchFamily="34" charset="-122"/>
                 <a:cs typeface="Calibri" pitchFamily="34" charset="-120"/>
               </a:rPr>
-              <a:t>Fewer platforms stranded or destroyed. A negative obstacle does not damage a vehicle — it ends it.</a:t>
-            </a:r>
-            <a:endParaRPr lang="en-US" sz="1150" dirty="0"/>
-          </a:p>
-        </p:txBody>
-      </p:sp>
-      <p:sp>
-        <p:nvSpPr>
-          <p:cNvPr id="24" name="Shape 20"/>
-          <p:cNvSpPr/>
-          <p:nvPr/>
-        </p:nvSpPr>
-        <p:spPr>
-          <a:xfrm>
-            <a:off x="5943600" y="5221224"/>
-            <a:ext cx="5897880" cy="932688"/>
-          </a:xfrm>
-          <a:prstGeom prst="roundRect">
-            <a:avLst>
-              <a:gd name="adj" fmla="val 3922"/>
-            </a:avLst>
-          </a:prstGeom>
-          <a:solidFill>
-            <a:srgbClr val="F4F6F3"/>
-          </a:solidFill>
-          <a:ln w="9525">
-            <a:solidFill>
-              <a:srgbClr val="D2D8D3"/>
-            </a:solidFill>
-            <a:prstDash val="solid"/>
-          </a:ln>
-        </p:spPr>
-      </p:sp>
-      <p:sp>
-        <p:nvSpPr>
-          <p:cNvPr id="25" name="Shape 21"/>
-          <p:cNvSpPr/>
-          <p:nvPr/>
-        </p:nvSpPr>
-        <p:spPr>
-          <a:xfrm>
-            <a:off x="6144768" y="5513832"/>
-            <a:ext cx="310896" cy="310896"/>
-          </a:xfrm>
-          <a:prstGeom prst="ellipse">
-            <a:avLst/>
-          </a:prstGeom>
-          <a:solidFill>
-            <a:srgbClr val="7A55B5"/>
-          </a:solidFill>
-          <a:ln/>
-        </p:spPr>
-      </p:sp>
-      <p:sp>
-        <p:nvSpPr>
-          <p:cNvPr id="26" name="Text 22"/>
-          <p:cNvSpPr txBox="1"/>
-          <p:nvPr/>
-        </p:nvSpPr>
-        <p:spPr>
-          <a:xfrm>
-            <a:off x="6601968" y="5330952"/>
-            <a:ext cx="5029200" cy="274320"/>
-          </a:xfrm>
-          <a:prstGeom prst="rect">
-            <a:avLst/>
-          </a:prstGeom>
-          <a:noFill/>
-          <a:ln/>
-        </p:spPr>
-        <p:txBody>
-          <a:bodyPr wrap="square" lIns="0" tIns="0" rIns="0" bIns="0" rtlCol="0" anchor="ctr"/>
-          <a:lstStyle/>
-          <a:p>
-            <a:pPr indent="0" marL="0">
-              <a:buNone/>
-            </a:pPr>
-            <a:r>
-              <a:rPr lang="en-US" sz="1300" b="1" dirty="0">
-                <a:solidFill>
-                  <a:srgbClr val="14181A"/>
-                </a:solidFill>
-                <a:latin typeface="Calibri" pitchFamily="34" charset="0"/>
-                <a:ea typeface="Calibri" pitchFamily="34" charset="-122"/>
-                <a:cs typeface="Calibri" pitchFamily="34" charset="-120"/>
-              </a:rPr>
-              <a:t>Platform designers</a:t>
-            </a:r>
-            <a:endParaRPr lang="en-US" sz="1300" dirty="0"/>
-          </a:p>
-        </p:txBody>
-      </p:sp>
-      <p:sp>
-        <p:nvSpPr>
-          <p:cNvPr id="27" name="Text 23"/>
-          <p:cNvSpPr txBox="1"/>
-          <p:nvPr/>
-        </p:nvSpPr>
-        <p:spPr>
-          <a:xfrm>
-            <a:off x="6601968" y="5605272"/>
-            <a:ext cx="5074920" cy="475488"/>
-          </a:xfrm>
-          <a:prstGeom prst="rect">
-            <a:avLst/>
-          </a:prstGeom>
-          <a:noFill/>
-          <a:ln/>
-        </p:spPr>
-        <p:txBody>
-          <a:bodyPr wrap="square" lIns="0" tIns="0" rIns="0" bIns="0" rtlCol="0" anchor="ctr"/>
-          <a:lstStyle/>
-          <a:p>
-            <a:pPr indent="0" marL="0">
-              <a:lnSpc>
-                <a:spcPct val="105000"/>
-              </a:lnSpc>
-              <a:buNone/>
-            </a:pPr>
-            <a:r>
-              <a:rPr lang="en-US" sz="1150" dirty="0">
-                <a:solidFill>
-                  <a:srgbClr val="43504F"/>
-                </a:solidFill>
-                <a:latin typeface="Calibri" pitchFamily="34" charset="0"/>
-                <a:ea typeface="Calibri" pitchFamily="34" charset="-122"/>
-                <a:cs typeface="Calibri" pitchFamily="34" charset="-120"/>
-              </a:rPr>
-              <a:t>A quantified speed ceiling for a given sensor and point budget. This does not exist today.</a:t>
-            </a:r>
-            <a:endParaRPr lang="en-US" sz="1150" dirty="0"/>
+              <a:t>a quantified speed ceiling, per sensor</a:t>
+            </a:r>
+            <a:endParaRPr lang="en-US" sz="1050" dirty="0"/>
           </a:p>
         </p:txBody>
       </p:sp>
@@ -5554,8 +5405,8 @@
         </p:nvSpPr>
         <p:spPr>
           <a:xfrm>
-            <a:off x="256032" y="146304"/>
-            <a:ext cx="1207008" cy="566928"/>
+            <a:off x="237744" y="128016"/>
+            <a:ext cx="1152144" cy="530352"/>
           </a:xfrm>
           <a:prstGeom prst="ellipse">
             <a:avLst/>
@@ -5579,8 +5430,8 @@
         </p:nvSpPr>
         <p:spPr>
           <a:xfrm>
-            <a:off x="256032" y="146304"/>
-            <a:ext cx="1207008" cy="566928"/>
+            <a:off x="237744" y="128016"/>
+            <a:ext cx="1152144" cy="530352"/>
           </a:xfrm>
           <a:prstGeom prst="rect">
             <a:avLst/>
@@ -5596,7 +5447,7 @@
               <a:buNone/>
             </a:pPr>
             <a:r>
-              <a:rPr lang="en-US" sz="1300" dirty="0">
+              <a:rPr lang="en-US" sz="1250" dirty="0">
                 <a:solidFill>
                   <a:srgbClr val="14181A"/>
                 </a:solidFill>
@@ -5606,7 +5457,7 @@
               </a:rPr>
               <a:t>Raysense</a:t>
             </a:r>
-            <a:endParaRPr lang="en-US" sz="1300" dirty="0"/>
+            <a:endParaRPr lang="en-US" sz="1250" dirty="0"/>
           </a:p>
         </p:txBody>
       </p:sp>
@@ -5626,8 +5477,8 @@
         </p:blipFill>
         <p:spPr>
           <a:xfrm>
-            <a:off x="10378440" y="91440"/>
-            <a:ext cx="1572768" cy="786384"/>
+            <a:off x="10469880" y="91440"/>
+            <a:ext cx="1481328" cy="585216"/>
           </a:xfrm>
           <a:prstGeom prst="rect">
             <a:avLst/>
@@ -5642,8 +5493,8 @@
         </p:nvSpPr>
         <p:spPr>
           <a:xfrm>
-            <a:off x="1645920" y="146304"/>
-            <a:ext cx="8595360" cy="658368"/>
+            <a:off x="1554480" y="118872"/>
+            <a:ext cx="8778240" cy="566928"/>
           </a:xfrm>
           <a:prstGeom prst="rect">
             <a:avLst/>
@@ -5659,7 +5510,7 @@
               <a:buNone/>
             </a:pPr>
             <a:r>
-              <a:rPr lang="en-US" sz="3100" b="1" dirty="0">
+              <a:rPr lang="en-US" sz="2900" b="1" dirty="0">
                 <a:solidFill>
                   <a:srgbClr val="14181A"/>
                 </a:solidFill>
@@ -5669,7 +5520,7 @@
               </a:rPr>
               <a:t>RESEARCH AND REFERENCES</a:t>
             </a:r>
-            <a:endParaRPr lang="en-US" sz="3100" dirty="0"/>
+            <a:endParaRPr lang="en-US" sz="2900" dirty="0"/>
           </a:p>
         </p:txBody>
       </p:sp>
@@ -5681,8 +5532,8 @@
         </p:nvSpPr>
         <p:spPr>
           <a:xfrm>
-            <a:off x="0" y="6437376"/>
-            <a:ext cx="12191695" cy="420624"/>
+            <a:off x="0" y="6473952"/>
+            <a:ext cx="12191695" cy="384048"/>
           </a:xfrm>
           <a:prstGeom prst="rect">
             <a:avLst/>
@@ -5701,8 +5552,8 @@
         </p:nvSpPr>
         <p:spPr>
           <a:xfrm>
-            <a:off x="0" y="6437376"/>
-            <a:ext cx="12191695" cy="420624"/>
+            <a:off x="0" y="6473952"/>
+            <a:ext cx="12191695" cy="384048"/>
           </a:xfrm>
           <a:prstGeom prst="rect">
             <a:avLst/>
@@ -5718,7 +5569,7 @@
               <a:buNone/>
             </a:pPr>
             <a:r>
-              <a:rPr lang="en-US" sz="1200" dirty="0">
+              <a:rPr lang="en-US" sz="1100" dirty="0">
                 <a:solidFill>
                   <a:srgbClr val="FFFFFF"/>
                 </a:solidFill>
@@ -5728,7 +5579,7 @@
               </a:rPr>
               <a:t>@SIH Idea submission- Template</a:t>
             </a:r>
-            <a:endParaRPr lang="en-US" sz="1200" dirty="0"/>
+            <a:endParaRPr lang="en-US" sz="1100" dirty="0"/>
           </a:p>
         </p:txBody>
       </p:sp>
@@ -5740,8 +5591,8 @@
         </p:nvSpPr>
         <p:spPr>
           <a:xfrm>
-            <a:off x="11277295" y="6437376"/>
-            <a:ext cx="548640" cy="420624"/>
+            <a:off x="11323015" y="6473952"/>
+            <a:ext cx="502920" cy="384048"/>
           </a:xfrm>
           <a:prstGeom prst="rect">
             <a:avLst/>
@@ -5757,7 +5608,7 @@
               <a:buNone/>
             </a:pPr>
             <a:r>
-              <a:rPr lang="en-US" sz="1200" b="1" dirty="0">
+              <a:rPr lang="en-US" sz="1100" b="1" dirty="0">
                 <a:solidFill>
                   <a:srgbClr val="FFFFFF"/>
                 </a:solidFill>
@@ -5767,32 +5618,95 @@
               </a:rPr>
               <a:t>6</a:t>
             </a:r>
-            <a:endParaRPr lang="en-US" sz="1200" dirty="0"/>
-          </a:p>
-        </p:txBody>
-      </p:sp>
-      <p:sp>
-        <p:nvSpPr>
-          <p:cNvPr id="9" name="Shape 6"/>
+            <a:endParaRPr lang="en-US" sz="1100" dirty="0"/>
+          </a:p>
+        </p:txBody>
+      </p:sp>
+      <p:pic>
+        <p:nvPicPr>
+          <p:cNvPr id="9" name="Image 1" descr="deckbuild/fig_venn.png">    </p:cNvPr>
+          <p:cNvPicPr>
+            <a:picLocks noChangeAspect="1"/>
+          </p:cNvPicPr>
+          <p:nvPr/>
+        </p:nvPicPr>
+        <p:blipFill>
+          <a:blip r:embed="rId2"/>
+          <a:stretch>
+            <a:fillRect/>
+          </a:stretch>
+        </p:blipFill>
+        <p:spPr>
+          <a:xfrm>
+            <a:off x="365760" y="877824"/>
+            <a:ext cx="7178040" cy="4170854"/>
+          </a:xfrm>
+          <a:prstGeom prst="rect">
+            <a:avLst/>
+          </a:prstGeom>
+        </p:spPr>
+      </p:pic>
+      <p:sp>
+        <p:nvSpPr>
+          <p:cNvPr id="10" name="Text 6"/>
+          <p:cNvSpPr txBox="1"/>
+          <p:nvPr/>
+        </p:nvSpPr>
+        <p:spPr>
+          <a:xfrm>
+            <a:off x="365760" y="5102352"/>
+            <a:ext cx="7178040" cy="274320"/>
+          </a:xfrm>
+          <a:prstGeom prst="rect">
+            <a:avLst/>
+          </a:prstGeom>
+          <a:noFill/>
+          <a:ln/>
+        </p:spPr>
+        <p:txBody>
+          <a:bodyPr wrap="square" lIns="0" tIns="0" rIns="0" bIns="0" rtlCol="0" anchor="ctr"/>
+          <a:lstStyle/>
+          <a:p>
+            <a:pPr algn="ctr" indent="0" marL="0">
+              <a:buNone/>
+            </a:pPr>
+            <a:r>
+              <a:rPr lang="en-US" sz="1150" b="1" spc="80" kern="0" dirty="0">
+                <a:solidFill>
+                  <a:srgbClr val="2E9E68"/>
+                </a:solidFill>
+                <a:latin typeface="Calibri" pitchFamily="34" charset="0"/>
+                <a:ea typeface="Calibri" pitchFamily="34" charset="-122"/>
+                <a:cs typeface="Calibri" pitchFamily="34" charset="-120"/>
+              </a:rPr>
+              <a:t>WE DID NOT INVENT ADAPTIVE LIDAR — WE FOUND WHERE IT BREAKS</a:t>
+            </a:r>
+            <a:endParaRPr lang="en-US" sz="1150" dirty="0"/>
+          </a:p>
+        </p:txBody>
+      </p:sp>
+      <p:sp>
+        <p:nvSpPr>
+          <p:cNvPr id="11" name="Shape 7"/>
           <p:cNvSpPr/>
           <p:nvPr/>
         </p:nvSpPr>
         <p:spPr>
           <a:xfrm>
-            <a:off x="384048" y="1051560"/>
-            <a:ext cx="5623560" cy="2331720"/>
+            <a:off x="365760" y="5486400"/>
+            <a:ext cx="7178040" cy="731520"/>
           </a:xfrm>
           <a:prstGeom prst="roundRect">
             <a:avLst>
-              <a:gd name="adj" fmla="val 1569"/>
+              <a:gd name="adj" fmla="val 6250"/>
             </a:avLst>
           </a:prstGeom>
           <a:solidFill>
             <a:srgbClr val="F0F5F1"/>
           </a:solidFill>
-          <a:ln w="9525">
+          <a:ln w="12700">
             <a:solidFill>
-              <a:srgbClr val="D2D8D3"/>
+              <a:srgbClr val="2E9E68"/>
             </a:solidFill>
             <a:prstDash val="solid"/>
           </a:ln>
@@ -5800,14 +5714,14 @@
       </p:sp>
       <p:sp>
         <p:nvSpPr>
-          <p:cNvPr id="10" name="Text 7"/>
-          <p:cNvSpPr txBox="1"/>
-          <p:nvPr/>
-        </p:nvSpPr>
-        <p:spPr>
-          <a:xfrm>
-            <a:off x="566928" y="1234440"/>
-            <a:ext cx="5212080" cy="256032"/>
+          <p:cNvPr id="12" name="Text 8"/>
+          <p:cNvSpPr txBox="1"/>
+          <p:nvPr/>
+        </p:nvSpPr>
+        <p:spPr>
+          <a:xfrm>
+            <a:off x="548640" y="5486400"/>
+            <a:ext cx="6812280" cy="731520"/>
           </a:xfrm>
           <a:prstGeom prst="rect">
             <a:avLst/>
@@ -5823,30 +5737,30 @@
               <a:buNone/>
             </a:pPr>
             <a:r>
-              <a:rPr lang="en-US" sz="1100" b="1" spc="120" kern="0" dirty="0">
-                <a:solidFill>
-                  <a:srgbClr val="2E9E68"/>
-                </a:solidFill>
-                <a:latin typeface="Calibri" pitchFamily="34" charset="0"/>
-                <a:ea typeface="Calibri" pitchFamily="34" charset="-122"/>
-                <a:cs typeface="Calibri" pitchFamily="34" charset="-120"/>
-              </a:rPr>
-              <a:t>THE RESEARCH GAP</a:t>
-            </a:r>
-            <a:endParaRPr lang="en-US" sz="1100" dirty="0"/>
-          </a:p>
-        </p:txBody>
-      </p:sp>
-      <p:sp>
-        <p:nvSpPr>
-          <p:cNvPr id="11" name="Text 8"/>
-          <p:cNvSpPr txBox="1"/>
-          <p:nvPr/>
-        </p:nvSpPr>
-        <p:spPr>
-          <a:xfrm>
-            <a:off x="566928" y="1536192"/>
-            <a:ext cx="5230368" cy="1737360"/>
+              <a:rPr lang="en-US" sz="1250" dirty="0">
+                <a:solidFill>
+                  <a:srgbClr val="43504F"/>
+                </a:solidFill>
+                <a:latin typeface="Calibri" pitchFamily="34" charset="0"/>
+                <a:ea typeface="Calibri" pitchFamily="34" charset="-122"/>
+                <a:cs typeface="Calibri" pitchFamily="34" charset="-120"/>
+              </a:rPr>
+              <a:t>Ours: a three-state map · the corrected quadratic floor · a range-normalised gap test</a:t>
+            </a:r>
+            <a:endParaRPr lang="en-US" sz="1250" dirty="0"/>
+          </a:p>
+        </p:txBody>
+      </p:sp>
+      <p:sp>
+        <p:nvSpPr>
+          <p:cNvPr id="13" name="Text 9"/>
+          <p:cNvSpPr txBox="1"/>
+          <p:nvPr/>
+        </p:nvSpPr>
+        <p:spPr>
+          <a:xfrm>
+            <a:off x="7882128" y="877824"/>
+            <a:ext cx="3931920" cy="274320"/>
           </a:xfrm>
           <a:prstGeom prst="rect">
             <a:avLst/>
@@ -5859,121 +5773,249 @@
           <a:lstStyle/>
           <a:p>
             <a:pPr indent="0" marL="0">
-              <a:lnSpc>
-                <a:spcPct val="112000"/>
-              </a:lnSpc>
-              <a:buNone/>
-            </a:pPr>
-            <a:r>
-              <a:rPr lang="en-US" sz="1250" dirty="0">
-                <a:solidFill>
-                  <a:srgbClr val="43504F"/>
-                </a:solidFill>
-                <a:latin typeface="Calibri" pitchFamily="34" charset="0"/>
-                <a:ea typeface="Calibri" pitchFamily="34" charset="-122"/>
-                <a:cs typeface="Calibri" pitchFamily="34" charset="-120"/>
-              </a:rPr>
-              <a:t>Adaptive lidar sampling is established — AEye ships it, NEC Labs published it, and a 2025 paper uses temporal cues. All of it targets urban driving, where negative obstacles are essentially absent.</a:t>
-            </a:r>
-            <a:endParaRPr lang="en-US" sz="1250" dirty="0"/>
-          </a:p>
+              <a:buNone/>
+            </a:pPr>
+            <a:r>
+              <a:rPr lang="en-US" sz="1150" b="1" spc="130" kern="0" dirty="0">
+                <a:solidFill>
+                  <a:srgbClr val="2C8FBF"/>
+                </a:solidFill>
+                <a:latin typeface="Calibri" pitchFamily="34" charset="0"/>
+                <a:ea typeface="Calibri" pitchFamily="34" charset="-122"/>
+                <a:cs typeface="Calibri" pitchFamily="34" charset="-120"/>
+              </a:rPr>
+              <a:t>REFERENCES</a:t>
+            </a:r>
+            <a:endParaRPr lang="en-US" sz="1150" dirty="0"/>
+          </a:p>
+        </p:txBody>
+      </p:sp>
+      <p:sp>
+        <p:nvSpPr>
+          <p:cNvPr id="14" name="Shape 10"/>
+          <p:cNvSpPr/>
+          <p:nvPr/>
+        </p:nvSpPr>
+        <p:spPr>
+          <a:xfrm>
+            <a:off x="7882128" y="1316736"/>
+            <a:ext cx="137160" cy="137160"/>
+          </a:xfrm>
+          <a:prstGeom prst="ellipse">
+            <a:avLst/>
+          </a:prstGeom>
+          <a:solidFill>
+            <a:srgbClr val="2C8FBF"/>
+          </a:solidFill>
+          <a:ln/>
+        </p:spPr>
+      </p:sp>
+      <p:sp>
+        <p:nvSpPr>
+          <p:cNvPr id="15" name="Text 11"/>
+          <p:cNvSpPr txBox="1"/>
+          <p:nvPr/>
+        </p:nvSpPr>
+        <p:spPr>
+          <a:xfrm>
+            <a:off x="8138160" y="1243584"/>
+            <a:ext cx="3657600" cy="274320"/>
+          </a:xfrm>
+          <a:prstGeom prst="rect">
+            <a:avLst/>
+          </a:prstGeom>
+          <a:noFill/>
+          <a:ln/>
+        </p:spPr>
+        <p:txBody>
+          <a:bodyPr wrap="square" lIns="0" tIns="0" rIns="0" bIns="0" rtlCol="0" anchor="ctr"/>
+          <a:lstStyle/>
           <a:p>
             <a:pPr indent="0" marL="0">
-              <a:lnSpc>
-                <a:spcPct val="112000"/>
-              </a:lnSpc>
-              <a:buNone/>
-            </a:pPr>
-            <a:endParaRPr lang="en-US" sz="1250" dirty="0"/>
-          </a:p>
+              <a:buNone/>
+            </a:pPr>
+            <a:r>
+              <a:rPr lang="en-US" sz="1200" b="1" dirty="0">
+                <a:solidFill>
+                  <a:srgbClr val="14181A"/>
+                </a:solidFill>
+                <a:latin typeface="Calibri" pitchFamily="34" charset="0"/>
+                <a:ea typeface="Calibri" pitchFamily="34" charset="-122"/>
+                <a:cs typeface="Calibri" pitchFamily="34" charset="-120"/>
+              </a:rPr>
+              <a:t>RELLIS-3D</a:t>
+            </a:r>
+            <a:endParaRPr lang="en-US" sz="1200" dirty="0"/>
+          </a:p>
+        </p:txBody>
+      </p:sp>
+      <p:sp>
+        <p:nvSpPr>
+          <p:cNvPr id="16" name="Text 12"/>
+          <p:cNvSpPr txBox="1"/>
+          <p:nvPr/>
+        </p:nvSpPr>
+        <p:spPr>
+          <a:xfrm>
+            <a:off x="8138160" y="1499616"/>
+            <a:ext cx="3657600" cy="402336"/>
+          </a:xfrm>
+          <a:prstGeom prst="rect">
+            <a:avLst/>
+          </a:prstGeom>
+          <a:noFill/>
+          <a:ln/>
+        </p:spPr>
+        <p:txBody>
+          <a:bodyPr wrap="square" lIns="0" tIns="0" rIns="0" bIns="0" rtlCol="0" anchor="ctr"/>
+          <a:lstStyle/>
           <a:p>
             <a:pPr indent="0" marL="0">
-              <a:lnSpc>
-                <a:spcPct val="112000"/>
-              </a:lnSpc>
-              <a:buNone/>
-            </a:pPr>
-            <a:r>
-              <a:rPr lang="en-US" sz="1250" dirty="0">
-                <a:solidFill>
-                  <a:srgbClr val="43504F"/>
-                </a:solidFill>
-                <a:latin typeface="Calibri" pitchFamily="34" charset="0"/>
-                <a:ea typeface="Calibri" pitchFamily="34" charset="-122"/>
-                <a:cs typeface="Calibri" pitchFamily="34" charset="-120"/>
-              </a:rPr>
-              <a:t>The negative-obstacle literature is equally established — and all of it assumes dense, uniform scanning.</a:t>
-            </a:r>
-            <a:endParaRPr lang="en-US" sz="1250" dirty="0"/>
-          </a:p>
+              <a:buNone/>
+            </a:pPr>
+            <a:r>
+              <a:rPr lang="en-US" sz="1050" dirty="0">
+                <a:solidFill>
+                  <a:srgbClr val="6E7B79"/>
+                </a:solidFill>
+                <a:latin typeface="Calibri" pitchFamily="34" charset="0"/>
+                <a:ea typeface="Calibri" pitchFamily="34" charset="-122"/>
+                <a:cs typeface="Calibri" pitchFamily="34" charset="-120"/>
+              </a:rPr>
+              <a:t>ICRA 2021 · off-road, Ouster OS1-64</a:t>
+            </a:r>
+            <a:endParaRPr lang="en-US" sz="1050" dirty="0"/>
+          </a:p>
+        </p:txBody>
+      </p:sp>
+      <p:sp>
+        <p:nvSpPr>
+          <p:cNvPr id="17" name="Shape 13"/>
+          <p:cNvSpPr/>
+          <p:nvPr/>
+        </p:nvSpPr>
+        <p:spPr>
+          <a:xfrm>
+            <a:off x="7882128" y="2103120"/>
+            <a:ext cx="137160" cy="137160"/>
+          </a:xfrm>
+          <a:prstGeom prst="ellipse">
+            <a:avLst/>
+          </a:prstGeom>
+          <a:solidFill>
+            <a:srgbClr val="2C8FBF"/>
+          </a:solidFill>
+          <a:ln/>
+        </p:spPr>
+      </p:sp>
+      <p:sp>
+        <p:nvSpPr>
+          <p:cNvPr id="18" name="Text 14"/>
+          <p:cNvSpPr txBox="1"/>
+          <p:nvPr/>
+        </p:nvSpPr>
+        <p:spPr>
+          <a:xfrm>
+            <a:off x="8138160" y="2029968"/>
+            <a:ext cx="3657600" cy="274320"/>
+          </a:xfrm>
+          <a:prstGeom prst="rect">
+            <a:avLst/>
+          </a:prstGeom>
+          <a:noFill/>
+          <a:ln/>
+        </p:spPr>
+        <p:txBody>
+          <a:bodyPr wrap="square" lIns="0" tIns="0" rIns="0" bIns="0" rtlCol="0" anchor="ctr"/>
+          <a:lstStyle/>
           <a:p>
             <a:pPr indent="0" marL="0">
-              <a:lnSpc>
-                <a:spcPct val="112000"/>
-              </a:lnSpc>
-              <a:buNone/>
-            </a:pPr>
-            <a:endParaRPr lang="en-US" sz="1250" dirty="0"/>
-          </a:p>
+              <a:buNone/>
+            </a:pPr>
+            <a:r>
+              <a:rPr lang="en-US" sz="1200" b="1" dirty="0">
+                <a:solidFill>
+                  <a:srgbClr val="14181A"/>
+                </a:solidFill>
+                <a:latin typeface="Calibri" pitchFamily="34" charset="0"/>
+                <a:ea typeface="Calibri" pitchFamily="34" charset="-122"/>
+                <a:cs typeface="Calibri" pitchFamily="34" charset="-120"/>
+              </a:rPr>
+              <a:t>NEC Labs</a:t>
+            </a:r>
+            <a:endParaRPr lang="en-US" sz="1200" dirty="0"/>
+          </a:p>
+        </p:txBody>
+      </p:sp>
+      <p:sp>
+        <p:nvSpPr>
+          <p:cNvPr id="19" name="Text 15"/>
+          <p:cNvSpPr txBox="1"/>
+          <p:nvPr/>
+        </p:nvSpPr>
+        <p:spPr>
+          <a:xfrm>
+            <a:off x="8138160" y="2286000"/>
+            <a:ext cx="3657600" cy="402336"/>
+          </a:xfrm>
+          <a:prstGeom prst="rect">
+            <a:avLst/>
+          </a:prstGeom>
+          <a:noFill/>
+          <a:ln/>
+        </p:spPr>
+        <p:txBody>
+          <a:bodyPr wrap="square" lIns="0" tIns="0" rIns="0" bIns="0" rtlCol="0" anchor="ctr"/>
+          <a:lstStyle/>
           <a:p>
             <a:pPr indent="0" marL="0">
-              <a:lnSpc>
-                <a:spcPct val="112000"/>
-              </a:lnSpc>
-              <a:buNone/>
-            </a:pPr>
-            <a:r>
-              <a:rPr lang="en-US" sz="1250" dirty="0">
-                <a:solidFill>
-                  <a:srgbClr val="43504F"/>
-                </a:solidFill>
-                <a:latin typeface="Calibri" pitchFamily="34" charset="0"/>
-                <a:ea typeface="Calibri" pitchFamily="34" charset="-122"/>
-                <a:cs typeface="Calibri" pitchFamily="34" charset="-120"/>
-              </a:rPr>
-              <a:t>Those two fields have never been put in the same room.</a:t>
-            </a:r>
-            <a:endParaRPr lang="en-US" sz="1250" dirty="0"/>
-          </a:p>
-        </p:txBody>
-      </p:sp>
-      <p:sp>
-        <p:nvSpPr>
-          <p:cNvPr id="12" name="Shape 9"/>
+              <a:buNone/>
+            </a:pPr>
+            <a:r>
+              <a:rPr lang="en-US" sz="1050" dirty="0">
+                <a:solidFill>
+                  <a:srgbClr val="6E7B79"/>
+                </a:solidFill>
+                <a:latin typeface="Calibri" pitchFamily="34" charset="0"/>
+                <a:ea typeface="Calibri" pitchFamily="34" charset="-122"/>
+                <a:cs typeface="Calibri" pitchFamily="34" charset="-120"/>
+              </a:rPr>
+              <a:t>MEMS foveating lidar — Pittaluga et al.</a:t>
+            </a:r>
+            <a:endParaRPr lang="en-US" sz="1050" dirty="0"/>
+          </a:p>
+        </p:txBody>
+      </p:sp>
+      <p:sp>
+        <p:nvSpPr>
+          <p:cNvPr id="20" name="Shape 16"/>
           <p:cNvSpPr/>
           <p:nvPr/>
         </p:nvSpPr>
         <p:spPr>
           <a:xfrm>
-            <a:off x="384048" y="3547872"/>
-            <a:ext cx="5623560" cy="2651760"/>
-          </a:xfrm>
-          <a:prstGeom prst="roundRect">
-            <a:avLst>
-              <a:gd name="adj" fmla="val 1379"/>
-            </a:avLst>
-          </a:prstGeom>
-          <a:solidFill>
-            <a:srgbClr val="FDF1EA"/>
-          </a:solidFill>
-          <a:ln w="9525">
-            <a:solidFill>
-              <a:srgbClr val="D2D8D3"/>
-            </a:solidFill>
-            <a:prstDash val="solid"/>
-          </a:ln>
-        </p:spPr>
-      </p:sp>
-      <p:sp>
-        <p:nvSpPr>
-          <p:cNvPr id="13" name="Text 10"/>
-          <p:cNvSpPr txBox="1"/>
-          <p:nvPr/>
-        </p:nvSpPr>
-        <p:spPr>
-          <a:xfrm>
-            <a:off x="566928" y="3730752"/>
-            <a:ext cx="5212080" cy="256032"/>
+            <a:off x="7882128" y="2889504"/>
+            <a:ext cx="137160" cy="137160"/>
+          </a:xfrm>
+          <a:prstGeom prst="ellipse">
+            <a:avLst/>
+          </a:prstGeom>
+          <a:solidFill>
+            <a:srgbClr val="2C8FBF"/>
+          </a:solidFill>
+          <a:ln/>
+        </p:spPr>
+      </p:sp>
+      <p:sp>
+        <p:nvSpPr>
+          <p:cNvPr id="21" name="Text 17"/>
+          <p:cNvSpPr txBox="1"/>
+          <p:nvPr/>
+        </p:nvSpPr>
+        <p:spPr>
+          <a:xfrm>
+            <a:off x="8138160" y="2816352"/>
+            <a:ext cx="3657600" cy="274320"/>
           </a:xfrm>
           <a:prstGeom prst="rect">
             <a:avLst/>
@@ -5989,30 +6031,30 @@
               <a:buNone/>
             </a:pPr>
             <a:r>
-              <a:rPr lang="en-US" sz="1100" b="1" spc="120" kern="0" dirty="0">
-                <a:solidFill>
-                  <a:srgbClr val="D2622A"/>
-                </a:solidFill>
-                <a:latin typeface="Calibri" pitchFamily="34" charset="0"/>
-                <a:ea typeface="Calibri" pitchFamily="34" charset="-122"/>
-                <a:cs typeface="Calibri" pitchFamily="34" charset="-120"/>
-              </a:rPr>
-              <a:t>WHAT IS OURS</a:t>
-            </a:r>
-            <a:endParaRPr lang="en-US" sz="1100" dirty="0"/>
-          </a:p>
-        </p:txBody>
-      </p:sp>
-      <p:sp>
-        <p:nvSpPr>
-          <p:cNvPr id="14" name="Text 11"/>
-          <p:cNvSpPr txBox="1"/>
-          <p:nvPr/>
-        </p:nvSpPr>
-        <p:spPr>
-          <a:xfrm>
-            <a:off x="566928" y="4041648"/>
-            <a:ext cx="5230368" cy="2057400"/>
+              <a:rPr lang="en-US" sz="1200" b="1" dirty="0">
+                <a:solidFill>
+                  <a:srgbClr val="14181A"/>
+                </a:solidFill>
+                <a:latin typeface="Calibri" pitchFamily="34" charset="0"/>
+                <a:ea typeface="Calibri" pitchFamily="34" charset="-122"/>
+                <a:cs typeface="Calibri" pitchFamily="34" charset="-120"/>
+              </a:rPr>
+              <a:t>Adaptive LiDAR Scanning</a:t>
+            </a:r>
+            <a:endParaRPr lang="en-US" sz="1200" dirty="0"/>
+          </a:p>
+        </p:txBody>
+      </p:sp>
+      <p:sp>
+        <p:nvSpPr>
+          <p:cNvPr id="22" name="Text 18"/>
+          <p:cNvSpPr txBox="1"/>
+          <p:nvPr/>
+        </p:nvSpPr>
+        <p:spPr>
+          <a:xfrm>
+            <a:off x="8138160" y="3072384"/>
+            <a:ext cx="3657600" cy="402336"/>
           </a:xfrm>
           <a:prstGeom prst="rect">
             <a:avLst/>
@@ -6025,220 +6067,304 @@
           <a:lstStyle/>
           <a:p>
             <a:pPr indent="0" marL="0">
-              <a:lnSpc>
-                <a:spcPct val="112000"/>
-              </a:lnSpc>
-              <a:buNone/>
-            </a:pPr>
-            <a:r>
-              <a:rPr lang="en-US" sz="1200" dirty="0">
-                <a:solidFill>
-                  <a:srgbClr val="43504F"/>
-                </a:solidFill>
-                <a:latin typeface="Calibri" pitchFamily="34" charset="0"/>
-                <a:ea typeface="Calibri" pitchFamily="34" charset="-122"/>
-                <a:cs typeface="Calibri" pitchFamily="34" charset="-120"/>
-              </a:rPr>
-              <a:t>1.   Adaptive sampling creates exactly the absences that hide a ditch — measured, not asserted.</a:t>
+              <a:buNone/>
+            </a:pPr>
+            <a:r>
+              <a:rPr lang="en-US" sz="1050" dirty="0">
+                <a:solidFill>
+                  <a:srgbClr val="6E7B79"/>
+                </a:solidFill>
+                <a:latin typeface="Calibri" pitchFamily="34" charset="0"/>
+                <a:ea typeface="Calibri" pitchFamily="34" charset="-122"/>
+                <a:cs typeface="Calibri" pitchFamily="34" charset="-120"/>
+              </a:rPr>
+              <a:t>temporal cues, 2025</a:t>
+            </a:r>
+            <a:endParaRPr lang="en-US" sz="1050" dirty="0"/>
+          </a:p>
+        </p:txBody>
+      </p:sp>
+      <p:sp>
+        <p:nvSpPr>
+          <p:cNvPr id="23" name="Shape 19"/>
+          <p:cNvSpPr/>
+          <p:nvPr/>
+        </p:nvSpPr>
+        <p:spPr>
+          <a:xfrm>
+            <a:off x="7882128" y="3675888"/>
+            <a:ext cx="137160" cy="137160"/>
+          </a:xfrm>
+          <a:prstGeom prst="ellipse">
+            <a:avLst/>
+          </a:prstGeom>
+          <a:solidFill>
+            <a:srgbClr val="2C8FBF"/>
+          </a:solidFill>
+          <a:ln/>
+        </p:spPr>
+      </p:sp>
+      <p:sp>
+        <p:nvSpPr>
+          <p:cNvPr id="24" name="Text 20"/>
+          <p:cNvSpPr txBox="1"/>
+          <p:nvPr/>
+        </p:nvSpPr>
+        <p:spPr>
+          <a:xfrm>
+            <a:off x="8138160" y="3602736"/>
+            <a:ext cx="3657600" cy="274320"/>
+          </a:xfrm>
+          <a:prstGeom prst="rect">
+            <a:avLst/>
+          </a:prstGeom>
+          <a:noFill/>
+          <a:ln/>
+        </p:spPr>
+        <p:txBody>
+          <a:bodyPr wrap="square" lIns="0" tIns="0" rIns="0" bIns="0" rtlCol="0" anchor="ctr"/>
+          <a:lstStyle/>
+          <a:p>
+            <a:pPr indent="0" marL="0">
+              <a:buNone/>
+            </a:pPr>
+            <a:r>
+              <a:rPr lang="en-US" sz="1200" b="1" dirty="0">
+                <a:solidFill>
+                  <a:srgbClr val="14181A"/>
+                </a:solidFill>
+                <a:latin typeface="Calibri" pitchFamily="34" charset="0"/>
+                <a:ea typeface="Calibri" pitchFamily="34" charset="-122"/>
+                <a:cs typeface="Calibri" pitchFamily="34" charset="-120"/>
+              </a:rPr>
+              <a:t>AEye iDAR / 4Sight</a:t>
             </a:r>
             <a:endParaRPr lang="en-US" sz="1200" dirty="0"/>
           </a:p>
+        </p:txBody>
+      </p:sp>
+      <p:sp>
+        <p:nvSpPr>
+          <p:cNvPr id="25" name="Text 21"/>
+          <p:cNvSpPr txBox="1"/>
+          <p:nvPr/>
+        </p:nvSpPr>
+        <p:spPr>
+          <a:xfrm>
+            <a:off x="8138160" y="3858768"/>
+            <a:ext cx="3657600" cy="402336"/>
+          </a:xfrm>
+          <a:prstGeom prst="rect">
+            <a:avLst/>
+          </a:prstGeom>
+          <a:noFill/>
+          <a:ln/>
+        </p:spPr>
+        <p:txBody>
+          <a:bodyPr wrap="square" lIns="0" tIns="0" rIns="0" bIns="0" rtlCol="0" anchor="ctr"/>
+          <a:lstStyle/>
           <a:p>
             <a:pPr indent="0" marL="0">
-              <a:lnSpc>
-                <a:spcPct val="112000"/>
-              </a:lnSpc>
-              <a:buNone/>
-            </a:pPr>
+              <a:buNone/>
+            </a:pPr>
+            <a:r>
+              <a:rPr lang="en-US" sz="1050" dirty="0">
+                <a:solidFill>
+                  <a:srgbClr val="6E7B79"/>
+                </a:solidFill>
+                <a:latin typeface="Calibri" pitchFamily="34" charset="0"/>
+                <a:ea typeface="Calibri" pitchFamily="34" charset="-122"/>
+                <a:cs typeface="Calibri" pitchFamily="34" charset="-120"/>
+              </a:rPr>
+              <a:t>US 11675053 · 11782136 · 11860313</a:t>
+            </a:r>
+            <a:endParaRPr lang="en-US" sz="1050" dirty="0"/>
+          </a:p>
+        </p:txBody>
+      </p:sp>
+      <p:sp>
+        <p:nvSpPr>
+          <p:cNvPr id="26" name="Shape 22"/>
+          <p:cNvSpPr/>
+          <p:nvPr/>
+        </p:nvSpPr>
+        <p:spPr>
+          <a:xfrm>
+            <a:off x="7882128" y="4462272"/>
+            <a:ext cx="137160" cy="137160"/>
+          </a:xfrm>
+          <a:prstGeom prst="ellipse">
+            <a:avLst/>
+          </a:prstGeom>
+          <a:solidFill>
+            <a:srgbClr val="2C8FBF"/>
+          </a:solidFill>
+          <a:ln/>
+        </p:spPr>
+      </p:sp>
+      <p:sp>
+        <p:nvSpPr>
+          <p:cNvPr id="27" name="Text 23"/>
+          <p:cNvSpPr txBox="1"/>
+          <p:nvPr/>
+        </p:nvSpPr>
+        <p:spPr>
+          <a:xfrm>
+            <a:off x="8138160" y="4389120"/>
+            <a:ext cx="3657600" cy="274320"/>
+          </a:xfrm>
+          <a:prstGeom prst="rect">
+            <a:avLst/>
+          </a:prstGeom>
+          <a:noFill/>
+          <a:ln/>
+        </p:spPr>
+        <p:txBody>
+          <a:bodyPr wrap="square" lIns="0" tIns="0" rIns="0" bIns="0" rtlCol="0" anchor="ctr"/>
+          <a:lstStyle/>
+          <a:p>
+            <a:pPr indent="0" marL="0">
+              <a:buNone/>
+            </a:pPr>
+            <a:r>
+              <a:rPr lang="en-US" sz="1200" b="1" dirty="0">
+                <a:solidFill>
+                  <a:srgbClr val="14181A"/>
+                </a:solidFill>
+                <a:latin typeface="Calibri" pitchFamily="34" charset="0"/>
+                <a:ea typeface="Calibri" pitchFamily="34" charset="-122"/>
+                <a:cs typeface="Calibri" pitchFamily="34" charset="-120"/>
+              </a:rPr>
+              <a:t>Larson &amp; Trivedi</a:t>
+            </a:r>
             <a:endParaRPr lang="en-US" sz="1200" dirty="0"/>
           </a:p>
+        </p:txBody>
+      </p:sp>
+      <p:sp>
+        <p:nvSpPr>
+          <p:cNvPr id="28" name="Text 24"/>
+          <p:cNvSpPr txBox="1"/>
+          <p:nvPr/>
+        </p:nvSpPr>
+        <p:spPr>
+          <a:xfrm>
+            <a:off x="8138160" y="4645152"/>
+            <a:ext cx="3657600" cy="402336"/>
+          </a:xfrm>
+          <a:prstGeom prst="rect">
+            <a:avLst/>
+          </a:prstGeom>
+          <a:noFill/>
+          <a:ln/>
+        </p:spPr>
+        <p:txBody>
+          <a:bodyPr wrap="square" lIns="0" tIns="0" rIns="0" bIns="0" rtlCol="0" anchor="ctr"/>
+          <a:lstStyle/>
           <a:p>
             <a:pPr indent="0" marL="0">
-              <a:lnSpc>
-                <a:spcPct val="112000"/>
-              </a:lnSpc>
-              <a:buNone/>
-            </a:pPr>
-            <a:r>
-              <a:rPr lang="en-US" sz="1200" dirty="0">
-                <a:solidFill>
-                  <a:srgbClr val="43504F"/>
-                </a:solidFill>
-                <a:latin typeface="Calibri" pitchFamily="34" charset="0"/>
-                <a:ea typeface="Calibri" pitchFamily="34" charset="-122"/>
-                <a:cs typeface="Calibri" pitchFamily="34" charset="-120"/>
-              </a:rPr>
-              <a:t>2.   A three-state map (OBSERVED / UNKNOWN / CANDIDATE_NEGATIVE) that never turns "I did not look there" into "safe to drive".</a:t>
+              <a:buNone/>
+            </a:pPr>
+            <a:r>
+              <a:rPr lang="en-US" sz="1050" dirty="0">
+                <a:solidFill>
+                  <a:srgbClr val="6E7B79"/>
+                </a:solidFill>
+                <a:latin typeface="Calibri" pitchFamily="34" charset="0"/>
+                <a:ea typeface="Calibri" pitchFamily="34" charset="-122"/>
+                <a:cs typeface="Calibri" pitchFamily="34" charset="-120"/>
+              </a:rPr>
+              <a:t>DTIC ADA561293 — negative obstacles</a:t>
+            </a:r>
+            <a:endParaRPr lang="en-US" sz="1050" dirty="0"/>
+          </a:p>
+        </p:txBody>
+      </p:sp>
+      <p:sp>
+        <p:nvSpPr>
+          <p:cNvPr id="29" name="Shape 25"/>
+          <p:cNvSpPr/>
+          <p:nvPr/>
+        </p:nvSpPr>
+        <p:spPr>
+          <a:xfrm>
+            <a:off x="7882128" y="5248656"/>
+            <a:ext cx="137160" cy="137160"/>
+          </a:xfrm>
+          <a:prstGeom prst="ellipse">
+            <a:avLst/>
+          </a:prstGeom>
+          <a:solidFill>
+            <a:srgbClr val="2C8FBF"/>
+          </a:solidFill>
+          <a:ln/>
+        </p:spPr>
+      </p:sp>
+      <p:sp>
+        <p:nvSpPr>
+          <p:cNvPr id="30" name="Text 26"/>
+          <p:cNvSpPr txBox="1"/>
+          <p:nvPr/>
+        </p:nvSpPr>
+        <p:spPr>
+          <a:xfrm>
+            <a:off x="8138160" y="5175504"/>
+            <a:ext cx="3657600" cy="274320"/>
+          </a:xfrm>
+          <a:prstGeom prst="rect">
+            <a:avLst/>
+          </a:prstGeom>
+          <a:noFill/>
+          <a:ln/>
+        </p:spPr>
+        <p:txBody>
+          <a:bodyPr wrap="square" lIns="0" tIns="0" rIns="0" bIns="0" rtlCol="0" anchor="ctr"/>
+          <a:lstStyle/>
+          <a:p>
+            <a:pPr indent="0" marL="0">
+              <a:buNone/>
+            </a:pPr>
+            <a:r>
+              <a:rPr lang="en-US" sz="1200" b="1" dirty="0">
+                <a:solidFill>
+                  <a:srgbClr val="14181A"/>
+                </a:solidFill>
+                <a:latin typeface="Calibri" pitchFamily="34" charset="0"/>
+                <a:ea typeface="Calibri" pitchFamily="34" charset="-122"/>
+                <a:cs typeface="Calibri" pitchFamily="34" charset="-120"/>
+              </a:rPr>
+              <a:t>IEEE ROBIO 2024</a:t>
             </a:r>
             <a:endParaRPr lang="en-US" sz="1200" dirty="0"/>
           </a:p>
+        </p:txBody>
+      </p:sp>
+      <p:sp>
+        <p:nvSpPr>
+          <p:cNvPr id="31" name="Text 27"/>
+          <p:cNvSpPr txBox="1"/>
+          <p:nvPr/>
+        </p:nvSpPr>
+        <p:spPr>
+          <a:xfrm>
+            <a:off x="8138160" y="5431536"/>
+            <a:ext cx="3657600" cy="402336"/>
+          </a:xfrm>
+          <a:prstGeom prst="rect">
+            <a:avLst/>
+          </a:prstGeom>
+          <a:noFill/>
+          <a:ln/>
+        </p:spPr>
+        <p:txBody>
+          <a:bodyPr wrap="square" lIns="0" tIns="0" rIns="0" bIns="0" rtlCol="0" anchor="ctr"/>
+          <a:lstStyle/>
           <a:p>
             <a:pPr indent="0" marL="0">
-              <a:lnSpc>
-                <a:spcPct val="112000"/>
-              </a:lnSpc>
-              <a:buNone/>
-            </a:pPr>
-            <a:endParaRPr lang="en-US" sz="1200" dirty="0"/>
-          </a:p>
-          <a:p>
-            <a:pPr indent="0" marL="0">
-              <a:lnSpc>
-                <a:spcPct val="112000"/>
-              </a:lnSpc>
-              <a:buNone/>
-            </a:pPr>
-            <a:r>
-              <a:rPr lang="en-US" sz="1200" dirty="0">
-                <a:solidFill>
-                  <a:srgbClr val="43504F"/>
-                </a:solidFill>
-                <a:latin typeface="Calibri" pitchFamily="34" charset="0"/>
-                <a:ea typeface="Calibri" pitchFamily="34" charset="-122"/>
-                <a:cs typeface="Calibri" pitchFamily="34" charset="-120"/>
-              </a:rPr>
-              <a:t>3.   A corrected safety floor, Δθ ≤ w·h/r², showing ditches bind quadratically where bumps bind linearly.</a:t>
-            </a:r>
-            <a:endParaRPr lang="en-US" sz="1200" dirty="0"/>
-          </a:p>
-          <a:p>
-            <a:pPr indent="0" marL="0">
-              <a:lnSpc>
-                <a:spcPct val="112000"/>
-              </a:lnSpc>
-              <a:buNone/>
-            </a:pPr>
-            <a:endParaRPr lang="en-US" sz="1200" dirty="0"/>
-          </a:p>
-          <a:p>
-            <a:pPr indent="0" marL="0">
-              <a:lnSpc>
-                <a:spcPct val="112000"/>
-              </a:lnSpc>
-              <a:buNone/>
-            </a:pPr>
-            <a:r>
-              <a:rPr lang="en-US" sz="1200" dirty="0">
-                <a:solidFill>
-                  <a:srgbClr val="43504F"/>
-                </a:solidFill>
-                <a:latin typeface="Calibri" pitchFamily="34" charset="0"/>
-                <a:ea typeface="Calibri" pitchFamily="34" charset="-122"/>
-                <a:cs typeface="Calibri" pitchFamily="34" charset="-120"/>
-              </a:rPr>
-              <a:t>4.   A range-normalised gap test: 91% detection at a twentieth of the budget.</a:t>
-            </a:r>
-            <a:endParaRPr lang="en-US" sz="1200" dirty="0"/>
-          </a:p>
-        </p:txBody>
-      </p:sp>
-      <p:sp>
-        <p:nvSpPr>
-          <p:cNvPr id="15" name="Text 12"/>
-          <p:cNvSpPr txBox="1"/>
-          <p:nvPr/>
-        </p:nvSpPr>
-        <p:spPr>
-          <a:xfrm>
-            <a:off x="6263640" y="1051560"/>
-            <a:ext cx="5577840" cy="256032"/>
-          </a:xfrm>
-          <a:prstGeom prst="rect">
-            <a:avLst/>
-          </a:prstGeom>
-          <a:noFill/>
-          <a:ln/>
-        </p:spPr>
-        <p:txBody>
-          <a:bodyPr wrap="square" lIns="0" tIns="0" rIns="0" bIns="0" rtlCol="0" anchor="ctr"/>
-          <a:lstStyle/>
-          <a:p>
-            <a:pPr indent="0" marL="0">
-              <a:buNone/>
-            </a:pPr>
-            <a:r>
-              <a:rPr lang="en-US" sz="1100" b="1" spc="120" kern="0" dirty="0">
-                <a:solidFill>
-                  <a:srgbClr val="2C8FBF"/>
-                </a:solidFill>
-                <a:latin typeface="Calibri" pitchFamily="34" charset="0"/>
-                <a:ea typeface="Calibri" pitchFamily="34" charset="-122"/>
-                <a:cs typeface="Calibri" pitchFamily="34" charset="-120"/>
-              </a:rPr>
-              <a:t>REFERENCES</a:t>
-            </a:r>
-            <a:endParaRPr lang="en-US" sz="1100" dirty="0"/>
-          </a:p>
-        </p:txBody>
-      </p:sp>
-      <p:sp>
-        <p:nvSpPr>
-          <p:cNvPr id="16" name="Text 13"/>
-          <p:cNvSpPr txBox="1"/>
-          <p:nvPr/>
-        </p:nvSpPr>
-        <p:spPr>
-          <a:xfrm>
-            <a:off x="6263640" y="1371600"/>
-            <a:ext cx="5577840" cy="256032"/>
-          </a:xfrm>
-          <a:prstGeom prst="rect">
-            <a:avLst/>
-          </a:prstGeom>
-          <a:noFill/>
-          <a:ln/>
-        </p:spPr>
-        <p:txBody>
-          <a:bodyPr wrap="square" lIns="0" tIns="0" rIns="0" bIns="0" rtlCol="0" anchor="ctr"/>
-          <a:lstStyle/>
-          <a:p>
-            <a:pPr indent="0" marL="0">
-              <a:buNone/>
-            </a:pPr>
-            <a:r>
-              <a:rPr lang="en-US" sz="1250" b="1" dirty="0">
-                <a:solidFill>
-                  <a:srgbClr val="14181A"/>
-                </a:solidFill>
-                <a:latin typeface="Calibri" pitchFamily="34" charset="0"/>
-                <a:ea typeface="Calibri" pitchFamily="34" charset="-122"/>
-                <a:cs typeface="Calibri" pitchFamily="34" charset="-120"/>
-              </a:rPr>
-              <a:t>RELLIS-3D</a:t>
-            </a:r>
-            <a:endParaRPr lang="en-US" sz="1250" dirty="0"/>
-          </a:p>
-        </p:txBody>
-      </p:sp>
-      <p:sp>
-        <p:nvSpPr>
-          <p:cNvPr id="17" name="Text 14"/>
-          <p:cNvSpPr txBox="1"/>
-          <p:nvPr/>
-        </p:nvSpPr>
-        <p:spPr>
-          <a:xfrm>
-            <a:off x="6263640" y="1618488"/>
-            <a:ext cx="5577840" cy="457200"/>
-          </a:xfrm>
-          <a:prstGeom prst="rect">
-            <a:avLst/>
-          </a:prstGeom>
-          <a:noFill/>
-          <a:ln/>
-        </p:spPr>
-        <p:txBody>
-          <a:bodyPr wrap="square" lIns="0" tIns="0" rIns="0" bIns="0" rtlCol="0" anchor="ctr"/>
-          <a:lstStyle/>
-          <a:p>
-            <a:pPr indent="0" marL="0">
-              <a:lnSpc>
-                <a:spcPct val="105000"/>
-              </a:lnSpc>
-              <a:buNone/>
-            </a:pPr>
-            <a:r>
-              <a:rPr lang="en-US" sz="1100" dirty="0">
+              <a:buNone/>
+            </a:pPr>
+            <a:r>
+              <a:rPr lang="en-US" sz="1050" dirty="0">
                 <a:solidFill>
                   <a:srgbClr val="6E7B79"/>
                 </a:solidFill>
@@ -6246,414 +6372,9 @@
                 <a:ea typeface="Calibri" pitchFamily="34" charset="-122"/>
                 <a:cs typeface="Calibri" pitchFamily="34" charset="-120"/>
               </a:rPr>
-              <a:t>Off-road multimodal dataset, Ouster OS1-64, ICRA 2021 · github.com/unmannedlab/RELLIS-3D</a:t>
-            </a:r>
-            <a:endParaRPr lang="en-US" sz="1100" dirty="0"/>
-          </a:p>
-        </p:txBody>
-      </p:sp>
-      <p:sp>
-        <p:nvSpPr>
-          <p:cNvPr id="18" name="Text 15"/>
-          <p:cNvSpPr txBox="1"/>
-          <p:nvPr/>
-        </p:nvSpPr>
-        <p:spPr>
-          <a:xfrm>
-            <a:off x="6263640" y="2157984"/>
-            <a:ext cx="5577840" cy="256032"/>
-          </a:xfrm>
-          <a:prstGeom prst="rect">
-            <a:avLst/>
-          </a:prstGeom>
-          <a:noFill/>
-          <a:ln/>
-        </p:spPr>
-        <p:txBody>
-          <a:bodyPr wrap="square" lIns="0" tIns="0" rIns="0" bIns="0" rtlCol="0" anchor="ctr"/>
-          <a:lstStyle/>
-          <a:p>
-            <a:pPr indent="0" marL="0">
-              <a:buNone/>
-            </a:pPr>
-            <a:r>
-              <a:rPr lang="en-US" sz="1250" b="1" dirty="0">
-                <a:solidFill>
-                  <a:srgbClr val="14181A"/>
-                </a:solidFill>
-                <a:latin typeface="Calibri" pitchFamily="34" charset="0"/>
-                <a:ea typeface="Calibri" pitchFamily="34" charset="-122"/>
-                <a:cs typeface="Calibri" pitchFamily="34" charset="-120"/>
-              </a:rPr>
-              <a:t>NEC Labs</a:t>
-            </a:r>
-            <a:endParaRPr lang="en-US" sz="1250" dirty="0"/>
-          </a:p>
-        </p:txBody>
-      </p:sp>
-      <p:sp>
-        <p:nvSpPr>
-          <p:cNvPr id="19" name="Text 16"/>
-          <p:cNvSpPr txBox="1"/>
-          <p:nvPr/>
-        </p:nvSpPr>
-        <p:spPr>
-          <a:xfrm>
-            <a:off x="6263640" y="2404872"/>
-            <a:ext cx="5577840" cy="457200"/>
-          </a:xfrm>
-          <a:prstGeom prst="rect">
-            <a:avLst/>
-          </a:prstGeom>
-          <a:noFill/>
-          <a:ln/>
-        </p:spPr>
-        <p:txBody>
-          <a:bodyPr wrap="square" lIns="0" tIns="0" rIns="0" bIns="0" rtlCol="0" anchor="ctr"/>
-          <a:lstStyle/>
-          <a:p>
-            <a:pPr indent="0" marL="0">
-              <a:lnSpc>
-                <a:spcPct val="105000"/>
-              </a:lnSpc>
-              <a:buNone/>
-            </a:pPr>
-            <a:r>
-              <a:rPr lang="en-US" sz="1100" dirty="0">
-                <a:solidFill>
-                  <a:srgbClr val="6E7B79"/>
-                </a:solidFill>
-                <a:latin typeface="Calibri" pitchFamily="34" charset="0"/>
-                <a:ea typeface="Calibri" pitchFamily="34" charset="-122"/>
-                <a:cs typeface="Calibri" pitchFamily="34" charset="-120"/>
-              </a:rPr>
-              <a:t>Pittaluga et al. — A MEMS-based foveating lidar for real-time adaptive depth sensing</a:t>
-            </a:r>
-            <a:endParaRPr lang="en-US" sz="1100" dirty="0"/>
-          </a:p>
-        </p:txBody>
-      </p:sp>
-      <p:sp>
-        <p:nvSpPr>
-          <p:cNvPr id="20" name="Text 17"/>
-          <p:cNvSpPr txBox="1"/>
-          <p:nvPr/>
-        </p:nvSpPr>
-        <p:spPr>
-          <a:xfrm>
-            <a:off x="6263640" y="2944368"/>
-            <a:ext cx="5577840" cy="256032"/>
-          </a:xfrm>
-          <a:prstGeom prst="rect">
-            <a:avLst/>
-          </a:prstGeom>
-          <a:noFill/>
-          <a:ln/>
-        </p:spPr>
-        <p:txBody>
-          <a:bodyPr wrap="square" lIns="0" tIns="0" rIns="0" bIns="0" rtlCol="0" anchor="ctr"/>
-          <a:lstStyle/>
-          <a:p>
-            <a:pPr indent="0" marL="0">
-              <a:buNone/>
-            </a:pPr>
-            <a:r>
-              <a:rPr lang="en-US" sz="1250" b="1" dirty="0">
-                <a:solidFill>
-                  <a:srgbClr val="14181A"/>
-                </a:solidFill>
-                <a:latin typeface="Calibri" pitchFamily="34" charset="0"/>
-                <a:ea typeface="Calibri" pitchFamily="34" charset="-122"/>
-                <a:cs typeface="Calibri" pitchFamily="34" charset="-120"/>
-              </a:rPr>
-              <a:t>Adaptive LiDAR Scanning</a:t>
-            </a:r>
-            <a:endParaRPr lang="en-US" sz="1250" dirty="0"/>
-          </a:p>
-        </p:txBody>
-      </p:sp>
-      <p:sp>
-        <p:nvSpPr>
-          <p:cNvPr id="21" name="Text 18"/>
-          <p:cNvSpPr txBox="1"/>
-          <p:nvPr/>
-        </p:nvSpPr>
-        <p:spPr>
-          <a:xfrm>
-            <a:off x="6263640" y="3191256"/>
-            <a:ext cx="5577840" cy="457200"/>
-          </a:xfrm>
-          <a:prstGeom prst="rect">
-            <a:avLst/>
-          </a:prstGeom>
-          <a:noFill/>
-          <a:ln/>
-        </p:spPr>
-        <p:txBody>
-          <a:bodyPr wrap="square" lIns="0" tIns="0" rIns="0" bIns="0" rtlCol="0" anchor="ctr"/>
-          <a:lstStyle/>
-          <a:p>
-            <a:pPr indent="0" marL="0">
-              <a:lnSpc>
-                <a:spcPct val="105000"/>
-              </a:lnSpc>
-              <a:buNone/>
-            </a:pPr>
-            <a:r>
-              <a:rPr lang="en-US" sz="1100" dirty="0">
-                <a:solidFill>
-                  <a:srgbClr val="6E7B79"/>
-                </a:solidFill>
-                <a:latin typeface="Calibri" pitchFamily="34" charset="0"/>
-                <a:ea typeface="Calibri" pitchFamily="34" charset="-122"/>
-                <a:cs typeface="Calibri" pitchFamily="34" charset="-120"/>
-              </a:rPr>
-              <a:t>Harnessing Temporal Cues for Efficient 3D Object Detection, 2025</a:t>
-            </a:r>
-            <a:endParaRPr lang="en-US" sz="1100" dirty="0"/>
-          </a:p>
-        </p:txBody>
-      </p:sp>
-      <p:sp>
-        <p:nvSpPr>
-          <p:cNvPr id="22" name="Text 19"/>
-          <p:cNvSpPr txBox="1"/>
-          <p:nvPr/>
-        </p:nvSpPr>
-        <p:spPr>
-          <a:xfrm>
-            <a:off x="6263640" y="3730752"/>
-            <a:ext cx="5577840" cy="256032"/>
-          </a:xfrm>
-          <a:prstGeom prst="rect">
-            <a:avLst/>
-          </a:prstGeom>
-          <a:noFill/>
-          <a:ln/>
-        </p:spPr>
-        <p:txBody>
-          <a:bodyPr wrap="square" lIns="0" tIns="0" rIns="0" bIns="0" rtlCol="0" anchor="ctr"/>
-          <a:lstStyle/>
-          <a:p>
-            <a:pPr indent="0" marL="0">
-              <a:buNone/>
-            </a:pPr>
-            <a:r>
-              <a:rPr lang="en-US" sz="1250" b="1" dirty="0">
-                <a:solidFill>
-                  <a:srgbClr val="14181A"/>
-                </a:solidFill>
-                <a:latin typeface="Calibri" pitchFamily="34" charset="0"/>
-                <a:ea typeface="Calibri" pitchFamily="34" charset="-122"/>
-                <a:cs typeface="Calibri" pitchFamily="34" charset="-120"/>
-              </a:rPr>
-              <a:t>AEye iDAR / 4Sight</a:t>
-            </a:r>
-            <a:endParaRPr lang="en-US" sz="1250" dirty="0"/>
-          </a:p>
-        </p:txBody>
-      </p:sp>
-      <p:sp>
-        <p:nvSpPr>
-          <p:cNvPr id="23" name="Text 20"/>
-          <p:cNvSpPr txBox="1"/>
-          <p:nvPr/>
-        </p:nvSpPr>
-        <p:spPr>
-          <a:xfrm>
-            <a:off x="6263640" y="3977640"/>
-            <a:ext cx="5577840" cy="457200"/>
-          </a:xfrm>
-          <a:prstGeom prst="rect">
-            <a:avLst/>
-          </a:prstGeom>
-          <a:noFill/>
-          <a:ln/>
-        </p:spPr>
-        <p:txBody>
-          <a:bodyPr wrap="square" lIns="0" tIns="0" rIns="0" bIns="0" rtlCol="0" anchor="ctr"/>
-          <a:lstStyle/>
-          <a:p>
-            <a:pPr indent="0" marL="0">
-              <a:lnSpc>
-                <a:spcPct val="105000"/>
-              </a:lnSpc>
-              <a:buNone/>
-            </a:pPr>
-            <a:r>
-              <a:rPr lang="en-US" sz="1100" dirty="0">
-                <a:solidFill>
-                  <a:srgbClr val="6E7B79"/>
-                </a:solidFill>
-                <a:latin typeface="Calibri" pitchFamily="34" charset="0"/>
-                <a:ea typeface="Calibri" pitchFamily="34" charset="-122"/>
-                <a:cs typeface="Calibri" pitchFamily="34" charset="-120"/>
-              </a:rPr>
-              <a:t>US 11675053 · 11782136 · 11860313 — foveated scanning, regions of interest</a:t>
-            </a:r>
-            <a:endParaRPr lang="en-US" sz="1100" dirty="0"/>
-          </a:p>
-        </p:txBody>
-      </p:sp>
-      <p:sp>
-        <p:nvSpPr>
-          <p:cNvPr id="24" name="Text 21"/>
-          <p:cNvSpPr txBox="1"/>
-          <p:nvPr/>
-        </p:nvSpPr>
-        <p:spPr>
-          <a:xfrm>
-            <a:off x="6263640" y="4517136"/>
-            <a:ext cx="5577840" cy="256032"/>
-          </a:xfrm>
-          <a:prstGeom prst="rect">
-            <a:avLst/>
-          </a:prstGeom>
-          <a:noFill/>
-          <a:ln/>
-        </p:spPr>
-        <p:txBody>
-          <a:bodyPr wrap="square" lIns="0" tIns="0" rIns="0" bIns="0" rtlCol="0" anchor="ctr"/>
-          <a:lstStyle/>
-          <a:p>
-            <a:pPr indent="0" marL="0">
-              <a:buNone/>
-            </a:pPr>
-            <a:r>
-              <a:rPr lang="en-US" sz="1250" b="1" dirty="0">
-                <a:solidFill>
-                  <a:srgbClr val="14181A"/>
-                </a:solidFill>
-                <a:latin typeface="Calibri" pitchFamily="34" charset="0"/>
-                <a:ea typeface="Calibri" pitchFamily="34" charset="-122"/>
-                <a:cs typeface="Calibri" pitchFamily="34" charset="-120"/>
-              </a:rPr>
-              <a:t>Larson &amp; Trivedi</a:t>
-            </a:r>
-            <a:endParaRPr lang="en-US" sz="1250" dirty="0"/>
-          </a:p>
-        </p:txBody>
-      </p:sp>
-      <p:sp>
-        <p:nvSpPr>
-          <p:cNvPr id="25" name="Text 22"/>
-          <p:cNvSpPr txBox="1"/>
-          <p:nvPr/>
-        </p:nvSpPr>
-        <p:spPr>
-          <a:xfrm>
-            <a:off x="6263640" y="4764024"/>
-            <a:ext cx="5577840" cy="457200"/>
-          </a:xfrm>
-          <a:prstGeom prst="rect">
-            <a:avLst/>
-          </a:prstGeom>
-          <a:noFill/>
-          <a:ln/>
-        </p:spPr>
-        <p:txBody>
-          <a:bodyPr wrap="square" lIns="0" tIns="0" rIns="0" bIns="0" rtlCol="0" anchor="ctr"/>
-          <a:lstStyle/>
-          <a:p>
-            <a:pPr indent="0" marL="0">
-              <a:lnSpc>
-                <a:spcPct val="105000"/>
-              </a:lnSpc>
-              <a:buNone/>
-            </a:pPr>
-            <a:r>
-              <a:rPr lang="en-US" sz="1100" dirty="0">
-                <a:solidFill>
-                  <a:srgbClr val="6E7B79"/>
-                </a:solidFill>
-                <a:latin typeface="Calibri" pitchFamily="34" charset="0"/>
-                <a:ea typeface="Calibri" pitchFamily="34" charset="-122"/>
-                <a:cs typeface="Calibri" pitchFamily="34" charset="-120"/>
-              </a:rPr>
-              <a:t>Lidar-based off-road negative obstacle detection — DTIC ADA561293</a:t>
-            </a:r>
-            <a:endParaRPr lang="en-US" sz="1100" dirty="0"/>
-          </a:p>
-        </p:txBody>
-      </p:sp>
-      <p:sp>
-        <p:nvSpPr>
-          <p:cNvPr id="26" name="Text 23"/>
-          <p:cNvSpPr txBox="1"/>
-          <p:nvPr/>
-        </p:nvSpPr>
-        <p:spPr>
-          <a:xfrm>
-            <a:off x="6263640" y="5303520"/>
-            <a:ext cx="5577840" cy="256032"/>
-          </a:xfrm>
-          <a:prstGeom prst="rect">
-            <a:avLst/>
-          </a:prstGeom>
-          <a:noFill/>
-          <a:ln/>
-        </p:spPr>
-        <p:txBody>
-          <a:bodyPr wrap="square" lIns="0" tIns="0" rIns="0" bIns="0" rtlCol="0" anchor="ctr"/>
-          <a:lstStyle/>
-          <a:p>
-            <a:pPr indent="0" marL="0">
-              <a:buNone/>
-            </a:pPr>
-            <a:r>
-              <a:rPr lang="en-US" sz="1250" b="1" dirty="0">
-                <a:solidFill>
-                  <a:srgbClr val="14181A"/>
-                </a:solidFill>
-                <a:latin typeface="Calibri" pitchFamily="34" charset="0"/>
-                <a:ea typeface="Calibri" pitchFamily="34" charset="-122"/>
-                <a:cs typeface="Calibri" pitchFamily="34" charset="-120"/>
-              </a:rPr>
-              <a:t>IEEE ROBIO 2024</a:t>
-            </a:r>
-            <a:endParaRPr lang="en-US" sz="1250" dirty="0"/>
-          </a:p>
-        </p:txBody>
-      </p:sp>
-      <p:sp>
-        <p:nvSpPr>
-          <p:cNvPr id="27" name="Text 24"/>
-          <p:cNvSpPr txBox="1"/>
-          <p:nvPr/>
-        </p:nvSpPr>
-        <p:spPr>
-          <a:xfrm>
-            <a:off x="6263640" y="5550408"/>
-            <a:ext cx="5577840" cy="457200"/>
-          </a:xfrm>
-          <a:prstGeom prst="rect">
-            <a:avLst/>
-          </a:prstGeom>
-          <a:noFill/>
-          <a:ln/>
-        </p:spPr>
-        <p:txBody>
-          <a:bodyPr wrap="square" lIns="0" tIns="0" rIns="0" bIns="0" rtlCol="0" anchor="ctr"/>
-          <a:lstStyle/>
-          <a:p>
-            <a:pPr indent="0" marL="0">
-              <a:lnSpc>
-                <a:spcPct val="105000"/>
-              </a:lnSpc>
-              <a:buNone/>
-            </a:pPr>
-            <a:r>
-              <a:rPr lang="en-US" sz="1100" dirty="0">
-                <a:solidFill>
-                  <a:srgbClr val="6E7B79"/>
-                </a:solidFill>
-                <a:latin typeface="Calibri" pitchFamily="34" charset="0"/>
-                <a:ea typeface="Calibri" pitchFamily="34" charset="-122"/>
-                <a:cs typeface="Calibri" pitchFamily="34" charset="-120"/>
-              </a:rPr>
-              <a:t>Negative obstacle detection in off-road environments using sparse 3D lidar</a:t>
-            </a:r>
-            <a:endParaRPr lang="en-US" sz="1100" dirty="0"/>
+              <a:t>sparse 3D lidar, off-road ditches</a:t>
+            </a:r>
+            <a:endParaRPr lang="en-US" sz="1050" dirty="0"/>
           </a:p>
         </p:txBody>
       </p:sp>

--- a/presentation/SIH2026_Raysense_CORRECTED.pptx
+++ b/presentation/SIH2026_Raysense_CORRECTED.pptx
@@ -1639,8 +1639,8 @@
         </p:blipFill>
         <p:spPr>
           <a:xfrm>
-            <a:off x="2624328" y="2761488"/>
-            <a:ext cx="6949440" cy="2146877"/>
+            <a:off x="2350008" y="2834640"/>
+            <a:ext cx="7498080" cy="2020501"/>
           </a:xfrm>
           <a:prstGeom prst="rect">
             <a:avLst/>
@@ -2522,8 +2522,8 @@
         </p:blipFill>
         <p:spPr>
           <a:xfrm>
-            <a:off x="4892040" y="896112"/>
-            <a:ext cx="6903720" cy="3988284"/>
+            <a:off x="4892040" y="1024128"/>
+            <a:ext cx="6903720" cy="3721682"/>
           </a:xfrm>
           <a:prstGeom prst="rect">
             <a:avLst/>
@@ -3163,8 +3163,8 @@
         </p:blipFill>
         <p:spPr>
           <a:xfrm>
-            <a:off x="365760" y="868680"/>
-            <a:ext cx="5440680" cy="3703662"/>
+            <a:off x="365760" y="1033272"/>
+            <a:ext cx="5440680" cy="3413225"/>
           </a:xfrm>
           <a:prstGeom prst="rect">
             <a:avLst/>

--- a/presentation/SIH2026_Raysense_CORRECTED.pptx
+++ b/presentation/SIH2026_Raysense_CORRECTED.pptx
@@ -1328,8 +1328,8 @@
         </p:nvSpPr>
         <p:spPr>
           <a:xfrm>
-            <a:off x="237744" y="128016"/>
-            <a:ext cx="1152144" cy="530352"/>
+            <a:off x="402336" y="329184"/>
+            <a:ext cx="1335024" cy="621792"/>
           </a:xfrm>
           <a:prstGeom prst="ellipse">
             <a:avLst/>
@@ -1337,7 +1337,7 @@
           <a:solidFill>
             <a:srgbClr val="FFFFFF"/>
           </a:solidFill>
-          <a:ln w="15240">
+          <a:ln w="16510">
             <a:solidFill>
               <a:srgbClr val="7A6FA8"/>
             </a:solidFill>
@@ -1353,8 +1353,8 @@
         </p:nvSpPr>
         <p:spPr>
           <a:xfrm>
-            <a:off x="237744" y="128016"/>
-            <a:ext cx="1152144" cy="530352"/>
+            <a:off x="402336" y="329184"/>
+            <a:ext cx="1335024" cy="621792"/>
           </a:xfrm>
           <a:prstGeom prst="rect">
             <a:avLst/>
@@ -1370,7 +1370,7 @@
               <a:buNone/>
             </a:pPr>
             <a:r>
-              <a:rPr lang="en-US" sz="1250" dirty="0">
+              <a:rPr lang="en-US" sz="1350" dirty="0">
                 <a:solidFill>
                   <a:srgbClr val="14181A"/>
                 </a:solidFill>
@@ -1380,7 +1380,7 @@
               </a:rPr>
               <a:t>Raysense</a:t>
             </a:r>
-            <a:endParaRPr lang="en-US" sz="1250" dirty="0"/>
+            <a:endParaRPr lang="en-US" sz="1350" dirty="0"/>
           </a:p>
         </p:txBody>
       </p:sp>
@@ -1400,8 +1400,8 @@
         </p:blipFill>
         <p:spPr>
           <a:xfrm>
-            <a:off x="10469880" y="91440"/>
-            <a:ext cx="1481328" cy="585216"/>
+            <a:off x="9418320" y="274320"/>
+            <a:ext cx="2377440" cy="1137803"/>
           </a:xfrm>
           <a:prstGeom prst="rect">
             <a:avLst/>
@@ -1410,34 +1410,14 @@
       </p:pic>
       <p:sp>
         <p:nvSpPr>
-          <p:cNvPr id="5" name="Shape 2"/>
-          <p:cNvSpPr/>
-          <p:nvPr/>
-        </p:nvSpPr>
-        <p:spPr>
-          <a:xfrm>
-            <a:off x="0" y="6473952"/>
-            <a:ext cx="12191695" cy="384048"/>
-          </a:xfrm>
-          <a:prstGeom prst="rect">
-            <a:avLst/>
-          </a:prstGeom>
-          <a:solidFill>
-            <a:srgbClr val="006FBF"/>
-          </a:solidFill>
-          <a:ln/>
-        </p:spPr>
-      </p:sp>
-      <p:sp>
-        <p:nvSpPr>
-          <p:cNvPr id="6" name="Text 3"/>
-          <p:cNvSpPr txBox="1"/>
-          <p:nvPr/>
-        </p:nvSpPr>
-        <p:spPr>
-          <a:xfrm>
-            <a:off x="0" y="6473952"/>
-            <a:ext cx="12191695" cy="384048"/>
+          <p:cNvPr id="5" name="Text 2"/>
+          <p:cNvSpPr txBox="1"/>
+          <p:nvPr/>
+        </p:nvSpPr>
+        <p:spPr>
+          <a:xfrm>
+            <a:off x="822960" y="1719072"/>
+            <a:ext cx="10543032" cy="365760"/>
           </a:xfrm>
           <a:prstGeom prst="rect">
             <a:avLst/>
@@ -1453,85 +1433,7 @@
               <a:buNone/>
             </a:pPr>
             <a:r>
-              <a:rPr lang="en-US" sz="1100" dirty="0">
-                <a:solidFill>
-                  <a:srgbClr val="FFFFFF"/>
-                </a:solidFill>
-                <a:latin typeface="Calibri" pitchFamily="34" charset="0"/>
-                <a:ea typeface="Calibri" pitchFamily="34" charset="-122"/>
-                <a:cs typeface="Calibri" pitchFamily="34" charset="-120"/>
-              </a:rPr>
-              <a:t>@SIH Idea submission- Template</a:t>
-            </a:r>
-            <a:endParaRPr lang="en-US" sz="1100" dirty="0"/>
-          </a:p>
-        </p:txBody>
-      </p:sp>
-      <p:sp>
-        <p:nvSpPr>
-          <p:cNvPr id="7" name="Text 4"/>
-          <p:cNvSpPr txBox="1"/>
-          <p:nvPr/>
-        </p:nvSpPr>
-        <p:spPr>
-          <a:xfrm>
-            <a:off x="11323015" y="6473952"/>
-            <a:ext cx="502920" cy="384048"/>
-          </a:xfrm>
-          <a:prstGeom prst="rect">
-            <a:avLst/>
-          </a:prstGeom>
-          <a:noFill/>
-          <a:ln/>
-        </p:spPr>
-        <p:txBody>
-          <a:bodyPr wrap="square" rtlCol="0" anchor="ctr"/>
-          <a:lstStyle/>
-          <a:p>
-            <a:pPr algn="r" indent="0" marL="0">
-              <a:buNone/>
-            </a:pPr>
-            <a:r>
-              <a:rPr lang="en-US" sz="1100" b="1" dirty="0">
-                <a:solidFill>
-                  <a:srgbClr val="FFFFFF"/>
-                </a:solidFill>
-                <a:latin typeface="Calibri" pitchFamily="34" charset="0"/>
-                <a:ea typeface="Calibri" pitchFamily="34" charset="-122"/>
-                <a:cs typeface="Calibri" pitchFamily="34" charset="-120"/>
-              </a:rPr>
-              <a:t>1</a:t>
-            </a:r>
-            <a:endParaRPr lang="en-US" sz="1100" dirty="0"/>
-          </a:p>
-        </p:txBody>
-      </p:sp>
-      <p:sp>
-        <p:nvSpPr>
-          <p:cNvPr id="8" name="Text 5"/>
-          <p:cNvSpPr txBox="1"/>
-          <p:nvPr/>
-        </p:nvSpPr>
-        <p:spPr>
-          <a:xfrm>
-            <a:off x="1463040" y="1078992"/>
-            <a:ext cx="9235440" cy="384048"/>
-          </a:xfrm>
-          <a:prstGeom prst="rect">
-            <a:avLst/>
-          </a:prstGeom>
-          <a:noFill/>
-          <a:ln/>
-        </p:spPr>
-        <p:txBody>
-          <a:bodyPr wrap="square" rtlCol="0" anchor="ctr"/>
-          <a:lstStyle/>
-          <a:p>
-            <a:pPr algn="ctr" indent="0" marL="0">
-              <a:buNone/>
-            </a:pPr>
-            <a:r>
-              <a:rPr lang="en-US" sz="1900" b="1" spc="200" kern="0" dirty="0">
+              <a:rPr lang="en-US" sz="1800" b="1" spc="260" kern="0" dirty="0">
                 <a:solidFill>
                   <a:srgbClr val="6E7B79"/>
                 </a:solidFill>
@@ -1541,20 +1443,20 @@
               </a:rPr>
               <a:t>SMART INDIA HACKATHON 2026</a:t>
             </a:r>
-            <a:endParaRPr lang="en-US" sz="1900" dirty="0"/>
-          </a:p>
-        </p:txBody>
-      </p:sp>
-      <p:sp>
-        <p:nvSpPr>
-          <p:cNvPr id="9" name="Text 6"/>
-          <p:cNvSpPr txBox="1"/>
-          <p:nvPr/>
-        </p:nvSpPr>
-        <p:spPr>
-          <a:xfrm>
-            <a:off x="822960" y="1572768"/>
-            <a:ext cx="10515600" cy="658368"/>
+            <a:endParaRPr lang="en-US" sz="1800" dirty="0"/>
+          </a:p>
+        </p:txBody>
+      </p:sp>
+      <p:sp>
+        <p:nvSpPr>
+          <p:cNvPr id="6" name="Text 3"/>
+          <p:cNvSpPr txBox="1"/>
+          <p:nvPr/>
+        </p:nvSpPr>
+        <p:spPr>
+          <a:xfrm>
+            <a:off x="822960" y="2121408"/>
+            <a:ext cx="10543032" cy="256032"/>
           </a:xfrm>
           <a:prstGeom prst="rect">
             <a:avLst/>
@@ -1570,9 +1472,48 @@
               <a:buNone/>
             </a:pPr>
             <a:r>
-              <a:rPr lang="en-US" sz="3300" b="1" dirty="0">
+              <a:rPr lang="en-US" sz="1050" b="1" spc="180" kern="0" dirty="0">
                 <a:solidFill>
                   <a:srgbClr val="006FBF"/>
+                </a:solidFill>
+                <a:latin typeface="Calibri" pitchFamily="34" charset="0"/>
+                <a:ea typeface="Calibri" pitchFamily="34" charset="-122"/>
+                <a:cs typeface="Calibri" pitchFamily="34" charset="-120"/>
+              </a:rPr>
+              <a:t>PROBLEM STATEMENT TITLE</a:t>
+            </a:r>
+            <a:endParaRPr lang="en-US" sz="1050" dirty="0"/>
+          </a:p>
+        </p:txBody>
+      </p:sp>
+      <p:sp>
+        <p:nvSpPr>
+          <p:cNvPr id="7" name="Text 4"/>
+          <p:cNvSpPr txBox="1"/>
+          <p:nvPr/>
+        </p:nvSpPr>
+        <p:spPr>
+          <a:xfrm>
+            <a:off x="822960" y="2395728"/>
+            <a:ext cx="10543032" cy="1280160"/>
+          </a:xfrm>
+          <a:prstGeom prst="rect">
+            <a:avLst/>
+          </a:prstGeom>
+          <a:noFill/>
+          <a:ln/>
+        </p:spPr>
+        <p:txBody>
+          <a:bodyPr wrap="square" rtlCol="0" anchor="ctr"/>
+          <a:lstStyle/>
+          <a:p>
+            <a:pPr algn="ctr" indent="0" marL="0">
+              <a:buNone/>
+            </a:pPr>
+            <a:r>
+              <a:rPr lang="en-US" sz="3100" b="1" dirty="0">
+                <a:solidFill>
+                  <a:srgbClr val="14181A"/>
                 </a:solidFill>
                 <a:latin typeface="Cambria" pitchFamily="34" charset="0"/>
                 <a:ea typeface="Cambria" pitchFamily="34" charset="-122"/>
@@ -1580,36 +1521,14 @@
               </a:rPr>
               <a:t>Adaptive Variable Resolution 2.5D Lidar Mapping</a:t>
             </a:r>
-            <a:endParaRPr lang="en-US" sz="3300" dirty="0"/>
-          </a:p>
-        </p:txBody>
-      </p:sp>
-      <p:sp>
-        <p:nvSpPr>
-          <p:cNvPr id="10" name="Text 7"/>
-          <p:cNvSpPr txBox="1"/>
-          <p:nvPr/>
-        </p:nvSpPr>
-        <p:spPr>
-          <a:xfrm>
-            <a:off x="822960" y="2194560"/>
-            <a:ext cx="10515600" cy="475488"/>
-          </a:xfrm>
-          <a:prstGeom prst="rect">
-            <a:avLst/>
-          </a:prstGeom>
-          <a:noFill/>
-          <a:ln/>
-        </p:spPr>
-        <p:txBody>
-          <a:bodyPr wrap="square" rtlCol="0" anchor="ctr"/>
-          <a:lstStyle/>
+            <a:endParaRPr lang="en-US" sz="3100" dirty="0"/>
+          </a:p>
           <a:p>
             <a:pPr algn="ctr" indent="0" marL="0">
               <a:buNone/>
             </a:pPr>
             <a:r>
-              <a:rPr lang="en-US" sz="2400" dirty="0">
+              <a:rPr lang="en-US" sz="2300" dirty="0">
                 <a:solidFill>
                   <a:srgbClr val="43504F"/>
                 </a:solidFill>
@@ -1619,48 +1538,24 @@
               </a:rPr>
               <a:t>for Dynamic Environment Perception</a:t>
             </a:r>
-            <a:endParaRPr lang="en-US" sz="2400" dirty="0"/>
-          </a:p>
-        </p:txBody>
-      </p:sp>
-      <p:pic>
-        <p:nvPicPr>
-          <p:cNvPr id="11" name="Image 1" descr="deckbuild/fig_threestate.png">    </p:cNvPr>
-          <p:cNvPicPr>
-            <a:picLocks noChangeAspect="1"/>
-          </p:cNvPicPr>
-          <p:nvPr/>
-        </p:nvPicPr>
-        <p:blipFill>
-          <a:blip r:embed="rId2"/>
-          <a:stretch>
-            <a:fillRect/>
-          </a:stretch>
-        </p:blipFill>
-        <p:spPr>
-          <a:xfrm>
-            <a:off x="2350008" y="2834640"/>
-            <a:ext cx="7498080" cy="2020501"/>
-          </a:xfrm>
-          <a:prstGeom prst="rect">
-            <a:avLst/>
-          </a:prstGeom>
-        </p:spPr>
-      </p:pic>
-      <p:sp>
-        <p:nvSpPr>
-          <p:cNvPr id="12" name="Shape 8"/>
+            <a:endParaRPr lang="en-US" sz="3100" dirty="0"/>
+          </a:p>
+        </p:txBody>
+      </p:sp>
+      <p:sp>
+        <p:nvSpPr>
+          <p:cNvPr id="8" name="Shape 5"/>
           <p:cNvSpPr/>
           <p:nvPr/>
         </p:nvSpPr>
         <p:spPr>
           <a:xfrm>
-            <a:off x="868680" y="5120640"/>
-            <a:ext cx="2560320" cy="896112"/>
+            <a:off x="705917" y="4078224"/>
+            <a:ext cx="3410712" cy="932688"/>
           </a:xfrm>
           <a:prstGeom prst="roundRect">
             <a:avLst>
-              <a:gd name="adj" fmla="val 5102"/>
+              <a:gd name="adj" fmla="val 4902"/>
             </a:avLst>
           </a:prstGeom>
           <a:solidFill>
@@ -1676,13 +1571,13 @@
       </p:sp>
       <p:sp>
         <p:nvSpPr>
-          <p:cNvPr id="13" name="Shape 9"/>
+          <p:cNvPr id="9" name="Shape 6"/>
           <p:cNvSpPr/>
           <p:nvPr/>
         </p:nvSpPr>
         <p:spPr>
           <a:xfrm>
-            <a:off x="1033272" y="5440680"/>
+            <a:off x="907085" y="4443984"/>
             <a:ext cx="201168" cy="201168"/>
           </a:xfrm>
           <a:prstGeom prst="ellipse">
@@ -1696,14 +1591,14 @@
       </p:sp>
       <p:sp>
         <p:nvSpPr>
-          <p:cNvPr id="14" name="Text 10"/>
-          <p:cNvSpPr txBox="1"/>
-          <p:nvPr/>
-        </p:nvSpPr>
-        <p:spPr>
-          <a:xfrm>
-            <a:off x="1325880" y="5248656"/>
-            <a:ext cx="2011680" cy="237744"/>
+          <p:cNvPr id="10" name="Text 7"/>
+          <p:cNvSpPr txBox="1"/>
+          <p:nvPr/>
+        </p:nvSpPr>
+        <p:spPr>
+          <a:xfrm>
+            <a:off x="1217981" y="4233672"/>
+            <a:ext cx="2697480" cy="237744"/>
           </a:xfrm>
           <a:prstGeom prst="rect">
             <a:avLst/>
@@ -1719,7 +1614,7 @@
               <a:buNone/>
             </a:pPr>
             <a:r>
-              <a:rPr lang="en-US" sz="950" b="1" spc="100" kern="0" dirty="0">
+              <a:rPr lang="en-US" sz="900" b="1" spc="100" kern="0" dirty="0">
                 <a:solidFill>
                   <a:srgbClr val="6E7B79"/>
                 </a:solidFill>
@@ -1727,22 +1622,22 @@
                 <a:ea typeface="Calibri" pitchFamily="34" charset="-122"/>
                 <a:cs typeface="Calibri" pitchFamily="34" charset="-120"/>
               </a:rPr>
-              <a:t>PS ID</a:t>
-            </a:r>
-            <a:endParaRPr lang="en-US" sz="950" dirty="0"/>
-          </a:p>
-        </p:txBody>
-      </p:sp>
-      <p:sp>
-        <p:nvSpPr>
-          <p:cNvPr id="15" name="Text 11"/>
-          <p:cNvSpPr txBox="1"/>
-          <p:nvPr/>
-        </p:nvSpPr>
-        <p:spPr>
-          <a:xfrm>
-            <a:off x="1325880" y="5486400"/>
-            <a:ext cx="2011680" cy="310896"/>
+              <a:t>PROBLEM STATEMENT ID</a:t>
+            </a:r>
+            <a:endParaRPr lang="en-US" sz="900" dirty="0"/>
+          </a:p>
+        </p:txBody>
+      </p:sp>
+      <p:sp>
+        <p:nvSpPr>
+          <p:cNvPr id="11" name="Text 8"/>
+          <p:cNvSpPr txBox="1"/>
+          <p:nvPr/>
+        </p:nvSpPr>
+        <p:spPr>
+          <a:xfrm>
+            <a:off x="1217981" y="4471416"/>
+            <a:ext cx="2697480" cy="310896"/>
           </a:xfrm>
           <a:prstGeom prst="rect">
             <a:avLst/>
@@ -1774,18 +1669,18 @@
       </p:sp>
       <p:sp>
         <p:nvSpPr>
-          <p:cNvPr id="16" name="Shape 12"/>
+          <p:cNvPr id="12" name="Shape 9"/>
           <p:cNvSpPr/>
           <p:nvPr/>
         </p:nvSpPr>
         <p:spPr>
           <a:xfrm>
-            <a:off x="3611880" y="5120640"/>
-            <a:ext cx="2560320" cy="896112"/>
+            <a:off x="4390949" y="4078224"/>
+            <a:ext cx="3410712" cy="932688"/>
           </a:xfrm>
           <a:prstGeom prst="roundRect">
             <a:avLst>
-              <a:gd name="adj" fmla="val 5102"/>
+              <a:gd name="adj" fmla="val 4902"/>
             </a:avLst>
           </a:prstGeom>
           <a:solidFill>
@@ -1801,13 +1696,13 @@
       </p:sp>
       <p:sp>
         <p:nvSpPr>
-          <p:cNvPr id="17" name="Shape 13"/>
+          <p:cNvPr id="13" name="Shape 10"/>
           <p:cNvSpPr/>
           <p:nvPr/>
         </p:nvSpPr>
         <p:spPr>
           <a:xfrm>
-            <a:off x="3776472" y="5440680"/>
+            <a:off x="4592117" y="4443984"/>
             <a:ext cx="201168" cy="201168"/>
           </a:xfrm>
           <a:prstGeom prst="ellipse">
@@ -1821,14 +1716,14 @@
       </p:sp>
       <p:sp>
         <p:nvSpPr>
-          <p:cNvPr id="18" name="Text 14"/>
-          <p:cNvSpPr txBox="1"/>
-          <p:nvPr/>
-        </p:nvSpPr>
-        <p:spPr>
-          <a:xfrm>
-            <a:off x="4069080" y="5248656"/>
-            <a:ext cx="2011680" cy="237744"/>
+          <p:cNvPr id="14" name="Text 11"/>
+          <p:cNvSpPr txBox="1"/>
+          <p:nvPr/>
+        </p:nvSpPr>
+        <p:spPr>
+          <a:xfrm>
+            <a:off x="4903013" y="4233672"/>
+            <a:ext cx="2697480" cy="237744"/>
           </a:xfrm>
           <a:prstGeom prst="rect">
             <a:avLst/>
@@ -1844,7 +1739,7 @@
               <a:buNone/>
             </a:pPr>
             <a:r>
-              <a:rPr lang="en-US" sz="950" b="1" spc="100" kern="0" dirty="0">
+              <a:rPr lang="en-US" sz="900" b="1" spc="100" kern="0" dirty="0">
                 <a:solidFill>
                   <a:srgbClr val="6E7B79"/>
                 </a:solidFill>
@@ -1854,20 +1749,20 @@
               </a:rPr>
               <a:t>ORGANISATION</a:t>
             </a:r>
-            <a:endParaRPr lang="en-US" sz="950" dirty="0"/>
-          </a:p>
-        </p:txBody>
-      </p:sp>
-      <p:sp>
-        <p:nvSpPr>
-          <p:cNvPr id="19" name="Text 15"/>
-          <p:cNvSpPr txBox="1"/>
-          <p:nvPr/>
-        </p:nvSpPr>
-        <p:spPr>
-          <a:xfrm>
-            <a:off x="4069080" y="5486400"/>
-            <a:ext cx="2011680" cy="310896"/>
+            <a:endParaRPr lang="en-US" sz="900" dirty="0"/>
+          </a:p>
+        </p:txBody>
+      </p:sp>
+      <p:sp>
+        <p:nvSpPr>
+          <p:cNvPr id="15" name="Text 12"/>
+          <p:cNvSpPr txBox="1"/>
+          <p:nvPr/>
+        </p:nvSpPr>
+        <p:spPr>
+          <a:xfrm>
+            <a:off x="4903013" y="4471416"/>
+            <a:ext cx="2697480" cy="310896"/>
           </a:xfrm>
           <a:prstGeom prst="rect">
             <a:avLst/>
@@ -1899,18 +1794,18 @@
       </p:sp>
       <p:sp>
         <p:nvSpPr>
-          <p:cNvPr id="20" name="Shape 16"/>
+          <p:cNvPr id="16" name="Shape 13"/>
           <p:cNvSpPr/>
           <p:nvPr/>
         </p:nvSpPr>
         <p:spPr>
           <a:xfrm>
-            <a:off x="6355080" y="5120640"/>
-            <a:ext cx="2560320" cy="896112"/>
+            <a:off x="8075981" y="4078224"/>
+            <a:ext cx="3410712" cy="932688"/>
           </a:xfrm>
           <a:prstGeom prst="roundRect">
             <a:avLst>
-              <a:gd name="adj" fmla="val 5102"/>
+              <a:gd name="adj" fmla="val 4902"/>
             </a:avLst>
           </a:prstGeom>
           <a:solidFill>
@@ -1926,13 +1821,13 @@
       </p:sp>
       <p:sp>
         <p:nvSpPr>
-          <p:cNvPr id="21" name="Shape 17"/>
+          <p:cNvPr id="17" name="Shape 14"/>
           <p:cNvSpPr/>
           <p:nvPr/>
         </p:nvSpPr>
         <p:spPr>
           <a:xfrm>
-            <a:off x="6519672" y="5440680"/>
+            <a:off x="8277149" y="4443984"/>
             <a:ext cx="201168" cy="201168"/>
           </a:xfrm>
           <a:prstGeom prst="ellipse">
@@ -1946,14 +1841,14 @@
       </p:sp>
       <p:sp>
         <p:nvSpPr>
-          <p:cNvPr id="22" name="Text 18"/>
-          <p:cNvSpPr txBox="1"/>
-          <p:nvPr/>
-        </p:nvSpPr>
-        <p:spPr>
-          <a:xfrm>
-            <a:off x="6812280" y="5248656"/>
-            <a:ext cx="2011680" cy="237744"/>
+          <p:cNvPr id="18" name="Text 15"/>
+          <p:cNvSpPr txBox="1"/>
+          <p:nvPr/>
+        </p:nvSpPr>
+        <p:spPr>
+          <a:xfrm>
+            <a:off x="8588045" y="4233672"/>
+            <a:ext cx="2697480" cy="237744"/>
           </a:xfrm>
           <a:prstGeom prst="rect">
             <a:avLst/>
@@ -1969,7 +1864,7 @@
               <a:buNone/>
             </a:pPr>
             <a:r>
-              <a:rPr lang="en-US" sz="950" b="1" spc="100" kern="0" dirty="0">
+              <a:rPr lang="en-US" sz="900" b="1" spc="100" kern="0" dirty="0">
                 <a:solidFill>
                   <a:srgbClr val="6E7B79"/>
                 </a:solidFill>
@@ -1979,20 +1874,20 @@
               </a:rPr>
               <a:t>THEME</a:t>
             </a:r>
-            <a:endParaRPr lang="en-US" sz="950" dirty="0"/>
-          </a:p>
-        </p:txBody>
-      </p:sp>
-      <p:sp>
-        <p:nvSpPr>
-          <p:cNvPr id="23" name="Text 19"/>
-          <p:cNvSpPr txBox="1"/>
-          <p:nvPr/>
-        </p:nvSpPr>
-        <p:spPr>
-          <a:xfrm>
-            <a:off x="6812280" y="5486400"/>
-            <a:ext cx="2011680" cy="310896"/>
+            <a:endParaRPr lang="en-US" sz="900" dirty="0"/>
+          </a:p>
+        </p:txBody>
+      </p:sp>
+      <p:sp>
+        <p:nvSpPr>
+          <p:cNvPr id="19" name="Text 16"/>
+          <p:cNvSpPr txBox="1"/>
+          <p:nvPr/>
+        </p:nvSpPr>
+        <p:spPr>
+          <a:xfrm>
+            <a:off x="8588045" y="4471416"/>
+            <a:ext cx="2697480" cy="310896"/>
           </a:xfrm>
           <a:prstGeom prst="rect">
             <a:avLst/>
@@ -2016,7 +1911,7 @@
                 <a:ea typeface="Calibri" pitchFamily="34" charset="-122"/>
                 <a:cs typeface="Calibri" pitchFamily="34" charset="-120"/>
               </a:rPr>
-              <a:t>Smart Vehicles</a:t>
+              <a:t>Smart Automation</a:t>
             </a:r>
             <a:endParaRPr lang="en-US" sz="1450" dirty="0"/>
           </a:p>
@@ -2024,18 +1919,18 @@
       </p:sp>
       <p:sp>
         <p:nvSpPr>
-          <p:cNvPr id="24" name="Shape 20"/>
+          <p:cNvPr id="20" name="Shape 17"/>
           <p:cNvSpPr/>
           <p:nvPr/>
         </p:nvSpPr>
         <p:spPr>
           <a:xfrm>
-            <a:off x="9098280" y="5120640"/>
-            <a:ext cx="2560320" cy="896112"/>
+            <a:off x="705917" y="5138928"/>
+            <a:ext cx="3410712" cy="932688"/>
           </a:xfrm>
           <a:prstGeom prst="roundRect">
             <a:avLst>
-              <a:gd name="adj" fmla="val 5102"/>
+              <a:gd name="adj" fmla="val 4902"/>
             </a:avLst>
           </a:prstGeom>
           <a:solidFill>
@@ -2051,13 +1946,13 @@
       </p:sp>
       <p:sp>
         <p:nvSpPr>
-          <p:cNvPr id="25" name="Shape 21"/>
+          <p:cNvPr id="21" name="Shape 18"/>
           <p:cNvSpPr/>
           <p:nvPr/>
         </p:nvSpPr>
         <p:spPr>
           <a:xfrm>
-            <a:off x="9262872" y="5440680"/>
+            <a:off x="907085" y="5504688"/>
             <a:ext cx="201168" cy="201168"/>
           </a:xfrm>
           <a:prstGeom prst="ellipse">
@@ -2071,14 +1966,14 @@
       </p:sp>
       <p:sp>
         <p:nvSpPr>
-          <p:cNvPr id="26" name="Text 22"/>
-          <p:cNvSpPr txBox="1"/>
-          <p:nvPr/>
-        </p:nvSpPr>
-        <p:spPr>
-          <a:xfrm>
-            <a:off x="9555480" y="5248656"/>
-            <a:ext cx="2011680" cy="237744"/>
+          <p:cNvPr id="22" name="Text 19"/>
+          <p:cNvSpPr txBox="1"/>
+          <p:nvPr/>
+        </p:nvSpPr>
+        <p:spPr>
+          <a:xfrm>
+            <a:off x="1217981" y="5294376"/>
+            <a:ext cx="2697480" cy="237744"/>
           </a:xfrm>
           <a:prstGeom prst="rect">
             <a:avLst/>
@@ -2094,7 +1989,7 @@
               <a:buNone/>
             </a:pPr>
             <a:r>
-              <a:rPr lang="en-US" sz="950" b="1" spc="100" kern="0" dirty="0">
+              <a:rPr lang="en-US" sz="900" b="1" spc="100" kern="0" dirty="0">
                 <a:solidFill>
                   <a:srgbClr val="6E7B79"/>
                 </a:solidFill>
@@ -2102,22 +1997,22 @@
                 <a:ea typeface="Calibri" pitchFamily="34" charset="-122"/>
                 <a:cs typeface="Calibri" pitchFamily="34" charset="-120"/>
               </a:rPr>
-              <a:t>CATEGORY</a:t>
-            </a:r>
-            <a:endParaRPr lang="en-US" sz="950" dirty="0"/>
-          </a:p>
-        </p:txBody>
-      </p:sp>
-      <p:sp>
-        <p:nvSpPr>
-          <p:cNvPr id="27" name="Text 23"/>
-          <p:cNvSpPr txBox="1"/>
-          <p:nvPr/>
-        </p:nvSpPr>
-        <p:spPr>
-          <a:xfrm>
-            <a:off x="9555480" y="5486400"/>
-            <a:ext cx="2011680" cy="310896"/>
+              <a:t>PS CATEGORY</a:t>
+            </a:r>
+            <a:endParaRPr lang="en-US" sz="900" dirty="0"/>
+          </a:p>
+        </p:txBody>
+      </p:sp>
+      <p:sp>
+        <p:nvSpPr>
+          <p:cNvPr id="23" name="Text 20"/>
+          <p:cNvSpPr txBox="1"/>
+          <p:nvPr/>
+        </p:nvSpPr>
+        <p:spPr>
+          <a:xfrm>
+            <a:off x="1217981" y="5532120"/>
+            <a:ext cx="2697480" cy="310896"/>
           </a:xfrm>
           <a:prstGeom prst="rect">
             <a:avLst/>
@@ -2149,30 +2044,77 @@
       </p:sp>
       <p:sp>
         <p:nvSpPr>
-          <p:cNvPr id="28" name="Text 24"/>
-          <p:cNvSpPr txBox="1"/>
-          <p:nvPr/>
-        </p:nvSpPr>
-        <p:spPr>
-          <a:xfrm>
-            <a:off x="822960" y="6089904"/>
-            <a:ext cx="10515600" cy="329184"/>
-          </a:xfrm>
-          <a:prstGeom prst="rect">
-            <a:avLst/>
-          </a:prstGeom>
-          <a:noFill/>
-          <a:ln/>
-        </p:spPr>
-        <p:txBody>
-          <a:bodyPr wrap="square" rtlCol="0" anchor="ctr"/>
-          <a:lstStyle/>
-          <a:p>
-            <a:pPr algn="ctr" indent="0" marL="0">
-              <a:buNone/>
-            </a:pPr>
-            <a:r>
-              <a:rPr lang="en-US" sz="1500" b="1" spc="150" kern="0" dirty="0">
+          <p:cNvPr id="24" name="Shape 21"/>
+          <p:cNvSpPr/>
+          <p:nvPr/>
+        </p:nvSpPr>
+        <p:spPr>
+          <a:xfrm>
+            <a:off x="4390949" y="5138928"/>
+            <a:ext cx="3410712" cy="932688"/>
+          </a:xfrm>
+          <a:prstGeom prst="roundRect">
+            <a:avLst>
+              <a:gd name="adj" fmla="val 4902"/>
+            </a:avLst>
+          </a:prstGeom>
+          <a:solidFill>
+            <a:srgbClr val="F6F8F5"/>
+          </a:solidFill>
+          <a:ln w="12700">
+            <a:solidFill>
+              <a:srgbClr val="D9DED6"/>
+            </a:solidFill>
+            <a:prstDash val="solid"/>
+          </a:ln>
+        </p:spPr>
+      </p:sp>
+      <p:sp>
+        <p:nvSpPr>
+          <p:cNvPr id="25" name="Shape 22"/>
+          <p:cNvSpPr/>
+          <p:nvPr/>
+        </p:nvSpPr>
+        <p:spPr>
+          <a:xfrm>
+            <a:off x="4592117" y="5504688"/>
+            <a:ext cx="201168" cy="201168"/>
+          </a:xfrm>
+          <a:prstGeom prst="ellipse">
+            <a:avLst/>
+          </a:prstGeom>
+          <a:solidFill>
+            <a:srgbClr val="D2622A"/>
+          </a:solidFill>
+          <a:ln/>
+        </p:spPr>
+      </p:sp>
+      <p:sp>
+        <p:nvSpPr>
+          <p:cNvPr id="26" name="Text 23"/>
+          <p:cNvSpPr txBox="1"/>
+          <p:nvPr/>
+        </p:nvSpPr>
+        <p:spPr>
+          <a:xfrm>
+            <a:off x="4903013" y="5294376"/>
+            <a:ext cx="2697480" cy="237744"/>
+          </a:xfrm>
+          <a:prstGeom prst="rect">
+            <a:avLst/>
+          </a:prstGeom>
+          <a:noFill/>
+          <a:ln/>
+        </p:spPr>
+        <p:txBody>
+          <a:bodyPr wrap="square" lIns="0" tIns="0" rIns="0" bIns="0" rtlCol="0" anchor="ctr"/>
+          <a:lstStyle/>
+          <a:p>
+            <a:pPr indent="0" marL="0">
+              <a:buNone/>
+            </a:pPr>
+            <a:r>
+              <a:rPr lang="en-US" sz="900" b="1" spc="100" kern="0" dirty="0">
                 <a:solidFill>
                   <a:srgbClr val="6E7B79"/>
                 </a:solidFill>
@@ -2180,9 +2122,173 @@
                 <a:ea typeface="Calibri" pitchFamily="34" charset="-122"/>
                 <a:cs typeface="Calibri" pitchFamily="34" charset="-120"/>
               </a:rPr>
-              <a:t>Team Raysense</a:t>
-            </a:r>
-            <a:endParaRPr lang="en-US" sz="1500" dirty="0"/>
+              <a:t>TEAM ID</a:t>
+            </a:r>
+            <a:endParaRPr lang="en-US" sz="900" dirty="0"/>
+          </a:p>
+        </p:txBody>
+      </p:sp>
+      <p:sp>
+        <p:nvSpPr>
+          <p:cNvPr id="27" name="Text 24"/>
+          <p:cNvSpPr txBox="1"/>
+          <p:nvPr/>
+        </p:nvSpPr>
+        <p:spPr>
+          <a:xfrm>
+            <a:off x="4903013" y="5532120"/>
+            <a:ext cx="2697480" cy="310896"/>
+          </a:xfrm>
+          <a:prstGeom prst="rect">
+            <a:avLst/>
+          </a:prstGeom>
+          <a:noFill/>
+          <a:ln/>
+        </p:spPr>
+        <p:txBody>
+          <a:bodyPr wrap="square" lIns="0" tIns="0" rIns="0" bIns="0" rtlCol="0" anchor="ctr"/>
+          <a:lstStyle/>
+          <a:p>
+            <a:pPr indent="0" marL="0">
+              <a:buNone/>
+            </a:pPr>
+            <a:r>
+              <a:rPr lang="en-US" sz="1450" b="1" dirty="0">
+                <a:solidFill>
+                  <a:srgbClr val="D2622A"/>
+                </a:solidFill>
+                <a:latin typeface="Calibri" pitchFamily="34" charset="0"/>
+                <a:ea typeface="Calibri" pitchFamily="34" charset="-122"/>
+                <a:cs typeface="Calibri" pitchFamily="34" charset="-120"/>
+              </a:rPr>
+              <a:t>ADD FROM PORTAL</a:t>
+            </a:r>
+            <a:endParaRPr lang="en-US" sz="1450" dirty="0"/>
+          </a:p>
+        </p:txBody>
+      </p:sp>
+      <p:sp>
+        <p:nvSpPr>
+          <p:cNvPr id="28" name="Shape 25"/>
+          <p:cNvSpPr/>
+          <p:nvPr/>
+        </p:nvSpPr>
+        <p:spPr>
+          <a:xfrm>
+            <a:off x="8075981" y="5138928"/>
+            <a:ext cx="3410712" cy="932688"/>
+          </a:xfrm>
+          <a:prstGeom prst="roundRect">
+            <a:avLst>
+              <a:gd name="adj" fmla="val 4902"/>
+            </a:avLst>
+          </a:prstGeom>
+          <a:solidFill>
+            <a:srgbClr val="F6F8F5"/>
+          </a:solidFill>
+          <a:ln w="12700">
+            <a:solidFill>
+              <a:srgbClr val="D9DED6"/>
+            </a:solidFill>
+            <a:prstDash val="solid"/>
+          </a:ln>
+        </p:spPr>
+      </p:sp>
+      <p:sp>
+        <p:nvSpPr>
+          <p:cNvPr id="29" name="Shape 26"/>
+          <p:cNvSpPr/>
+          <p:nvPr/>
+        </p:nvSpPr>
+        <p:spPr>
+          <a:xfrm>
+            <a:off x="8277149" y="5504688"/>
+            <a:ext cx="201168" cy="201168"/>
+          </a:xfrm>
+          <a:prstGeom prst="ellipse">
+            <a:avLst/>
+          </a:prstGeom>
+          <a:solidFill>
+            <a:srgbClr val="006FBF"/>
+          </a:solidFill>
+          <a:ln/>
+        </p:spPr>
+      </p:sp>
+      <p:sp>
+        <p:nvSpPr>
+          <p:cNvPr id="30" name="Text 27"/>
+          <p:cNvSpPr txBox="1"/>
+          <p:nvPr/>
+        </p:nvSpPr>
+        <p:spPr>
+          <a:xfrm>
+            <a:off x="8588045" y="5294376"/>
+            <a:ext cx="2697480" cy="237744"/>
+          </a:xfrm>
+          <a:prstGeom prst="rect">
+            <a:avLst/>
+          </a:prstGeom>
+          <a:noFill/>
+          <a:ln/>
+        </p:spPr>
+        <p:txBody>
+          <a:bodyPr wrap="square" lIns="0" tIns="0" rIns="0" bIns="0" rtlCol="0" anchor="ctr"/>
+          <a:lstStyle/>
+          <a:p>
+            <a:pPr indent="0" marL="0">
+              <a:buNone/>
+            </a:pPr>
+            <a:r>
+              <a:rPr lang="en-US" sz="900" b="1" spc="100" kern="0" dirty="0">
+                <a:solidFill>
+                  <a:srgbClr val="6E7B79"/>
+                </a:solidFill>
+                <a:latin typeface="Calibri" pitchFamily="34" charset="0"/>
+                <a:ea typeface="Calibri" pitchFamily="34" charset="-122"/>
+                <a:cs typeface="Calibri" pitchFamily="34" charset="-120"/>
+              </a:rPr>
+              <a:t>TEAM NAME</a:t>
+            </a:r>
+            <a:endParaRPr lang="en-US" sz="900" dirty="0"/>
+          </a:p>
+        </p:txBody>
+      </p:sp>
+      <p:sp>
+        <p:nvSpPr>
+          <p:cNvPr id="31" name="Text 28"/>
+          <p:cNvSpPr txBox="1"/>
+          <p:nvPr/>
+        </p:nvSpPr>
+        <p:spPr>
+          <a:xfrm>
+            <a:off x="8588045" y="5532120"/>
+            <a:ext cx="2697480" cy="310896"/>
+          </a:xfrm>
+          <a:prstGeom prst="rect">
+            <a:avLst/>
+          </a:prstGeom>
+          <a:noFill/>
+          <a:ln/>
+        </p:spPr>
+        <p:txBody>
+          <a:bodyPr wrap="square" lIns="0" tIns="0" rIns="0" bIns="0" rtlCol="0" anchor="ctr"/>
+          <a:lstStyle/>
+          <a:p>
+            <a:pPr indent="0" marL="0">
+              <a:buNone/>
+            </a:pPr>
+            <a:r>
+              <a:rPr lang="en-US" sz="1450" b="1" dirty="0">
+                <a:solidFill>
+                  <a:srgbClr val="14181A"/>
+                </a:solidFill>
+                <a:latin typeface="Calibri" pitchFamily="34" charset="0"/>
+                <a:ea typeface="Calibri" pitchFamily="34" charset="-122"/>
+                <a:cs typeface="Calibri" pitchFamily="34" charset="-120"/>
+              </a:rPr>
+              <a:t>Raysense</a:t>
+            </a:r>
+            <a:endParaRPr lang="en-US" sz="1450" dirty="0"/>
           </a:p>
         </p:txBody>
       </p:sp>
@@ -2298,8 +2404,8 @@
         </p:blipFill>
         <p:spPr>
           <a:xfrm>
-            <a:off x="10469880" y="91440"/>
-            <a:ext cx="1481328" cy="585216"/>
+            <a:off x="10442448" y="91440"/>
+            <a:ext cx="1517904" cy="726444"/>
           </a:xfrm>
           <a:prstGeom prst="rect">
             <a:avLst/>
@@ -3002,8 +3108,8 @@
         </p:blipFill>
         <p:spPr>
           <a:xfrm>
-            <a:off x="10469880" y="91440"/>
-            <a:ext cx="1481328" cy="585216"/>
+            <a:off x="10442448" y="91440"/>
+            <a:ext cx="1517904" cy="726444"/>
           </a:xfrm>
           <a:prstGeom prst="rect">
             <a:avLst/>
@@ -3784,8 +3890,8 @@
         </p:blipFill>
         <p:spPr>
           <a:xfrm>
-            <a:off x="10469880" y="91440"/>
-            <a:ext cx="1481328" cy="585216"/>
+            <a:off x="10442448" y="91440"/>
+            <a:ext cx="1517904" cy="726444"/>
           </a:xfrm>
           <a:prstGeom prst="rect">
             <a:avLst/>
@@ -4719,8 +4825,8 @@
         </p:blipFill>
         <p:spPr>
           <a:xfrm>
-            <a:off x="10469880" y="91440"/>
-            <a:ext cx="1481328" cy="585216"/>
+            <a:off x="10442448" y="91440"/>
+            <a:ext cx="1517904" cy="726444"/>
           </a:xfrm>
           <a:prstGeom prst="rect">
             <a:avLst/>
@@ -5477,8 +5583,8 @@
         </p:blipFill>
         <p:spPr>
           <a:xfrm>
-            <a:off x="10469880" y="91440"/>
-            <a:ext cx="1481328" cy="585216"/>
+            <a:off x="10442448" y="91440"/>
+            <a:ext cx="1517904" cy="726444"/>
           </a:xfrm>
           <a:prstGeom prst="rect">
             <a:avLst/>

--- a/presentation/SIH2026_Raysense_CORRECTED.pptx
+++ b/presentation/SIH2026_Raysense_CORRECTED.pptx
@@ -3514,7 +3514,7 @@
                 <a:ea typeface="Calibri" pitchFamily="34" charset="-122"/>
                 <a:cs typeface="Calibri" pitchFamily="34" charset="-120"/>
               </a:rPr>
-              <a:t>Python · NumPy · Numba</a:t>
+              <a:t>Python 3.11 · NumPy</a:t>
             </a:r>
             <a:endParaRPr lang="en-US" sz="1100" dirty="0"/>
           </a:p>
@@ -3600,7 +3600,7 @@
                 <a:ea typeface="Calibri" pitchFamily="34" charset="-122"/>
                 <a:cs typeface="Calibri" pitchFamily="34" charset="-120"/>
               </a:rPr>
-              <a:t>Open3D · quadtree map</a:t>
+              <a:t>Fixed-grid 2.5D map</a:t>
             </a:r>
             <a:endParaRPr lang="en-US" sz="1100" dirty="0"/>
           </a:p>
@@ -3686,7 +3686,7 @@
                 <a:ea typeface="Calibri" pitchFamily="34" charset="-122"/>
                 <a:cs typeface="Calibri" pitchFamily="34" charset="-120"/>
               </a:rPr>
-              <a:t>3 sensor backends</a:t>
+              <a:t>Replay + live-sensor seam</a:t>
             </a:r>
             <a:endParaRPr lang="en-US" sz="1100" dirty="0"/>
           </a:p>
@@ -3772,7 +3772,7 @@
                 <a:ea typeface="Calibri" pitchFamily="34" charset="-122"/>
                 <a:cs typeface="Calibri" pitchFamily="34" charset="-120"/>
               </a:rPr>
-              <a:t>43 ms / frame</a:t>
+              <a:t>43 ms / frame · CPU</a:t>
             </a:r>
             <a:endParaRPr lang="en-US" sz="1100" dirty="0"/>
           </a:p>

--- a/presentation/SIH2026_Raysense_CORRECTED.pptx
+++ b/presentation/SIH2026_Raysense_CORRECTED.pptx
@@ -3772,7 +3772,7 @@
                 <a:ea typeface="Calibri" pitchFamily="34" charset="-122"/>
                 <a:cs typeface="Calibri" pitchFamily="34" charset="-120"/>
               </a:rPr>
-              <a:t>43 ms / frame · CPU</a:t>
+              <a:t>1.5 ms / frame at 5%</a:t>
             </a:r>
             <a:endParaRPr lang="en-US" sz="1100" dirty="0"/>
           </a:p>

--- a/presentation/SIH2026_Raysense_CORRECTED.pptx
+++ b/presentation/SIH2026_Raysense_CORRECTED.pptx
@@ -4458,7 +4458,7 @@
                 <a:ea typeface="Calibri" pitchFamily="34" charset="-122"/>
                 <a:cs typeface="Calibri" pitchFamily="34" charset="-120"/>
               </a:rPr>
-              <a:t>73%</a:t>
+              <a:t>79%</a:t>
             </a:r>
             <a:endParaRPr lang="en-US" sz="2600" dirty="0"/>
           </a:p>
@@ -4497,7 +4497,7 @@
                 <a:ea typeface="Calibri" pitchFamily="34" charset="-122"/>
                 <a:cs typeface="Calibri" pitchFamily="34" charset="-120"/>
               </a:rPr>
-              <a:t>precision, not 100% — crest occlusions</a:t>
+              <a:t>precision — 5 false cells, not 436</a:t>
             </a:r>
             <a:endParaRPr lang="en-US" sz="1150" dirty="0"/>
           </a:p>
@@ -4707,7 +4707,7 @@
                 <a:ea typeface="Calibri" pitchFamily="34" charset="-122"/>
                 <a:cs typeface="Calibri" pitchFamily="34" charset="-120"/>
               </a:rPr>
-              <a:t>Jetson benchmark — we will not quote one</a:t>
+              <a:t>Jetson run — 1.5 ms measured on x86 only</a:t>
             </a:r>
             <a:endParaRPr lang="en-US" sz="1150" dirty="0"/>
           </a:p>
